--- a/pitch/OpsGenie_Pitch_Deck.pptx
+++ b/pitch/OpsGenie_Pitch_Deck.pptx
@@ -1,29 +1,29 @@
 
 <file path=ppt/presentation.xml><?xml version="1.0" encoding="utf-8"?>
-<p:presentation xmlns:a="http://schemas.openxmlformats.org/drawingml/2006/main" xmlns:r="http://schemas.openxmlformats.org/officeDocument/2006/relationships" xmlns:p="http://schemas.openxmlformats.org/presentationml/2006/main" saveSubsetFonts="1" autoCompressPictures="0">
+<p:presentation xmlns:a="http://schemas.openxmlformats.org/drawingml/2006/main" xmlns:r="http://schemas.openxmlformats.org/officeDocument/2006/relationships" xmlns:p="http://schemas.openxmlformats.org/presentationml/2006/main" autoCompressPictures="0">
   <p:sldMasterIdLst>
     <p:sldMasterId id="2147483648" r:id="rId1"/>
   </p:sldMasterIdLst>
   <p:sldIdLst>
-    <p:sldId id="256" r:id="rId7"/>
-    <p:sldId id="257" r:id="rId8"/>
-    <p:sldId id="258" r:id="rId9"/>
-    <p:sldId id="259" r:id="rId10"/>
-    <p:sldId id="260" r:id="rId11"/>
-    <p:sldId id="261" r:id="rId12"/>
-    <p:sldId id="262" r:id="rId13"/>
-    <p:sldId id="263" r:id="rId14"/>
-    <p:sldId id="264" r:id="rId15"/>
-    <p:sldId id="265" r:id="rId16"/>
-    <p:sldId id="266" r:id="rId17"/>
-    <p:sldId id="267" r:id="rId18"/>
-    <p:sldId id="268" r:id="rId19"/>
-    <p:sldId id="269" r:id="rId20"/>
-    <p:sldId id="270" r:id="rId21"/>
-    <p:sldId id="271" r:id="rId22"/>
-    <p:sldId id="272" r:id="rId23"/>
+    <p:sldId id="256" r:id="rId3"/>
+    <p:sldId id="257" r:id="rId4"/>
+    <p:sldId id="258" r:id="rId5"/>
+    <p:sldId id="259" r:id="rId6"/>
+    <p:sldId id="260" r:id="rId7"/>
+    <p:sldId id="261" r:id="rId8"/>
+    <p:sldId id="262" r:id="rId9"/>
+    <p:sldId id="263" r:id="rId10"/>
+    <p:sldId id="264" r:id="rId11"/>
+    <p:sldId id="265" r:id="rId12"/>
+    <p:sldId id="266" r:id="rId13"/>
+    <p:sldId id="267" r:id="rId14"/>
+    <p:sldId id="268" r:id="rId15"/>
+    <p:sldId id="269" r:id="rId16"/>
+    <p:sldId id="270" r:id="rId17"/>
+    <p:sldId id="271" r:id="rId18"/>
+    <p:sldId id="272" r:id="rId19"/>
   </p:sldIdLst>
-  <p:sldSz cx="12191695" cy="6858000" type="screen4x3"/>
+  <p:sldSz cx="12191365" cy="6858000" type="screen4x3"/>
   <p:notesSz cx="6858000" cy="9144000"/>
   <p:defaultTextStyle>
     <a:defPPr>
@@ -120,6 +120,22 @@
       </a:defRPr>
     </a:lvl9pPr>
   </p:defaultTextStyle>
+  <p:extLst>
+    <p:ext uri="{EFAFB233-063F-42B5-8137-9DF3F51BA10A}">
+      <p15:sldGuideLst xmlns:p15="http://schemas.microsoft.com/office/powerpoint/2012/main">
+        <p15:guide id="1" orient="horz" pos="2160" userDrawn="1">
+          <p15:clr>
+            <a:srgbClr val="A4A3A4"/>
+          </p15:clr>
+        </p15:guide>
+        <p15:guide id="2" pos="2880" userDrawn="1">
+          <p15:clr>
+            <a:srgbClr val="A4A3A4"/>
+          </p15:clr>
+        </p15:guide>
+      </p15:sldGuideLst>
+    </p:ext>
+  </p:extLst>
 </p:presentation>
 </file>
 
@@ -304,7 +320,6 @@
           <a:p>
             <a:fld id="{5BCAD085-E8A6-8845-BD4E-CB4CCA059FC4}" type="datetimeFigureOut">
               <a:rPr lang="en-US" smtClean="0"/>
-              <a:t>1/27/13</a:t>
             </a:fld>
             <a:endParaRPr lang="en-US"/>
           </a:p>
@@ -346,18 +361,12 @@
           <a:p>
             <a:fld id="{C1FF6DA9-008F-8B48-92A6-B652298478BF}" type="slidenum">
               <a:rPr lang="en-US" smtClean="0"/>
-              <a:t>‹#›</a:t>
             </a:fld>
             <a:endParaRPr lang="en-US"/>
           </a:p>
         </p:txBody>
       </p:sp>
     </p:spTree>
-    <p:extLst>
-      <p:ext uri="{BB962C8B-B14F-4D97-AF65-F5344CB8AC3E}">
-        <p14:creationId xmlns:p14="http://schemas.microsoft.com/office/powerpoint/2010/main" val="3168075583"/>
-      </p:ext>
-    </p:extLst>
   </p:cSld>
   <p:clrMapOvr>
     <a:masterClrMapping/>
@@ -425,6 +434,7 @@
               <a:rPr lang="en-US" smtClean="0"/>
               <a:t>Click to edit Master text styles</a:t>
             </a:r>
+            <a:endParaRPr lang="en-US" smtClean="0"/>
           </a:p>
           <a:p>
             <a:pPr lvl="1"/>
@@ -432,6 +442,7 @@
               <a:rPr lang="en-US" smtClean="0"/>
               <a:t>Second level</a:t>
             </a:r>
+            <a:endParaRPr lang="en-US" smtClean="0"/>
           </a:p>
           <a:p>
             <a:pPr lvl="2"/>
@@ -439,6 +450,7 @@
               <a:rPr lang="en-US" smtClean="0"/>
               <a:t>Third level</a:t>
             </a:r>
+            <a:endParaRPr lang="en-US" smtClean="0"/>
           </a:p>
           <a:p>
             <a:pPr lvl="3"/>
@@ -446,6 +458,7 @@
               <a:rPr lang="en-US" smtClean="0"/>
               <a:t>Fourth level</a:t>
             </a:r>
+            <a:endParaRPr lang="en-US" smtClean="0"/>
           </a:p>
           <a:p>
             <a:pPr lvl="4"/>
@@ -474,7 +487,6 @@
           <a:p>
             <a:fld id="{5BCAD085-E8A6-8845-BD4E-CB4CCA059FC4}" type="datetimeFigureOut">
               <a:rPr lang="en-US" smtClean="0"/>
-              <a:t>1/27/13</a:t>
             </a:fld>
             <a:endParaRPr lang="en-US"/>
           </a:p>
@@ -516,18 +528,12 @@
           <a:p>
             <a:fld id="{C1FF6DA9-008F-8B48-92A6-B652298478BF}" type="slidenum">
               <a:rPr lang="en-US" smtClean="0"/>
-              <a:t>‹#›</a:t>
             </a:fld>
             <a:endParaRPr lang="en-US"/>
           </a:p>
         </p:txBody>
       </p:sp>
     </p:spTree>
-    <p:extLst>
-      <p:ext uri="{BB962C8B-B14F-4D97-AF65-F5344CB8AC3E}">
-        <p14:creationId xmlns:p14="http://schemas.microsoft.com/office/powerpoint/2010/main" val="2910927964"/>
-      </p:ext>
-    </p:extLst>
   </p:cSld>
   <p:clrMapOvr>
     <a:masterClrMapping/>
@@ -605,6 +611,7 @@
               <a:rPr lang="en-US" smtClean="0"/>
               <a:t>Click to edit Master text styles</a:t>
             </a:r>
+            <a:endParaRPr lang="en-US" smtClean="0"/>
           </a:p>
           <a:p>
             <a:pPr lvl="1"/>
@@ -612,6 +619,7 @@
               <a:rPr lang="en-US" smtClean="0"/>
               <a:t>Second level</a:t>
             </a:r>
+            <a:endParaRPr lang="en-US" smtClean="0"/>
           </a:p>
           <a:p>
             <a:pPr lvl="2"/>
@@ -619,6 +627,7 @@
               <a:rPr lang="en-US" smtClean="0"/>
               <a:t>Third level</a:t>
             </a:r>
+            <a:endParaRPr lang="en-US" smtClean="0"/>
           </a:p>
           <a:p>
             <a:pPr lvl="3"/>
@@ -626,6 +635,7 @@
               <a:rPr lang="en-US" smtClean="0"/>
               <a:t>Fourth level</a:t>
             </a:r>
+            <a:endParaRPr lang="en-US" smtClean="0"/>
           </a:p>
           <a:p>
             <a:pPr lvl="4"/>
@@ -654,7 +664,6 @@
           <a:p>
             <a:fld id="{5BCAD085-E8A6-8845-BD4E-CB4CCA059FC4}" type="datetimeFigureOut">
               <a:rPr lang="en-US" smtClean="0"/>
-              <a:t>1/27/13</a:t>
             </a:fld>
             <a:endParaRPr lang="en-US"/>
           </a:p>
@@ -696,18 +705,12 @@
           <a:p>
             <a:fld id="{C1FF6DA9-008F-8B48-92A6-B652298478BF}" type="slidenum">
               <a:rPr lang="en-US" smtClean="0"/>
-              <a:t>‹#›</a:t>
             </a:fld>
             <a:endParaRPr lang="en-US"/>
           </a:p>
         </p:txBody>
       </p:sp>
     </p:spTree>
-    <p:extLst>
-      <p:ext uri="{BB962C8B-B14F-4D97-AF65-F5344CB8AC3E}">
-        <p14:creationId xmlns:p14="http://schemas.microsoft.com/office/powerpoint/2010/main" val="3612223792"/>
-      </p:ext>
-    </p:extLst>
   </p:cSld>
   <p:clrMapOvr>
     <a:masterClrMapping/>
@@ -775,6 +778,7 @@
               <a:rPr lang="en-US" smtClean="0"/>
               <a:t>Click to edit Master text styles</a:t>
             </a:r>
+            <a:endParaRPr lang="en-US" smtClean="0"/>
           </a:p>
           <a:p>
             <a:pPr lvl="1"/>
@@ -782,6 +786,7 @@
               <a:rPr lang="en-US" smtClean="0"/>
               <a:t>Second level</a:t>
             </a:r>
+            <a:endParaRPr lang="en-US" smtClean="0"/>
           </a:p>
           <a:p>
             <a:pPr lvl="2"/>
@@ -789,6 +794,7 @@
               <a:rPr lang="en-US" smtClean="0"/>
               <a:t>Third level</a:t>
             </a:r>
+            <a:endParaRPr lang="en-US" smtClean="0"/>
           </a:p>
           <a:p>
             <a:pPr lvl="3"/>
@@ -796,6 +802,7 @@
               <a:rPr lang="en-US" smtClean="0"/>
               <a:t>Fourth level</a:t>
             </a:r>
+            <a:endParaRPr lang="en-US" smtClean="0"/>
           </a:p>
           <a:p>
             <a:pPr lvl="4"/>
@@ -824,7 +831,6 @@
           <a:p>
             <a:fld id="{5BCAD085-E8A6-8845-BD4E-CB4CCA059FC4}" type="datetimeFigureOut">
               <a:rPr lang="en-US" smtClean="0"/>
-              <a:t>1/27/13</a:t>
             </a:fld>
             <a:endParaRPr lang="en-US"/>
           </a:p>
@@ -866,18 +872,12 @@
           <a:p>
             <a:fld id="{C1FF6DA9-008F-8B48-92A6-B652298478BF}" type="slidenum">
               <a:rPr lang="en-US" smtClean="0"/>
-              <a:t>‹#›</a:t>
             </a:fld>
             <a:endParaRPr lang="en-US"/>
           </a:p>
         </p:txBody>
       </p:sp>
     </p:spTree>
-    <p:extLst>
-      <p:ext uri="{BB962C8B-B14F-4D97-AF65-F5344CB8AC3E}">
-        <p14:creationId xmlns:p14="http://schemas.microsoft.com/office/powerpoint/2010/main" val="2614314258"/>
-      </p:ext>
-    </p:extLst>
   </p:cSld>
   <p:clrMapOvr>
     <a:masterClrMapping/>
@@ -1050,6 +1050,7 @@
               <a:rPr lang="en-US" smtClean="0"/>
               <a:t>Click to edit Master text styles</a:t>
             </a:r>
+            <a:endParaRPr lang="en-US" smtClean="0"/>
           </a:p>
         </p:txBody>
       </p:sp>
@@ -1070,7 +1071,6 @@
           <a:p>
             <a:fld id="{5BCAD085-E8A6-8845-BD4E-CB4CCA059FC4}" type="datetimeFigureOut">
               <a:rPr lang="en-US" smtClean="0"/>
-              <a:t>1/27/13</a:t>
             </a:fld>
             <a:endParaRPr lang="en-US"/>
           </a:p>
@@ -1112,18 +1112,12 @@
           <a:p>
             <a:fld id="{C1FF6DA9-008F-8B48-92A6-B652298478BF}" type="slidenum">
               <a:rPr lang="en-US" smtClean="0"/>
-              <a:t>‹#›</a:t>
             </a:fld>
             <a:endParaRPr lang="en-US"/>
           </a:p>
         </p:txBody>
       </p:sp>
     </p:spTree>
-    <p:extLst>
-      <p:ext uri="{BB962C8B-B14F-4D97-AF65-F5344CB8AC3E}">
-        <p14:creationId xmlns:p14="http://schemas.microsoft.com/office/powerpoint/2010/main" val="960648375"/>
-      </p:ext>
-    </p:extLst>
   </p:cSld>
   <p:clrMapOvr>
     <a:masterClrMapping/>
@@ -1224,6 +1218,7 @@
               <a:rPr lang="en-US" smtClean="0"/>
               <a:t>Click to edit Master text styles</a:t>
             </a:r>
+            <a:endParaRPr lang="en-US" smtClean="0"/>
           </a:p>
           <a:p>
             <a:pPr lvl="1"/>
@@ -1231,6 +1226,7 @@
               <a:rPr lang="en-US" smtClean="0"/>
               <a:t>Second level</a:t>
             </a:r>
+            <a:endParaRPr lang="en-US" smtClean="0"/>
           </a:p>
           <a:p>
             <a:pPr lvl="2"/>
@@ -1238,6 +1234,7 @@
               <a:rPr lang="en-US" smtClean="0"/>
               <a:t>Third level</a:t>
             </a:r>
+            <a:endParaRPr lang="en-US" smtClean="0"/>
           </a:p>
           <a:p>
             <a:pPr lvl="3"/>
@@ -1245,6 +1242,7 @@
               <a:rPr lang="en-US" smtClean="0"/>
               <a:t>Fourth level</a:t>
             </a:r>
+            <a:endParaRPr lang="en-US" smtClean="0"/>
           </a:p>
           <a:p>
             <a:pPr lvl="4"/>
@@ -1309,6 +1307,7 @@
               <a:rPr lang="en-US" smtClean="0"/>
               <a:t>Click to edit Master text styles</a:t>
             </a:r>
+            <a:endParaRPr lang="en-US" smtClean="0"/>
           </a:p>
           <a:p>
             <a:pPr lvl="1"/>
@@ -1316,6 +1315,7 @@
               <a:rPr lang="en-US" smtClean="0"/>
               <a:t>Second level</a:t>
             </a:r>
+            <a:endParaRPr lang="en-US" smtClean="0"/>
           </a:p>
           <a:p>
             <a:pPr lvl="2"/>
@@ -1323,6 +1323,7 @@
               <a:rPr lang="en-US" smtClean="0"/>
               <a:t>Third level</a:t>
             </a:r>
+            <a:endParaRPr lang="en-US" smtClean="0"/>
           </a:p>
           <a:p>
             <a:pPr lvl="3"/>
@@ -1330,6 +1331,7 @@
               <a:rPr lang="en-US" smtClean="0"/>
               <a:t>Fourth level</a:t>
             </a:r>
+            <a:endParaRPr lang="en-US" smtClean="0"/>
           </a:p>
           <a:p>
             <a:pPr lvl="4"/>
@@ -1358,7 +1360,6 @@
           <a:p>
             <a:fld id="{5BCAD085-E8A6-8845-BD4E-CB4CCA059FC4}" type="datetimeFigureOut">
               <a:rPr lang="en-US" smtClean="0"/>
-              <a:t>1/27/13</a:t>
             </a:fld>
             <a:endParaRPr lang="en-US"/>
           </a:p>
@@ -1400,18 +1401,12 @@
           <a:p>
             <a:fld id="{C1FF6DA9-008F-8B48-92A6-B652298478BF}" type="slidenum">
               <a:rPr lang="en-US" smtClean="0"/>
-              <a:t>‹#›</a:t>
             </a:fld>
             <a:endParaRPr lang="en-US"/>
           </a:p>
         </p:txBody>
       </p:sp>
     </p:spTree>
-    <p:extLst>
-      <p:ext uri="{BB962C8B-B14F-4D97-AF65-F5344CB8AC3E}">
-        <p14:creationId xmlns:p14="http://schemas.microsoft.com/office/powerpoint/2010/main" val="2782244947"/>
-      </p:ext>
-    </p:extLst>
   </p:cSld>
   <p:clrMapOvr>
     <a:masterClrMapping/>
@@ -1525,6 +1520,7 @@
               <a:rPr lang="en-US" smtClean="0"/>
               <a:t>Click to edit Master text styles</a:t>
             </a:r>
+            <a:endParaRPr lang="en-US" smtClean="0"/>
           </a:p>
         </p:txBody>
       </p:sp>
@@ -1581,6 +1577,7 @@
               <a:rPr lang="en-US" smtClean="0"/>
               <a:t>Click to edit Master text styles</a:t>
             </a:r>
+            <a:endParaRPr lang="en-US" smtClean="0"/>
           </a:p>
           <a:p>
             <a:pPr lvl="1"/>
@@ -1588,6 +1585,7 @@
               <a:rPr lang="en-US" smtClean="0"/>
               <a:t>Second level</a:t>
             </a:r>
+            <a:endParaRPr lang="en-US" smtClean="0"/>
           </a:p>
           <a:p>
             <a:pPr lvl="2"/>
@@ -1595,6 +1593,7 @@
               <a:rPr lang="en-US" smtClean="0"/>
               <a:t>Third level</a:t>
             </a:r>
+            <a:endParaRPr lang="en-US" smtClean="0"/>
           </a:p>
           <a:p>
             <a:pPr lvl="3"/>
@@ -1602,6 +1601,7 @@
               <a:rPr lang="en-US" smtClean="0"/>
               <a:t>Fourth level</a:t>
             </a:r>
+            <a:endParaRPr lang="en-US" smtClean="0"/>
           </a:p>
           <a:p>
             <a:pPr lvl="4"/>
@@ -1675,6 +1675,7 @@
               <a:rPr lang="en-US" smtClean="0"/>
               <a:t>Click to edit Master text styles</a:t>
             </a:r>
+            <a:endParaRPr lang="en-US" smtClean="0"/>
           </a:p>
         </p:txBody>
       </p:sp>
@@ -1731,6 +1732,7 @@
               <a:rPr lang="en-US" smtClean="0"/>
               <a:t>Click to edit Master text styles</a:t>
             </a:r>
+            <a:endParaRPr lang="en-US" smtClean="0"/>
           </a:p>
           <a:p>
             <a:pPr lvl="1"/>
@@ -1738,6 +1740,7 @@
               <a:rPr lang="en-US" smtClean="0"/>
               <a:t>Second level</a:t>
             </a:r>
+            <a:endParaRPr lang="en-US" smtClean="0"/>
           </a:p>
           <a:p>
             <a:pPr lvl="2"/>
@@ -1745,6 +1748,7 @@
               <a:rPr lang="en-US" smtClean="0"/>
               <a:t>Third level</a:t>
             </a:r>
+            <a:endParaRPr lang="en-US" smtClean="0"/>
           </a:p>
           <a:p>
             <a:pPr lvl="3"/>
@@ -1752,6 +1756,7 @@
               <a:rPr lang="en-US" smtClean="0"/>
               <a:t>Fourth level</a:t>
             </a:r>
+            <a:endParaRPr lang="en-US" smtClean="0"/>
           </a:p>
           <a:p>
             <a:pPr lvl="4"/>
@@ -1780,7 +1785,6 @@
           <a:p>
             <a:fld id="{5BCAD085-E8A6-8845-BD4E-CB4CCA059FC4}" type="datetimeFigureOut">
               <a:rPr lang="en-US" smtClean="0"/>
-              <a:t>1/27/13</a:t>
             </a:fld>
             <a:endParaRPr lang="en-US"/>
           </a:p>
@@ -1822,18 +1826,12 @@
           <a:p>
             <a:fld id="{C1FF6DA9-008F-8B48-92A6-B652298478BF}" type="slidenum">
               <a:rPr lang="en-US" smtClean="0"/>
-              <a:t>‹#›</a:t>
             </a:fld>
             <a:endParaRPr lang="en-US"/>
           </a:p>
         </p:txBody>
       </p:sp>
     </p:spTree>
-    <p:extLst>
-      <p:ext uri="{BB962C8B-B14F-4D97-AF65-F5344CB8AC3E}">
-        <p14:creationId xmlns:p14="http://schemas.microsoft.com/office/powerpoint/2010/main" val="990158736"/>
-      </p:ext>
-    </p:extLst>
   </p:cSld>
   <p:clrMapOvr>
     <a:masterClrMapping/>
@@ -1898,7 +1896,6 @@
           <a:p>
             <a:fld id="{5BCAD085-E8A6-8845-BD4E-CB4CCA059FC4}" type="datetimeFigureOut">
               <a:rPr lang="en-US" smtClean="0"/>
-              <a:t>1/27/13</a:t>
             </a:fld>
             <a:endParaRPr lang="en-US"/>
           </a:p>
@@ -1940,18 +1937,12 @@
           <a:p>
             <a:fld id="{C1FF6DA9-008F-8B48-92A6-B652298478BF}" type="slidenum">
               <a:rPr lang="en-US" smtClean="0"/>
-              <a:t>‹#›</a:t>
             </a:fld>
             <a:endParaRPr lang="en-US"/>
           </a:p>
         </p:txBody>
       </p:sp>
     </p:spTree>
-    <p:extLst>
-      <p:ext uri="{BB962C8B-B14F-4D97-AF65-F5344CB8AC3E}">
-        <p14:creationId xmlns:p14="http://schemas.microsoft.com/office/powerpoint/2010/main" val="727027711"/>
-      </p:ext>
-    </p:extLst>
   </p:cSld>
   <p:clrMapOvr>
     <a:masterClrMapping/>
@@ -1993,7 +1984,6 @@
           <a:p>
             <a:fld id="{5BCAD085-E8A6-8845-BD4E-CB4CCA059FC4}" type="datetimeFigureOut">
               <a:rPr lang="en-US" smtClean="0"/>
-              <a:t>1/27/13</a:t>
             </a:fld>
             <a:endParaRPr lang="en-US"/>
           </a:p>
@@ -2035,18 +2025,12 @@
           <a:p>
             <a:fld id="{C1FF6DA9-008F-8B48-92A6-B652298478BF}" type="slidenum">
               <a:rPr lang="en-US" smtClean="0"/>
-              <a:t>‹#›</a:t>
             </a:fld>
             <a:endParaRPr lang="en-US"/>
           </a:p>
         </p:txBody>
       </p:sp>
     </p:spTree>
-    <p:extLst>
-      <p:ext uri="{BB962C8B-B14F-4D97-AF65-F5344CB8AC3E}">
-        <p14:creationId xmlns:p14="http://schemas.microsoft.com/office/powerpoint/2010/main" val="1212999818"/>
-      </p:ext>
-    </p:extLst>
   </p:cSld>
   <p:clrMapOvr>
     <a:masterClrMapping/>
@@ -2156,6 +2140,7 @@
               <a:rPr lang="en-US" smtClean="0"/>
               <a:t>Click to edit Master text styles</a:t>
             </a:r>
+            <a:endParaRPr lang="en-US" smtClean="0"/>
           </a:p>
           <a:p>
             <a:pPr lvl="1"/>
@@ -2163,6 +2148,7 @@
               <a:rPr lang="en-US" smtClean="0"/>
               <a:t>Second level</a:t>
             </a:r>
+            <a:endParaRPr lang="en-US" smtClean="0"/>
           </a:p>
           <a:p>
             <a:pPr lvl="2"/>
@@ -2170,6 +2156,7 @@
               <a:rPr lang="en-US" smtClean="0"/>
               <a:t>Third level</a:t>
             </a:r>
+            <a:endParaRPr lang="en-US" smtClean="0"/>
           </a:p>
           <a:p>
             <a:pPr lvl="3"/>
@@ -2177,6 +2164,7 @@
               <a:rPr lang="en-US" smtClean="0"/>
               <a:t>Fourth level</a:t>
             </a:r>
+            <a:endParaRPr lang="en-US" smtClean="0"/>
           </a:p>
           <a:p>
             <a:pPr lvl="4"/>
@@ -2250,6 +2238,7 @@
               <a:rPr lang="en-US" smtClean="0"/>
               <a:t>Click to edit Master text styles</a:t>
             </a:r>
+            <a:endParaRPr lang="en-US" smtClean="0"/>
           </a:p>
         </p:txBody>
       </p:sp>
@@ -2270,7 +2259,6 @@
           <a:p>
             <a:fld id="{5BCAD085-E8A6-8845-BD4E-CB4CCA059FC4}" type="datetimeFigureOut">
               <a:rPr lang="en-US" smtClean="0"/>
-              <a:t>1/27/13</a:t>
             </a:fld>
             <a:endParaRPr lang="en-US"/>
           </a:p>
@@ -2312,18 +2300,12 @@
           <a:p>
             <a:fld id="{C1FF6DA9-008F-8B48-92A6-B652298478BF}" type="slidenum">
               <a:rPr lang="en-US" smtClean="0"/>
-              <a:t>‹#›</a:t>
             </a:fld>
             <a:endParaRPr lang="en-US"/>
           </a:p>
         </p:txBody>
       </p:sp>
     </p:spTree>
-    <p:extLst>
-      <p:ext uri="{BB962C8B-B14F-4D97-AF65-F5344CB8AC3E}">
-        <p14:creationId xmlns:p14="http://schemas.microsoft.com/office/powerpoint/2010/main" val="1840726560"/>
-      </p:ext>
-    </p:extLst>
   </p:cSld>
   <p:clrMapOvr>
     <a:masterClrMapping/>
@@ -2503,6 +2485,7 @@
               <a:rPr lang="en-US" smtClean="0"/>
               <a:t>Click to edit Master text styles</a:t>
             </a:r>
+            <a:endParaRPr lang="en-US" smtClean="0"/>
           </a:p>
         </p:txBody>
       </p:sp>
@@ -2523,7 +2506,6 @@
           <a:p>
             <a:fld id="{5BCAD085-E8A6-8845-BD4E-CB4CCA059FC4}" type="datetimeFigureOut">
               <a:rPr lang="en-US" smtClean="0"/>
-              <a:t>1/27/13</a:t>
             </a:fld>
             <a:endParaRPr lang="en-US"/>
           </a:p>
@@ -2565,18 +2547,12 @@
           <a:p>
             <a:fld id="{C1FF6DA9-008F-8B48-92A6-B652298478BF}" type="slidenum">
               <a:rPr lang="en-US" smtClean="0"/>
-              <a:t>‹#›</a:t>
             </a:fld>
             <a:endParaRPr lang="en-US"/>
           </a:p>
         </p:txBody>
       </p:sp>
     </p:spTree>
-    <p:extLst>
-      <p:ext uri="{BB962C8B-B14F-4D97-AF65-F5344CB8AC3E}">
-        <p14:creationId xmlns:p14="http://schemas.microsoft.com/office/powerpoint/2010/main" val="3889236939"/>
-      </p:ext>
-    </p:extLst>
   </p:cSld>
   <p:clrMapOvr>
     <a:masterClrMapping/>
@@ -2669,6 +2645,7 @@
               <a:rPr lang="en-US" smtClean="0"/>
               <a:t>Click to edit Master text styles</a:t>
             </a:r>
+            <a:endParaRPr lang="en-US" smtClean="0"/>
           </a:p>
           <a:p>
             <a:pPr lvl="1"/>
@@ -2676,6 +2653,7 @@
               <a:rPr lang="en-US" smtClean="0"/>
               <a:t>Second level</a:t>
             </a:r>
+            <a:endParaRPr lang="en-US" smtClean="0"/>
           </a:p>
           <a:p>
             <a:pPr lvl="2"/>
@@ -2683,6 +2661,7 @@
               <a:rPr lang="en-US" smtClean="0"/>
               <a:t>Third level</a:t>
             </a:r>
+            <a:endParaRPr lang="en-US" smtClean="0"/>
           </a:p>
           <a:p>
             <a:pPr lvl="3"/>
@@ -2690,6 +2669,7 @@
               <a:rPr lang="en-US" smtClean="0"/>
               <a:t>Fourth level</a:t>
             </a:r>
+            <a:endParaRPr lang="en-US" smtClean="0"/>
           </a:p>
           <a:p>
             <a:pPr lvl="4"/>
@@ -2736,7 +2716,6 @@
           <a:p>
             <a:fld id="{5BCAD085-E8A6-8845-BD4E-CB4CCA059FC4}" type="datetimeFigureOut">
               <a:rPr lang="en-US" smtClean="0"/>
-              <a:t>1/27/13</a:t>
             </a:fld>
             <a:endParaRPr lang="en-US"/>
           </a:p>
@@ -2814,18 +2793,12 @@
           <a:p>
             <a:fld id="{C1FF6DA9-008F-8B48-92A6-B652298478BF}" type="slidenum">
               <a:rPr lang="en-US" smtClean="0"/>
-              <a:t>‹#›</a:t>
             </a:fld>
             <a:endParaRPr lang="en-US"/>
           </a:p>
         </p:txBody>
       </p:sp>
     </p:spTree>
-    <p:extLst>
-      <p:ext uri="{BB962C8B-B14F-4D97-AF65-F5344CB8AC3E}">
-        <p14:creationId xmlns:p14="http://schemas.microsoft.com/office/powerpoint/2010/main" val="2209977519"/>
-      </p:ext>
-    </p:extLst>
   </p:cSld>
   <p:clrMap bg1="lt1" tx1="dk1" bg2="lt2" tx2="dk2" accent1="accent1" accent2="accent2" accent3="accent3" accent4="accent4" accent5="accent5" accent6="accent6" hlink="hlink" folHlink="folHlink"/>
   <p:sldLayoutIdLst>
@@ -2863,7 +2836,7 @@
         <a:spcBef>
           <a:spcPct val="20000"/>
         </a:spcBef>
-        <a:buFont typeface="Arial"/>
+        <a:buFont typeface="Arial" panose="020B0604020202020204"/>
         <a:buChar char="•"/>
         <a:defRPr sz="3200" kern="1200">
           <a:solidFill>
@@ -2878,7 +2851,7 @@
         <a:spcBef>
           <a:spcPct val="20000"/>
         </a:spcBef>
-        <a:buFont typeface="Arial"/>
+        <a:buFont typeface="Arial" panose="020B0604020202020204"/>
         <a:buChar char="–"/>
         <a:defRPr sz="2800" kern="1200">
           <a:solidFill>
@@ -2893,7 +2866,7 @@
         <a:spcBef>
           <a:spcPct val="20000"/>
         </a:spcBef>
-        <a:buFont typeface="Arial"/>
+        <a:buFont typeface="Arial" panose="020B0604020202020204"/>
         <a:buChar char="•"/>
         <a:defRPr sz="2400" kern="1200">
           <a:solidFill>
@@ -2908,7 +2881,7 @@
         <a:spcBef>
           <a:spcPct val="20000"/>
         </a:spcBef>
-        <a:buFont typeface="Arial"/>
+        <a:buFont typeface="Arial" panose="020B0604020202020204"/>
         <a:buChar char="–"/>
         <a:defRPr sz="2000" kern="1200">
           <a:solidFill>
@@ -2923,7 +2896,7 @@
         <a:spcBef>
           <a:spcPct val="20000"/>
         </a:spcBef>
-        <a:buFont typeface="Arial"/>
+        <a:buFont typeface="Arial" panose="020B0604020202020204"/>
         <a:buChar char="»"/>
         <a:defRPr sz="2000" kern="1200">
           <a:solidFill>
@@ -2938,7 +2911,7 @@
         <a:spcBef>
           <a:spcPct val="20000"/>
         </a:spcBef>
-        <a:buFont typeface="Arial"/>
+        <a:buFont typeface="Arial" panose="020B0604020202020204"/>
         <a:buChar char="•"/>
         <a:defRPr sz="2000" kern="1200">
           <a:solidFill>
@@ -2953,7 +2926,7 @@
         <a:spcBef>
           <a:spcPct val="20000"/>
         </a:spcBef>
-        <a:buFont typeface="Arial"/>
+        <a:buFont typeface="Arial" panose="020B0604020202020204"/>
         <a:buChar char="•"/>
         <a:defRPr sz="2000" kern="1200">
           <a:solidFill>
@@ -2968,7 +2941,7 @@
         <a:spcBef>
           <a:spcPct val="20000"/>
         </a:spcBef>
-        <a:buFont typeface="Arial"/>
+        <a:buFont typeface="Arial" panose="020B0604020202020204"/>
         <a:buChar char="•"/>
         <a:defRPr sz="2000" kern="1200">
           <a:solidFill>
@@ -2983,7 +2956,7 @@
         <a:spcBef>
           <a:spcPct val="20000"/>
         </a:spcBef>
-        <a:buFont typeface="Arial"/>
+        <a:buFont typeface="Arial" panose="020B0604020202020204"/>
         <a:buChar char="•"/>
         <a:defRPr sz="2000" kern="1200">
           <a:solidFill>
@@ -3095,7 +3068,7 @@
 </file>
 
 <file path=ppt/slides/slide1.xml><?xml version="1.0" encoding="utf-8"?>
-<p:sld xmlns:a="http://schemas.openxmlformats.org/drawingml/2006/main" xmlns:p="http://schemas.openxmlformats.org/presentationml/2006/main" xmlns:r="http://schemas.openxmlformats.org/officeDocument/2006/relationships">
+<p:sld xmlns:a="http://schemas.openxmlformats.org/drawingml/2006/main" xmlns:r="http://schemas.openxmlformats.org/officeDocument/2006/relationships" xmlns:p="http://schemas.openxmlformats.org/presentationml/2006/main">
   <p:cSld>
     <p:bg>
       <p:bgPr>
@@ -3219,7 +3192,7 @@
           <a:noFill/>
         </p:spPr>
         <p:txBody>
-          <a:bodyPr wrap="square" anchor="t" lIns="0" rIns="0" tIns="0" bIns="0">
+          <a:bodyPr wrap="square" lIns="0" tIns="0" rIns="0" bIns="0" anchor="t">
             <a:spAutoFit/>
           </a:bodyPr>
           <a:lstStyle/>
@@ -3237,10 +3210,16 @@
                 <a:solidFill>
                   <a:srgbClr val="FFFFFF"/>
                 </a:solidFill>
-                <a:latin typeface="Segoe UI"/>
+                <a:latin typeface="Segoe UI" panose="020B0502040204020203"/>
               </a:rPr>
               <a:t>OpsGenie</a:t>
             </a:r>
+            <a:endParaRPr sz="6000" b="1" i="0">
+              <a:solidFill>
+                <a:srgbClr val="FFFFFF"/>
+              </a:solidFill>
+              <a:latin typeface="Segoe UI" panose="020B0502040204020203"/>
+            </a:endParaRPr>
           </a:p>
         </p:txBody>
       </p:sp>
@@ -3261,7 +3240,7 @@
           <a:noFill/>
         </p:spPr>
         <p:txBody>
-          <a:bodyPr wrap="square" anchor="t" lIns="0" rIns="0" tIns="0" bIns="0">
+          <a:bodyPr wrap="square" lIns="0" tIns="0" rIns="0" bIns="0" anchor="t">
             <a:spAutoFit/>
           </a:bodyPr>
           <a:lstStyle/>
@@ -3279,10 +3258,16 @@
                 <a:solidFill>
                   <a:srgbClr val="34D399"/>
                 </a:solidFill>
-                <a:latin typeface="Segoe UI"/>
+                <a:latin typeface="Segoe UI" panose="020B0502040204020203"/>
               </a:rPr>
               <a:t>The WhatsApp-first financial operating assistant for B2B distributors</a:t>
             </a:r>
+            <a:endParaRPr sz="2200" b="1" i="0">
+              <a:solidFill>
+                <a:srgbClr val="34D399"/>
+              </a:solidFill>
+              <a:latin typeface="Segoe UI" panose="020B0502040204020203"/>
+            </a:endParaRPr>
           </a:p>
         </p:txBody>
       </p:sp>
@@ -3303,7 +3288,7 @@
           <a:noFill/>
         </p:spPr>
         <p:txBody>
-          <a:bodyPr wrap="square" anchor="t" lIns="0" rIns="0" tIns="0" bIns="0">
+          <a:bodyPr wrap="square" lIns="0" tIns="0" rIns="0" bIns="0" anchor="t">
             <a:spAutoFit/>
           </a:bodyPr>
           <a:lstStyle/>
@@ -3321,10 +3306,16 @@
                 <a:solidFill>
                   <a:srgbClr val="D1FAE5"/>
                 </a:solidFill>
-                <a:latin typeface="Segoe UI"/>
+                <a:latin typeface="Segoe UI" panose="020B0502040204020203"/>
               </a:rPr>
               <a:t>Turns the records you already keep into a decision every morning — before the day begins.</a:t>
             </a:r>
+            <a:endParaRPr sz="1500" b="0" i="1">
+              <a:solidFill>
+                <a:srgbClr val="D1FAE5"/>
+              </a:solidFill>
+              <a:latin typeface="Segoe UI" panose="020B0502040204020203"/>
+            </a:endParaRPr>
           </a:p>
         </p:txBody>
       </p:sp>
@@ -3337,7 +3328,7 @@
         <p:spPr>
           <a:xfrm>
             <a:off x="868680" y="6080760"/>
-            <a:ext cx="7315200" cy="457200"/>
+            <a:ext cx="7315200" cy="184150"/>
           </a:xfrm>
           <a:prstGeom prst="rect">
             <a:avLst/>
@@ -3345,7 +3336,7 @@
           <a:noFill/>
         </p:spPr>
         <p:txBody>
-          <a:bodyPr wrap="square" anchor="t" lIns="0" rIns="0" tIns="0" bIns="0">
+          <a:bodyPr wrap="square" lIns="0" tIns="0" rIns="0" bIns="0" anchor="t">
             <a:spAutoFit/>
           </a:bodyPr>
           <a:lstStyle/>
@@ -3359,14 +3350,29 @@
               </a:spcAft>
             </a:pPr>
             <a:r>
+              <a:rPr lang="en-US" sz="1200" b="0" i="0">
+                <a:solidFill>
+                  <a:srgbClr val="A7F3D0"/>
+                </a:solidFill>
+                <a:latin typeface="Segoe UI" panose="020B0502040204020203"/>
+              </a:rPr>
+              <a:t>Spandan Tripathy</a:t>
+            </a:r>
+            <a:r>
               <a:rPr sz="1200" b="0" i="0">
                 <a:solidFill>
                   <a:srgbClr val="A7F3D0"/>
                 </a:solidFill>
-                <a:latin typeface="Segoe UI"/>
-              </a:rPr>
-              <a:t>[Your Name]  ·  Founder  ·  tripathyspandan23@gmail.com</a:t>
-            </a:r>
+                <a:latin typeface="Segoe UI" panose="020B0502040204020203"/>
+              </a:rPr>
+              <a:t>  ·  Founder  ·  tripathyspandan23@gmail.com</a:t>
+            </a:r>
+            <a:endParaRPr sz="1200" b="0" i="0">
+              <a:solidFill>
+                <a:srgbClr val="A7F3D0"/>
+              </a:solidFill>
+              <a:latin typeface="Segoe UI" panose="020B0502040204020203"/>
+            </a:endParaRPr>
           </a:p>
         </p:txBody>
       </p:sp>
@@ -3379,7 +3385,7 @@
 </file>
 
 <file path=ppt/slides/slide10.xml><?xml version="1.0" encoding="utf-8"?>
-<p:sld xmlns:a="http://schemas.openxmlformats.org/drawingml/2006/main" xmlns:p="http://schemas.openxmlformats.org/presentationml/2006/main" xmlns:r="http://schemas.openxmlformats.org/officeDocument/2006/relationships">
+<p:sld xmlns:a="http://schemas.openxmlformats.org/drawingml/2006/main" xmlns:r="http://schemas.openxmlformats.org/officeDocument/2006/relationships" xmlns:p="http://schemas.openxmlformats.org/presentationml/2006/main">
   <p:cSld>
     <p:bg>
       <p:bgPr>
@@ -3457,7 +3463,7 @@
           <a:noFill/>
         </p:spPr>
         <p:txBody>
-          <a:bodyPr wrap="square" anchor="t" lIns="0" rIns="0" tIns="0" bIns="0">
+          <a:bodyPr wrap="square" lIns="0" tIns="0" rIns="0" bIns="0" anchor="t">
             <a:spAutoFit/>
           </a:bodyPr>
           <a:lstStyle/>
@@ -3475,10 +3481,16 @@
                 <a:solidFill>
                   <a:srgbClr val="10B981"/>
                 </a:solidFill>
-                <a:latin typeface="Segoe UI"/>
+                <a:latin typeface="Segoe UI" panose="020B0502040204020203"/>
               </a:rPr>
               <a:t>EVERYTHING WE’VE BUILT · 4 OF 4</a:t>
             </a:r>
+            <a:endParaRPr sz="1250" b="1" i="0">
+              <a:solidFill>
+                <a:srgbClr val="10B981"/>
+              </a:solidFill>
+              <a:latin typeface="Segoe UI" panose="020B0502040204020203"/>
+            </a:endParaRPr>
           </a:p>
         </p:txBody>
       </p:sp>
@@ -3499,7 +3511,7 @@
           <a:noFill/>
         </p:spPr>
         <p:txBody>
-          <a:bodyPr wrap="square" anchor="t" lIns="0" rIns="0" tIns="0" bIns="0">
+          <a:bodyPr wrap="square" lIns="0" tIns="0" rIns="0" bIns="0" anchor="t">
             <a:spAutoFit/>
           </a:bodyPr>
           <a:lstStyle/>
@@ -3520,10 +3532,16 @@
                 <a:solidFill>
                   <a:srgbClr val="064E3B"/>
                 </a:solidFill>
-                <a:latin typeface="Segoe UI"/>
+                <a:latin typeface="Segoe UI" panose="020B0502040204020203"/>
               </a:rPr>
               <a:t>Built for how India’s distributors actually operate</a:t>
             </a:r>
+            <a:endParaRPr sz="2600" b="1" i="0">
+              <a:solidFill>
+                <a:srgbClr val="064E3B"/>
+              </a:solidFill>
+              <a:latin typeface="Segoe UI" panose="020B0502040204020203"/>
+            </a:endParaRPr>
           </a:p>
         </p:txBody>
       </p:sp>
@@ -3636,7 +3654,7 @@
           <a:noFill/>
         </p:spPr>
         <p:txBody>
-          <a:bodyPr wrap="square" anchor="t" lIns="0" rIns="0" tIns="0" bIns="0">
+          <a:bodyPr wrap="square" lIns="0" tIns="0" rIns="0" bIns="0" anchor="t">
             <a:spAutoFit/>
           </a:bodyPr>
           <a:lstStyle/>
@@ -3657,10 +3675,16 @@
                 <a:solidFill>
                   <a:srgbClr val="064E3B"/>
                 </a:solidFill>
-                <a:latin typeface="Segoe UI"/>
+                <a:latin typeface="Segoe UI" panose="020B0502040204020203"/>
               </a:rPr>
               <a:t>5-locale multilingual</a:t>
             </a:r>
+            <a:endParaRPr sz="1350" b="1" i="0">
+              <a:solidFill>
+                <a:srgbClr val="064E3B"/>
+              </a:solidFill>
+              <a:latin typeface="Segoe UI" panose="020B0502040204020203"/>
+            </a:endParaRPr>
           </a:p>
         </p:txBody>
       </p:sp>
@@ -3681,7 +3705,7 @@
           <a:noFill/>
         </p:spPr>
         <p:txBody>
-          <a:bodyPr wrap="square" anchor="t" lIns="0" rIns="0" tIns="0" bIns="0">
+          <a:bodyPr wrap="square" lIns="0" tIns="0" rIns="0" bIns="0" anchor="t">
             <a:spAutoFit/>
           </a:bodyPr>
           <a:lstStyle/>
@@ -3702,10 +3726,16 @@
                 <a:solidFill>
                   <a:srgbClr val="475569"/>
                 </a:solidFill>
-                <a:latin typeface="Segoe UI"/>
+                <a:latin typeface="Segoe UI" panose="020B0502040204020203"/>
               </a:rPr>
               <a:t>English, Hindi &amp; Odia — Devanagari/Odia script and Romanized-first variants, tuned for how people actually type on WhatsApp.</a:t>
             </a:r>
+            <a:endParaRPr sz="1080" b="0" i="0">
+              <a:solidFill>
+                <a:srgbClr val="475569"/>
+              </a:solidFill>
+              <a:latin typeface="Segoe UI" panose="020B0502040204020203"/>
+            </a:endParaRPr>
           </a:p>
         </p:txBody>
       </p:sp>
@@ -3818,7 +3848,7 @@
           <a:noFill/>
         </p:spPr>
         <p:txBody>
-          <a:bodyPr wrap="square" anchor="t" lIns="0" rIns="0" tIns="0" bIns="0">
+          <a:bodyPr wrap="square" lIns="0" tIns="0" rIns="0" bIns="0" anchor="t">
             <a:spAutoFit/>
           </a:bodyPr>
           <a:lstStyle/>
@@ -3839,10 +3869,16 @@
                 <a:solidFill>
                   <a:srgbClr val="064E3B"/>
                 </a:solidFill>
-                <a:latin typeface="Segoe UI"/>
+                <a:latin typeface="Segoe UI" panose="020B0502040204020203"/>
               </a:rPr>
               <a:t>Unicode invoice PDFs</a:t>
             </a:r>
+            <a:endParaRPr sz="1350" b="1" i="0">
+              <a:solidFill>
+                <a:srgbClr val="064E3B"/>
+              </a:solidFill>
+              <a:latin typeface="Segoe UI" panose="020B0502040204020203"/>
+            </a:endParaRPr>
           </a:p>
         </p:txBody>
       </p:sp>
@@ -3863,7 +3899,7 @@
           <a:noFill/>
         </p:spPr>
         <p:txBody>
-          <a:bodyPr wrap="square" anchor="t" lIns="0" rIns="0" tIns="0" bIns="0">
+          <a:bodyPr wrap="square" lIns="0" tIns="0" rIns="0" bIns="0" anchor="t">
             <a:spAutoFit/>
           </a:bodyPr>
           <a:lstStyle/>
@@ -3884,10 +3920,16 @@
                 <a:solidFill>
                   <a:srgbClr val="475569"/>
                 </a:solidFill>
-                <a:latin typeface="Segoe UI"/>
+                <a:latin typeface="Segoe UI" panose="020B0502040204020203"/>
               </a:rPr>
               <a:t>Correctly renders regional-script dealer/product names — not just Latin text.</a:t>
             </a:r>
+            <a:endParaRPr sz="1080" b="0" i="0">
+              <a:solidFill>
+                <a:srgbClr val="475569"/>
+              </a:solidFill>
+              <a:latin typeface="Segoe UI" panose="020B0502040204020203"/>
+            </a:endParaRPr>
           </a:p>
         </p:txBody>
       </p:sp>
@@ -4000,7 +4042,7 @@
           <a:noFill/>
         </p:spPr>
         <p:txBody>
-          <a:bodyPr wrap="square" anchor="t" lIns="0" rIns="0" tIns="0" bIns="0">
+          <a:bodyPr wrap="square" lIns="0" tIns="0" rIns="0" bIns="0" anchor="t">
             <a:spAutoFit/>
           </a:bodyPr>
           <a:lstStyle/>
@@ -4021,10 +4063,16 @@
                 <a:solidFill>
                   <a:srgbClr val="064E3B"/>
                 </a:solidFill>
-                <a:latin typeface="Segoe UI"/>
+                <a:latin typeface="Segoe UI" panose="020B0502040204020203"/>
               </a:rPr>
               <a:t>Self-serve onboarding</a:t>
             </a:r>
+            <a:endParaRPr sz="1350" b="1" i="0">
+              <a:solidFill>
+                <a:srgbClr val="064E3B"/>
+              </a:solidFill>
+              <a:latin typeface="Segoe UI" panose="020B0502040204020203"/>
+            </a:endParaRPr>
           </a:p>
         </p:txBody>
       </p:sp>
@@ -4045,7 +4093,7 @@
           <a:noFill/>
         </p:spPr>
         <p:txBody>
-          <a:bodyPr wrap="square" anchor="t" lIns="0" rIns="0" tIns="0" bIns="0">
+          <a:bodyPr wrap="square" lIns="0" tIns="0" rIns="0" bIns="0" anchor="t">
             <a:spAutoFit/>
           </a:bodyPr>
           <a:lstStyle/>
@@ -4066,10 +4114,16 @@
                 <a:solidFill>
                   <a:srgbClr val="475569"/>
                 </a:solidFill>
-                <a:latin typeface="Segoe UI"/>
+                <a:latin typeface="Segoe UI" panose="020B0502040204020203"/>
               </a:rPr>
               <a:t>Public web wizard — import your data or start fresh, then WhatsApp only asks for what wasn’t already provided.</a:t>
             </a:r>
+            <a:endParaRPr sz="1080" b="0" i="0">
+              <a:solidFill>
+                <a:srgbClr val="475569"/>
+              </a:solidFill>
+              <a:latin typeface="Segoe UI" panose="020B0502040204020203"/>
+            </a:endParaRPr>
           </a:p>
         </p:txBody>
       </p:sp>
@@ -4182,7 +4236,7 @@
           <a:noFill/>
         </p:spPr>
         <p:txBody>
-          <a:bodyPr wrap="square" anchor="t" lIns="0" rIns="0" tIns="0" bIns="0">
+          <a:bodyPr wrap="square" lIns="0" tIns="0" rIns="0" bIns="0" anchor="t">
             <a:spAutoFit/>
           </a:bodyPr>
           <a:lstStyle/>
@@ -4203,10 +4257,16 @@
                 <a:solidFill>
                   <a:srgbClr val="064E3B"/>
                 </a:solidFill>
-                <a:latin typeface="Segoe UI"/>
+                <a:latin typeface="Segoe UI" panose="020B0502040204020203"/>
               </a:rPr>
               <a:t>Admin dashboard</a:t>
             </a:r>
+            <a:endParaRPr sz="1350" b="1" i="0">
+              <a:solidFill>
+                <a:srgbClr val="064E3B"/>
+              </a:solidFill>
+              <a:latin typeface="Segoe UI" panose="020B0502040204020203"/>
+            </a:endParaRPr>
           </a:p>
         </p:txBody>
       </p:sp>
@@ -4227,7 +4287,7 @@
           <a:noFill/>
         </p:spPr>
         <p:txBody>
-          <a:bodyPr wrap="square" anchor="t" lIns="0" rIns="0" tIns="0" bIns="0">
+          <a:bodyPr wrap="square" lIns="0" tIns="0" rIns="0" bIns="0" anchor="t">
             <a:spAutoFit/>
           </a:bodyPr>
           <a:lstStyle/>
@@ -4248,10 +4308,16 @@
                 <a:solidFill>
                   <a:srgbClr val="475569"/>
                 </a:solidFill>
-                <a:latin typeface="Segoe UI"/>
+                <a:latin typeface="Segoe UI" panose="020B0502040204020203"/>
               </a:rPr>
               <a:t>Password-gated, founder-facing view across every company, invoice, and payment.</a:t>
             </a:r>
+            <a:endParaRPr sz="1080" b="0" i="0">
+              <a:solidFill>
+                <a:srgbClr val="475569"/>
+              </a:solidFill>
+              <a:latin typeface="Segoe UI" panose="020B0502040204020203"/>
+            </a:endParaRPr>
           </a:p>
         </p:txBody>
       </p:sp>
@@ -4364,7 +4430,7 @@
           <a:noFill/>
         </p:spPr>
         <p:txBody>
-          <a:bodyPr wrap="square" anchor="t" lIns="0" rIns="0" tIns="0" bIns="0">
+          <a:bodyPr wrap="square" lIns="0" tIns="0" rIns="0" bIns="0" anchor="t">
             <a:spAutoFit/>
           </a:bodyPr>
           <a:lstStyle/>
@@ -4385,10 +4451,16 @@
                 <a:solidFill>
                   <a:srgbClr val="064E3B"/>
                 </a:solidFill>
-                <a:latin typeface="Segoe UI"/>
+                <a:latin typeface="Segoe UI" panose="020B0502040204020203"/>
               </a:rPr>
               <a:t>Security by design</a:t>
             </a:r>
+            <a:endParaRPr sz="1350" b="1" i="0">
+              <a:solidFill>
+                <a:srgbClr val="064E3B"/>
+              </a:solidFill>
+              <a:latin typeface="Segoe UI" panose="020B0502040204020203"/>
+            </a:endParaRPr>
           </a:p>
         </p:txBody>
       </p:sp>
@@ -4409,7 +4481,7 @@
           <a:noFill/>
         </p:spPr>
         <p:txBody>
-          <a:bodyPr wrap="square" anchor="t" lIns="0" rIns="0" tIns="0" bIns="0">
+          <a:bodyPr wrap="square" lIns="0" tIns="0" rIns="0" bIns="0" anchor="t">
             <a:spAutoFit/>
           </a:bodyPr>
           <a:lstStyle/>
@@ -4430,10 +4502,16 @@
                 <a:solidFill>
                   <a:srgbClr val="475569"/>
                 </a:solidFill>
-                <a:latin typeface="Segoe UI"/>
+                <a:latin typeface="Segoe UI" panose="020B0502040204020203"/>
               </a:rPr>
               <a:t>HMAC-verified WhatsApp webhook, signed short-lived export links, capability-token-gated onboarding.</a:t>
             </a:r>
+            <a:endParaRPr sz="1080" b="0" i="0">
+              <a:solidFill>
+                <a:srgbClr val="475569"/>
+              </a:solidFill>
+              <a:latin typeface="Segoe UI" panose="020B0502040204020203"/>
+            </a:endParaRPr>
           </a:p>
         </p:txBody>
       </p:sp>
@@ -4546,7 +4624,7 @@
           <a:noFill/>
         </p:spPr>
         <p:txBody>
-          <a:bodyPr wrap="square" anchor="t" lIns="0" rIns="0" tIns="0" bIns="0">
+          <a:bodyPr wrap="square" lIns="0" tIns="0" rIns="0" bIns="0" anchor="t">
             <a:spAutoFit/>
           </a:bodyPr>
           <a:lstStyle/>
@@ -4567,10 +4645,16 @@
                 <a:solidFill>
                   <a:srgbClr val="064E3B"/>
                 </a:solidFill>
-                <a:latin typeface="Segoe UI"/>
+                <a:latin typeface="Segoe UI" panose="020B0502040204020203"/>
               </a:rPr>
               <a:t>Resumable, correctable setup</a:t>
             </a:r>
+            <a:endParaRPr sz="1350" b="1" i="0">
+              <a:solidFill>
+                <a:srgbClr val="064E3B"/>
+              </a:solidFill>
+              <a:latin typeface="Segoe UI" panose="020B0502040204020203"/>
+            </a:endParaRPr>
           </a:p>
         </p:txBody>
       </p:sp>
@@ -4591,7 +4675,7 @@
           <a:noFill/>
         </p:spPr>
         <p:txBody>
-          <a:bodyPr wrap="square" anchor="t" lIns="0" rIns="0" tIns="0" bIns="0">
+          <a:bodyPr wrap="square" lIns="0" tIns="0" rIns="0" bIns="0" anchor="t">
             <a:spAutoFit/>
           </a:bodyPr>
           <a:lstStyle/>
@@ -4612,10 +4696,16 @@
                 <a:solidFill>
                   <a:srgbClr val="475569"/>
                 </a:solidFill>
-                <a:latin typeface="Segoe UI"/>
+                <a:latin typeface="Segoe UI" panose="020B0502040204020203"/>
               </a:rPr>
               <a:t>Progress checklist, restart, and 30+ guided correction commands — nothing is a one-shot, unrecoverable step.</a:t>
             </a:r>
+            <a:endParaRPr sz="1080" b="0" i="0">
+              <a:solidFill>
+                <a:srgbClr val="475569"/>
+              </a:solidFill>
+              <a:latin typeface="Segoe UI" panose="020B0502040204020203"/>
+            </a:endParaRPr>
           </a:p>
         </p:txBody>
       </p:sp>
@@ -4680,7 +4770,7 @@
           <a:noFill/>
         </p:spPr>
         <p:txBody>
-          <a:bodyPr wrap="square" anchor="t" lIns="0" rIns="0" tIns="0" bIns="0">
+          <a:bodyPr wrap="square" lIns="0" tIns="0" rIns="0" bIns="0" anchor="t">
             <a:spAutoFit/>
           </a:bodyPr>
           <a:lstStyle/>
@@ -4698,10 +4788,16 @@
                 <a:solidFill>
                   <a:srgbClr val="475569"/>
                 </a:solidFill>
-                <a:latin typeface="Segoe UI"/>
+                <a:latin typeface="Segoe UI" panose="020B0502040204020203"/>
               </a:rPr>
               <a:t>OpsGenie</a:t>
             </a:r>
+            <a:endParaRPr sz="1000" b="1" i="0">
+              <a:solidFill>
+                <a:srgbClr val="475569"/>
+              </a:solidFill>
+              <a:latin typeface="Segoe UI" panose="020B0502040204020203"/>
+            </a:endParaRPr>
           </a:p>
         </p:txBody>
       </p:sp>
@@ -4722,7 +4818,7 @@
           <a:noFill/>
         </p:spPr>
         <p:txBody>
-          <a:bodyPr wrap="square" anchor="t" lIns="0" rIns="0" tIns="0" bIns="0">
+          <a:bodyPr wrap="square" lIns="0" tIns="0" rIns="0" bIns="0" anchor="t">
             <a:spAutoFit/>
           </a:bodyPr>
           <a:lstStyle/>
@@ -4740,10 +4836,16 @@
                 <a:solidFill>
                   <a:srgbClr val="475569"/>
                 </a:solidFill>
-                <a:latin typeface="Segoe UI"/>
+                <a:latin typeface="Segoe UI" panose="020B0502040204020203"/>
               </a:rPr>
               <a:t>10</a:t>
             </a:r>
+            <a:endParaRPr sz="1000" b="0" i="0">
+              <a:solidFill>
+                <a:srgbClr val="475569"/>
+              </a:solidFill>
+              <a:latin typeface="Segoe UI" panose="020B0502040204020203"/>
+            </a:endParaRPr>
           </a:p>
         </p:txBody>
       </p:sp>
@@ -4756,7 +4858,7 @@
 </file>
 
 <file path=ppt/slides/slide11.xml><?xml version="1.0" encoding="utf-8"?>
-<p:sld xmlns:a="http://schemas.openxmlformats.org/drawingml/2006/main" xmlns:p="http://schemas.openxmlformats.org/presentationml/2006/main" xmlns:r="http://schemas.openxmlformats.org/officeDocument/2006/relationships">
+<p:sld xmlns:a="http://schemas.openxmlformats.org/drawingml/2006/main" xmlns:r="http://schemas.openxmlformats.org/officeDocument/2006/relationships" xmlns:p="http://schemas.openxmlformats.org/presentationml/2006/main">
   <p:cSld>
     <p:bg>
       <p:bgPr>
@@ -4834,7 +4936,7 @@
           <a:noFill/>
         </p:spPr>
         <p:txBody>
-          <a:bodyPr wrap="square" anchor="t" lIns="0" rIns="0" tIns="0" bIns="0">
+          <a:bodyPr wrap="square" lIns="0" tIns="0" rIns="0" bIns="0" anchor="t">
             <a:spAutoFit/>
           </a:bodyPr>
           <a:lstStyle/>
@@ -4852,10 +4954,16 @@
                 <a:solidFill>
                   <a:srgbClr val="10B981"/>
                 </a:solidFill>
-                <a:latin typeface="Segoe UI"/>
+                <a:latin typeface="Segoe UI" panose="020B0502040204020203"/>
               </a:rPr>
               <a:t>UNDER THE HOOD</a:t>
             </a:r>
+            <a:endParaRPr sz="1250" b="1" i="0">
+              <a:solidFill>
+                <a:srgbClr val="10B981"/>
+              </a:solidFill>
+              <a:latin typeface="Segoe UI" panose="020B0502040204020203"/>
+            </a:endParaRPr>
           </a:p>
         </p:txBody>
       </p:sp>
@@ -4876,7 +4984,7 @@
           <a:noFill/>
         </p:spPr>
         <p:txBody>
-          <a:bodyPr wrap="square" anchor="t" lIns="0" rIns="0" tIns="0" bIns="0">
+          <a:bodyPr wrap="square" lIns="0" tIns="0" rIns="0" bIns="0" anchor="t">
             <a:spAutoFit/>
           </a:bodyPr>
           <a:lstStyle/>
@@ -4897,10 +5005,16 @@
                 <a:solidFill>
                   <a:srgbClr val="FFFFFF"/>
                 </a:solidFill>
-                <a:latin typeface="Segoe UI"/>
+                <a:latin typeface="Segoe UI" panose="020B0502040204020203"/>
               </a:rPr>
               <a:t>Engineered like production software, not a demo</a:t>
             </a:r>
+            <a:endParaRPr sz="3000" b="1" i="0">
+              <a:solidFill>
+                <a:srgbClr val="FFFFFF"/>
+              </a:solidFill>
+              <a:latin typeface="Segoe UI" panose="020B0502040204020203"/>
+            </a:endParaRPr>
           </a:p>
         </p:txBody>
       </p:sp>
@@ -4967,7 +5081,7 @@
           <a:noFill/>
         </p:spPr>
         <p:txBody>
-          <a:bodyPr wrap="square" anchor="t" lIns="0" rIns="0" tIns="0" bIns="0">
+          <a:bodyPr wrap="square" lIns="0" tIns="0" rIns="0" bIns="0" anchor="t">
             <a:spAutoFit/>
           </a:bodyPr>
           <a:lstStyle/>
@@ -4985,10 +5099,16 @@
                 <a:solidFill>
                   <a:srgbClr val="34D399"/>
                 </a:solidFill>
-                <a:latin typeface="Segoe UI"/>
+                <a:latin typeface="Segoe UI" panose="020B0502040204020203"/>
               </a:rPr>
               <a:t>17</a:t>
             </a:r>
+            <a:endParaRPr sz="3000" b="1" i="0">
+              <a:solidFill>
+                <a:srgbClr val="34D399"/>
+              </a:solidFill>
+              <a:latin typeface="Segoe UI" panose="020B0502040204020203"/>
+            </a:endParaRPr>
           </a:p>
         </p:txBody>
       </p:sp>
@@ -5009,7 +5129,7 @@
           <a:noFill/>
         </p:spPr>
         <p:txBody>
-          <a:bodyPr wrap="square" anchor="t" lIns="0" rIns="0" tIns="0" bIns="0">
+          <a:bodyPr wrap="square" lIns="0" tIns="0" rIns="0" bIns="0" anchor="t">
             <a:spAutoFit/>
           </a:bodyPr>
           <a:lstStyle/>
@@ -5027,10 +5147,16 @@
                 <a:solidFill>
                   <a:srgbClr val="D1FAE5"/>
                 </a:solidFill>
-                <a:latin typeface="Segoe UI"/>
+                <a:latin typeface="Segoe UI" panose="020B0502040204020203"/>
               </a:rPr>
               <a:t>ORM tables</a:t>
             </a:r>
+            <a:endParaRPr sz="1200" b="0" i="0">
+              <a:solidFill>
+                <a:srgbClr val="D1FAE5"/>
+              </a:solidFill>
+              <a:latin typeface="Segoe UI" panose="020B0502040204020203"/>
+            </a:endParaRPr>
           </a:p>
         </p:txBody>
       </p:sp>
@@ -5097,7 +5223,7 @@
           <a:noFill/>
         </p:spPr>
         <p:txBody>
-          <a:bodyPr wrap="square" anchor="t" lIns="0" rIns="0" tIns="0" bIns="0">
+          <a:bodyPr wrap="square" lIns="0" tIns="0" rIns="0" bIns="0" anchor="t">
             <a:spAutoFit/>
           </a:bodyPr>
           <a:lstStyle/>
@@ -5115,10 +5241,16 @@
                 <a:solidFill>
                   <a:srgbClr val="34D399"/>
                 </a:solidFill>
-                <a:latin typeface="Segoe UI"/>
+                <a:latin typeface="Segoe UI" panose="020B0502040204020203"/>
               </a:rPr>
               <a:t>44</a:t>
             </a:r>
+            <a:endParaRPr sz="3000" b="1" i="0">
+              <a:solidFill>
+                <a:srgbClr val="34D399"/>
+              </a:solidFill>
+              <a:latin typeface="Segoe UI" panose="020B0502040204020203"/>
+            </a:endParaRPr>
           </a:p>
         </p:txBody>
       </p:sp>
@@ -5139,7 +5271,7 @@
           <a:noFill/>
         </p:spPr>
         <p:txBody>
-          <a:bodyPr wrap="square" anchor="t" lIns="0" rIns="0" tIns="0" bIns="0">
+          <a:bodyPr wrap="square" lIns="0" tIns="0" rIns="0" bIns="0" anchor="t">
             <a:spAutoFit/>
           </a:bodyPr>
           <a:lstStyle/>
@@ -5157,10 +5289,16 @@
                 <a:solidFill>
                   <a:srgbClr val="D1FAE5"/>
                 </a:solidFill>
-                <a:latin typeface="Segoe UI"/>
+                <a:latin typeface="Segoe UI" panose="020B0502040204020203"/>
               </a:rPr>
               <a:t>Alembic migrations</a:t>
             </a:r>
+            <a:endParaRPr sz="1200" b="0" i="0">
+              <a:solidFill>
+                <a:srgbClr val="D1FAE5"/>
+              </a:solidFill>
+              <a:latin typeface="Segoe UI" panose="020B0502040204020203"/>
+            </a:endParaRPr>
           </a:p>
         </p:txBody>
       </p:sp>
@@ -5227,7 +5365,7 @@
           <a:noFill/>
         </p:spPr>
         <p:txBody>
-          <a:bodyPr wrap="square" anchor="t" lIns="0" rIns="0" tIns="0" bIns="0">
+          <a:bodyPr wrap="square" lIns="0" tIns="0" rIns="0" bIns="0" anchor="t">
             <a:spAutoFit/>
           </a:bodyPr>
           <a:lstStyle/>
@@ -5245,10 +5383,16 @@
                 <a:solidFill>
                   <a:srgbClr val="34D399"/>
                 </a:solidFill>
-                <a:latin typeface="Segoe UI"/>
+                <a:latin typeface="Segoe UI" panose="020B0502040204020203"/>
               </a:rPr>
               <a:t>69</a:t>
             </a:r>
+            <a:endParaRPr sz="3000" b="1" i="0">
+              <a:solidFill>
+                <a:srgbClr val="34D399"/>
+              </a:solidFill>
+              <a:latin typeface="Segoe UI" panose="020B0502040204020203"/>
+            </a:endParaRPr>
           </a:p>
         </p:txBody>
       </p:sp>
@@ -5269,7 +5413,7 @@
           <a:noFill/>
         </p:spPr>
         <p:txBody>
-          <a:bodyPr wrap="square" anchor="t" lIns="0" rIns="0" tIns="0" bIns="0">
+          <a:bodyPr wrap="square" lIns="0" tIns="0" rIns="0" bIns="0" anchor="t">
             <a:spAutoFit/>
           </a:bodyPr>
           <a:lstStyle/>
@@ -5287,10 +5431,16 @@
                 <a:solidFill>
                   <a:srgbClr val="D1FAE5"/>
                 </a:solidFill>
-                <a:latin typeface="Segoe UI"/>
+                <a:latin typeface="Segoe UI" panose="020B0502040204020203"/>
               </a:rPr>
               <a:t>test files</a:t>
             </a:r>
+            <a:endParaRPr sz="1200" b="0" i="0">
+              <a:solidFill>
+                <a:srgbClr val="D1FAE5"/>
+              </a:solidFill>
+              <a:latin typeface="Segoe UI" panose="020B0502040204020203"/>
+            </a:endParaRPr>
           </a:p>
         </p:txBody>
       </p:sp>
@@ -5357,7 +5507,7 @@
           <a:noFill/>
         </p:spPr>
         <p:txBody>
-          <a:bodyPr wrap="square" anchor="t" lIns="0" rIns="0" tIns="0" bIns="0">
+          <a:bodyPr wrap="square" lIns="0" tIns="0" rIns="0" bIns="0" anchor="t">
             <a:spAutoFit/>
           </a:bodyPr>
           <a:lstStyle/>
@@ -5375,10 +5525,16 @@
                 <a:solidFill>
                   <a:srgbClr val="34D399"/>
                 </a:solidFill>
-                <a:latin typeface="Segoe UI"/>
+                <a:latin typeface="Segoe UI" panose="020B0502040204020203"/>
               </a:rPr>
               <a:t>1,002</a:t>
             </a:r>
+            <a:endParaRPr sz="3000" b="1" i="0">
+              <a:solidFill>
+                <a:srgbClr val="34D399"/>
+              </a:solidFill>
+              <a:latin typeface="Segoe UI" panose="020B0502040204020203"/>
+            </a:endParaRPr>
           </a:p>
         </p:txBody>
       </p:sp>
@@ -5399,7 +5555,7 @@
           <a:noFill/>
         </p:spPr>
         <p:txBody>
-          <a:bodyPr wrap="square" anchor="t" lIns="0" rIns="0" tIns="0" bIns="0">
+          <a:bodyPr wrap="square" lIns="0" tIns="0" rIns="0" bIns="0" anchor="t">
             <a:spAutoFit/>
           </a:bodyPr>
           <a:lstStyle/>
@@ -5417,10 +5573,16 @@
                 <a:solidFill>
                   <a:srgbClr val="D1FAE5"/>
                 </a:solidFill>
-                <a:latin typeface="Segoe UI"/>
+                <a:latin typeface="Segoe UI" panose="020B0502040204020203"/>
               </a:rPr>
               <a:t>automated tests</a:t>
             </a:r>
+            <a:endParaRPr sz="1200" b="0" i="0">
+              <a:solidFill>
+                <a:srgbClr val="D1FAE5"/>
+              </a:solidFill>
+              <a:latin typeface="Segoe UI" panose="020B0502040204020203"/>
+            </a:endParaRPr>
           </a:p>
         </p:txBody>
       </p:sp>
@@ -5487,7 +5649,7 @@
           <a:noFill/>
         </p:spPr>
         <p:txBody>
-          <a:bodyPr wrap="square" anchor="t" lIns="0" rIns="0" tIns="0" bIns="0">
+          <a:bodyPr wrap="square" lIns="0" tIns="0" rIns="0" bIns="0" anchor="t">
             <a:spAutoFit/>
           </a:bodyPr>
           <a:lstStyle/>
@@ -5505,10 +5667,16 @@
                 <a:solidFill>
                   <a:srgbClr val="34D399"/>
                 </a:solidFill>
-                <a:latin typeface="Segoe UI"/>
+                <a:latin typeface="Segoe UI" panose="020B0502040204020203"/>
               </a:rPr>
               <a:t>6</a:t>
             </a:r>
+            <a:endParaRPr sz="3000" b="1" i="0">
+              <a:solidFill>
+                <a:srgbClr val="34D399"/>
+              </a:solidFill>
+              <a:latin typeface="Segoe UI" panose="020B0502040204020203"/>
+            </a:endParaRPr>
           </a:p>
         </p:txBody>
       </p:sp>
@@ -5529,7 +5697,7 @@
           <a:noFill/>
         </p:spPr>
         <p:txBody>
-          <a:bodyPr wrap="square" anchor="t" lIns="0" rIns="0" tIns="0" bIns="0">
+          <a:bodyPr wrap="square" lIns="0" tIns="0" rIns="0" bIns="0" anchor="t">
             <a:spAutoFit/>
           </a:bodyPr>
           <a:lstStyle/>
@@ -5547,10 +5715,16 @@
                 <a:solidFill>
                   <a:srgbClr val="D1FAE5"/>
                 </a:solidFill>
-                <a:latin typeface="Segoe UI"/>
+                <a:latin typeface="Segoe UI" panose="020B0502040204020203"/>
               </a:rPr>
               <a:t>LLM providers, auto-failover</a:t>
             </a:r>
+            <a:endParaRPr sz="1200" b="0" i="0">
+              <a:solidFill>
+                <a:srgbClr val="D1FAE5"/>
+              </a:solidFill>
+              <a:latin typeface="Segoe UI" panose="020B0502040204020203"/>
+            </a:endParaRPr>
           </a:p>
         </p:txBody>
       </p:sp>
@@ -5617,7 +5791,7 @@
           <a:noFill/>
         </p:spPr>
         <p:txBody>
-          <a:bodyPr wrap="square" anchor="t" lIns="0" rIns="0" tIns="0" bIns="0">
+          <a:bodyPr wrap="square" lIns="0" tIns="0" rIns="0" bIns="0" anchor="t">
             <a:spAutoFit/>
           </a:bodyPr>
           <a:lstStyle/>
@@ -5635,10 +5809,16 @@
                 <a:solidFill>
                   <a:srgbClr val="34D399"/>
                 </a:solidFill>
-                <a:latin typeface="Segoe UI"/>
+                <a:latin typeface="Segoe UI" panose="020B0502040204020203"/>
               </a:rPr>
               <a:t>5</a:t>
             </a:r>
+            <a:endParaRPr sz="3000" b="1" i="0">
+              <a:solidFill>
+                <a:srgbClr val="34D399"/>
+              </a:solidFill>
+              <a:latin typeface="Segoe UI" panose="020B0502040204020203"/>
+            </a:endParaRPr>
           </a:p>
         </p:txBody>
       </p:sp>
@@ -5659,7 +5839,7 @@
           <a:noFill/>
         </p:spPr>
         <p:txBody>
-          <a:bodyPr wrap="square" anchor="t" lIns="0" rIns="0" tIns="0" bIns="0">
+          <a:bodyPr wrap="square" lIns="0" tIns="0" rIns="0" bIns="0" anchor="t">
             <a:spAutoFit/>
           </a:bodyPr>
           <a:lstStyle/>
@@ -5677,10 +5857,16 @@
                 <a:solidFill>
                   <a:srgbClr val="D1FAE5"/>
                 </a:solidFill>
-                <a:latin typeface="Segoe UI"/>
+                <a:latin typeface="Segoe UI" panose="020B0502040204020203"/>
               </a:rPr>
               <a:t>languages/scripts supported</a:t>
             </a:r>
+            <a:endParaRPr sz="1200" b="0" i="0">
+              <a:solidFill>
+                <a:srgbClr val="D1FAE5"/>
+              </a:solidFill>
+              <a:latin typeface="Segoe UI" panose="020B0502040204020203"/>
+            </a:endParaRPr>
           </a:p>
         </p:txBody>
       </p:sp>
@@ -5701,7 +5887,7 @@
           <a:noFill/>
         </p:spPr>
         <p:txBody>
-          <a:bodyPr wrap="square" anchor="t" lIns="0" rIns="0" tIns="0" bIns="0">
+          <a:bodyPr wrap="square" lIns="0" tIns="0" rIns="0" bIns="0" anchor="t">
             <a:spAutoFit/>
           </a:bodyPr>
           <a:lstStyle/>
@@ -5719,10 +5905,16 @@
                 <a:solidFill>
                   <a:srgbClr val="34D399"/>
                 </a:solidFill>
-                <a:latin typeface="Segoe UI"/>
+                <a:latin typeface="Segoe UI" panose="020B0502040204020203"/>
               </a:rPr>
               <a:t>FastAPI · PostgreSQL (Neon) · Meta WhatsApp Business API · Render (API + scheduler) · Vercel (marketing site) · fpdf2 · APScheduler</a:t>
             </a:r>
+            <a:endParaRPr sz="1250" b="0" i="0">
+              <a:solidFill>
+                <a:srgbClr val="34D399"/>
+              </a:solidFill>
+              <a:latin typeface="Segoe UI" panose="020B0502040204020203"/>
+            </a:endParaRPr>
           </a:p>
         </p:txBody>
       </p:sp>
@@ -5787,7 +5979,7 @@
           <a:noFill/>
         </p:spPr>
         <p:txBody>
-          <a:bodyPr wrap="square" anchor="t" lIns="0" rIns="0" tIns="0" bIns="0">
+          <a:bodyPr wrap="square" lIns="0" tIns="0" rIns="0" bIns="0" anchor="t">
             <a:spAutoFit/>
           </a:bodyPr>
           <a:lstStyle/>
@@ -5805,10 +5997,16 @@
                 <a:solidFill>
                   <a:srgbClr val="475569"/>
                 </a:solidFill>
-                <a:latin typeface="Segoe UI"/>
+                <a:latin typeface="Segoe UI" panose="020B0502040204020203"/>
               </a:rPr>
               <a:t>OpsGenie</a:t>
             </a:r>
+            <a:endParaRPr sz="1000" b="1" i="0">
+              <a:solidFill>
+                <a:srgbClr val="475569"/>
+              </a:solidFill>
+              <a:latin typeface="Segoe UI" panose="020B0502040204020203"/>
+            </a:endParaRPr>
           </a:p>
         </p:txBody>
       </p:sp>
@@ -5829,7 +6027,7 @@
           <a:noFill/>
         </p:spPr>
         <p:txBody>
-          <a:bodyPr wrap="square" anchor="t" lIns="0" rIns="0" tIns="0" bIns="0">
+          <a:bodyPr wrap="square" lIns="0" tIns="0" rIns="0" bIns="0" anchor="t">
             <a:spAutoFit/>
           </a:bodyPr>
           <a:lstStyle/>
@@ -5847,10 +6045,16 @@
                 <a:solidFill>
                   <a:srgbClr val="475569"/>
                 </a:solidFill>
-                <a:latin typeface="Segoe UI"/>
+                <a:latin typeface="Segoe UI" panose="020B0502040204020203"/>
               </a:rPr>
               <a:t>11</a:t>
             </a:r>
+            <a:endParaRPr sz="1000" b="0" i="0">
+              <a:solidFill>
+                <a:srgbClr val="475569"/>
+              </a:solidFill>
+              <a:latin typeface="Segoe UI" panose="020B0502040204020203"/>
+            </a:endParaRPr>
           </a:p>
         </p:txBody>
       </p:sp>
@@ -5863,7 +6067,7 @@
 </file>
 
 <file path=ppt/slides/slide12.xml><?xml version="1.0" encoding="utf-8"?>
-<p:sld xmlns:a="http://schemas.openxmlformats.org/drawingml/2006/main" xmlns:p="http://schemas.openxmlformats.org/presentationml/2006/main" xmlns:r="http://schemas.openxmlformats.org/officeDocument/2006/relationships">
+<p:sld xmlns:a="http://schemas.openxmlformats.org/drawingml/2006/main" xmlns:r="http://schemas.openxmlformats.org/officeDocument/2006/relationships" xmlns:p="http://schemas.openxmlformats.org/presentationml/2006/main">
   <p:cSld>
     <p:bg>
       <p:bgPr>
@@ -5941,7 +6145,7 @@
           <a:noFill/>
         </p:spPr>
         <p:txBody>
-          <a:bodyPr wrap="square" anchor="t" lIns="0" rIns="0" tIns="0" bIns="0">
+          <a:bodyPr wrap="square" lIns="0" tIns="0" rIns="0" bIns="0" anchor="t">
             <a:spAutoFit/>
           </a:bodyPr>
           <a:lstStyle/>
@@ -5959,10 +6163,16 @@
                 <a:solidFill>
                   <a:srgbClr val="10B981"/>
                 </a:solidFill>
-                <a:latin typeface="Segoe UI"/>
+                <a:latin typeface="Segoe UI" panose="020B0502040204020203"/>
               </a:rPr>
               <a:t>TRACTION</a:t>
             </a:r>
+            <a:endParaRPr sz="1250" b="1" i="0">
+              <a:solidFill>
+                <a:srgbClr val="10B981"/>
+              </a:solidFill>
+              <a:latin typeface="Segoe UI" panose="020B0502040204020203"/>
+            </a:endParaRPr>
           </a:p>
         </p:txBody>
       </p:sp>
@@ -5983,7 +6193,7 @@
           <a:noFill/>
         </p:spPr>
         <p:txBody>
-          <a:bodyPr wrap="square" anchor="t" lIns="0" rIns="0" tIns="0" bIns="0">
+          <a:bodyPr wrap="square" lIns="0" tIns="0" rIns="0" bIns="0" anchor="t">
             <a:spAutoFit/>
           </a:bodyPr>
           <a:lstStyle/>
@@ -6004,10 +6214,16 @@
                 <a:solidFill>
                   <a:srgbClr val="064E3B"/>
                 </a:solidFill>
-                <a:latin typeface="Segoe UI"/>
+                <a:latin typeface="Segoe UI" panose="020B0502040204020203"/>
               </a:rPr>
               <a:t>Built solo. Shipped in production. Running on a real pilot.</a:t>
             </a:r>
+            <a:endParaRPr sz="3000" b="1" i="0">
+              <a:solidFill>
+                <a:srgbClr val="064E3B"/>
+              </a:solidFill>
+              <a:latin typeface="Segoe UI" panose="020B0502040204020203"/>
+            </a:endParaRPr>
           </a:p>
         </p:txBody>
       </p:sp>
@@ -6028,7 +6244,7 @@
           <a:noFill/>
         </p:spPr>
         <p:txBody>
-          <a:bodyPr wrap="square" anchor="t" lIns="0" rIns="0" tIns="0" bIns="0">
+          <a:bodyPr wrap="square" lIns="0" tIns="0" rIns="0" bIns="0" anchor="t">
             <a:spAutoFit/>
           </a:bodyPr>
           <a:lstStyle/>
@@ -6045,32 +6261,29 @@
               </a:spcAft>
             </a:pPr>
             <a:r>
+              <a:rPr sz="1300" b="1" i="0">
+                <a:solidFill>
+                  <a:srgbClr val="10B981"/>
+                </a:solidFill>
+                <a:latin typeface="Segoe UI" panose="020B0502040204020203"/>
+              </a:rPr>
+              <a:t>✓  </a:t>
+            </a:r>
+            <a:r>
               <a:rPr sz="1300" b="0" i="0">
                 <a:solidFill>
                   <a:srgbClr val="0F172A"/>
                 </a:solidFill>
-                <a:latin typeface="Segoe UI"/>
-              </a:rPr>
-              <a:t/>
-            </a:r>
-            <a:r>
-              <a:rPr sz="1300" b="1" i="0">
-                <a:solidFill>
-                  <a:srgbClr val="10B981"/>
-                </a:solidFill>
-                <a:latin typeface="Segoe UI"/>
-              </a:rPr>
-              <a:t>✓  </a:t>
-            </a:r>
-            <a:r>
-              <a:rPr sz="1300" b="0" i="0">
-                <a:solidFill>
-                  <a:srgbClr val="0F172A"/>
-                </a:solidFill>
-                <a:latin typeface="Segoe UI"/>
+                <a:latin typeface="Segoe UI" panose="020B0502040204020203"/>
               </a:rPr>
               <a:t>Live in production for a real distributor pilot on WhatsApp — not a sandboxed demo.</a:t>
             </a:r>
+            <a:endParaRPr sz="1300" b="0" i="0">
+              <a:solidFill>
+                <a:srgbClr val="0F172A"/>
+              </a:solidFill>
+              <a:latin typeface="Segoe UI" panose="020B0502040204020203"/>
+            </a:endParaRPr>
           </a:p>
           <a:p>
             <a:pPr algn="l">
@@ -6085,32 +6298,29 @@
               </a:spcAft>
             </a:pPr>
             <a:r>
+              <a:rPr sz="1300" b="1" i="0">
+                <a:solidFill>
+                  <a:srgbClr val="10B981"/>
+                </a:solidFill>
+                <a:latin typeface="Segoe UI" panose="020B0502040204020203"/>
+              </a:rPr>
+              <a:t>✓  </a:t>
+            </a:r>
+            <a:r>
               <a:rPr sz="1300" b="0" i="0">
                 <a:solidFill>
                   <a:srgbClr val="0F172A"/>
                 </a:solidFill>
-                <a:latin typeface="Segoe UI"/>
-              </a:rPr>
-              <a:t/>
-            </a:r>
-            <a:r>
-              <a:rPr sz="1300" b="1" i="0">
-                <a:solidFill>
-                  <a:srgbClr val="10B981"/>
-                </a:solidFill>
-                <a:latin typeface="Segoe UI"/>
-              </a:rPr>
-              <a:t>✓  </a:t>
-            </a:r>
-            <a:r>
-              <a:rPr sz="1300" b="0" i="0">
-                <a:solidFill>
-                  <a:srgbClr val="0F172A"/>
-                </a:solidFill>
-                <a:latin typeface="Segoe UI"/>
+                <a:latin typeface="Segoe UI" panose="020B0502040204020203"/>
               </a:rPr>
               <a:t>Every roadmap version shipped: V0.0 Proof of Value → V0.1 Operational Product → V0.2 Source of Truth → V0.3 Intelligence &amp; Expansion — all complete.</a:t>
             </a:r>
+            <a:endParaRPr sz="1300" b="0" i="0">
+              <a:solidFill>
+                <a:srgbClr val="0F172A"/>
+              </a:solidFill>
+              <a:latin typeface="Segoe UI" panose="020B0502040204020203"/>
+            </a:endParaRPr>
           </a:p>
           <a:p>
             <a:pPr algn="l">
@@ -6125,32 +6335,29 @@
               </a:spcAft>
             </a:pPr>
             <a:r>
+              <a:rPr sz="1300" b="1" i="0">
+                <a:solidFill>
+                  <a:srgbClr val="10B981"/>
+                </a:solidFill>
+                <a:latin typeface="Segoe UI" panose="020B0502040204020203"/>
+              </a:rPr>
+              <a:t>✓  </a:t>
+            </a:r>
+            <a:r>
               <a:rPr sz="1300" b="0" i="0">
                 <a:solidFill>
                   <a:srgbClr val="0F172A"/>
                 </a:solidFill>
-                <a:latin typeface="Segoe UI"/>
-              </a:rPr>
-              <a:t/>
-            </a:r>
-            <a:r>
-              <a:rPr sz="1300" b="1" i="0">
-                <a:solidFill>
-                  <a:srgbClr val="10B981"/>
-                </a:solidFill>
-                <a:latin typeface="Segoe UI"/>
-              </a:rPr>
-              <a:t>✓  </a:t>
-            </a:r>
-            <a:r>
-              <a:rPr sz="1300" b="0" i="0">
-                <a:solidFill>
-                  <a:srgbClr val="0F172A"/>
-                </a:solidFill>
-                <a:latin typeface="Segoe UI"/>
+                <a:latin typeface="Segoe UI" panose="020B0502040204020203"/>
               </a:rPr>
               <a:t>A full whole-codebase audit (≈32k LOC, 4 parallel domain reviews) found and fixed 8 real production-grade bugs — each shipped with a regression test proven to fail without the fix.</a:t>
             </a:r>
+            <a:endParaRPr sz="1300" b="0" i="0">
+              <a:solidFill>
+                <a:srgbClr val="0F172A"/>
+              </a:solidFill>
+              <a:latin typeface="Segoe UI" panose="020B0502040204020203"/>
+            </a:endParaRPr>
           </a:p>
           <a:p>
             <a:pPr algn="l">
@@ -6165,32 +6372,29 @@
               </a:spcAft>
             </a:pPr>
             <a:r>
+              <a:rPr sz="1300" b="1" i="0">
+                <a:solidFill>
+                  <a:srgbClr val="10B981"/>
+                </a:solidFill>
+                <a:latin typeface="Segoe UI" panose="020B0502040204020203"/>
+              </a:rPr>
+              <a:t>✓  </a:t>
+            </a:r>
+            <a:r>
               <a:rPr sz="1300" b="0" i="0">
                 <a:solidFill>
                   <a:srgbClr val="0F172A"/>
                 </a:solidFill>
-                <a:latin typeface="Segoe UI"/>
-              </a:rPr>
-              <a:t/>
-            </a:r>
-            <a:r>
-              <a:rPr sz="1300" b="1" i="0">
-                <a:solidFill>
-                  <a:srgbClr val="10B981"/>
-                </a:solidFill>
-                <a:latin typeface="Segoe UI"/>
-              </a:rPr>
-              <a:t>✓  </a:t>
-            </a:r>
-            <a:r>
-              <a:rPr sz="1300" b="0" i="0">
-                <a:solidFill>
-                  <a:srgbClr val="0F172A"/>
-                </a:solidFill>
-                <a:latin typeface="Segoe UI"/>
+                <a:latin typeface="Segoe UI" panose="020B0502040204020203"/>
               </a:rPr>
               <a:t>Live incidents diagnosed and resolved directly from the founder’s own WhatsApp screenshots while distributors were actively using it.</a:t>
             </a:r>
+            <a:endParaRPr sz="1300" b="0" i="0">
+              <a:solidFill>
+                <a:srgbClr val="0F172A"/>
+              </a:solidFill>
+              <a:latin typeface="Segoe UI" panose="020B0502040204020203"/>
+            </a:endParaRPr>
           </a:p>
         </p:txBody>
       </p:sp>
@@ -6259,7 +6463,7 @@
           <a:noFill/>
         </p:spPr>
         <p:txBody>
-          <a:bodyPr wrap="square" anchor="t" lIns="0" rIns="0" tIns="0" bIns="0">
+          <a:bodyPr wrap="square" lIns="0" tIns="0" rIns="0" bIns="0" anchor="t">
             <a:spAutoFit/>
           </a:bodyPr>
           <a:lstStyle/>
@@ -6277,10 +6481,16 @@
                 <a:solidFill>
                   <a:srgbClr val="064E3B"/>
                 </a:solidFill>
-                <a:latin typeface="Segoe UI"/>
+                <a:latin typeface="Segoe UI" panose="020B0502040204020203"/>
               </a:rPr>
               <a:t>Version roadmap</a:t>
             </a:r>
+            <a:endParaRPr sz="1300" b="1" i="0">
+              <a:solidFill>
+                <a:srgbClr val="064E3B"/>
+              </a:solidFill>
+              <a:latin typeface="Segoe UI" panose="020B0502040204020203"/>
+            </a:endParaRPr>
           </a:p>
         </p:txBody>
       </p:sp>
@@ -6345,7 +6555,7 @@
           <a:noFill/>
         </p:spPr>
         <p:txBody>
-          <a:bodyPr wrap="square" anchor="t" lIns="0" rIns="0" tIns="0" bIns="0">
+          <a:bodyPr wrap="square" lIns="0" tIns="0" rIns="0" bIns="0" anchor="t">
             <a:spAutoFit/>
           </a:bodyPr>
           <a:lstStyle/>
@@ -6362,32 +6572,29 @@
               </a:spcAft>
             </a:pPr>
             <a:r>
+              <a:rPr sz="1150" b="1" i="0">
+                <a:solidFill>
+                  <a:srgbClr val="10B981"/>
+                </a:solidFill>
+                <a:latin typeface="Segoe UI" panose="020B0502040204020203"/>
+              </a:rPr>
+              <a:t>V0.0  </a:t>
+            </a:r>
+            <a:r>
               <a:rPr sz="1150" b="0" i="0">
                 <a:solidFill>
-                  <a:srgbClr val="064E3B"/>
-                </a:solidFill>
-                <a:latin typeface="Segoe UI"/>
-              </a:rPr>
-              <a:t/>
-            </a:r>
-            <a:r>
-              <a:rPr sz="1150" b="1" i="0">
-                <a:solidFill>
-                  <a:srgbClr val="10B981"/>
-                </a:solidFill>
-                <a:latin typeface="Segoe UI"/>
-              </a:rPr>
-              <a:t>V0.0  </a:t>
-            </a:r>
-            <a:r>
-              <a:rPr sz="1150" b="0" i="0">
-                <a:solidFill>
                   <a:srgbClr val="0F172A"/>
                 </a:solidFill>
-                <a:latin typeface="Segoe UI"/>
+                <a:latin typeface="Segoe UI" panose="020B0502040204020203"/>
               </a:rPr>
               <a:t>Proof of Value</a:t>
             </a:r>
+            <a:endParaRPr sz="1150" b="0" i="0">
+              <a:solidFill>
+                <a:srgbClr val="0F172A"/>
+              </a:solidFill>
+              <a:latin typeface="Segoe UI" panose="020B0502040204020203"/>
+            </a:endParaRPr>
           </a:p>
         </p:txBody>
       </p:sp>
@@ -6452,7 +6659,7 @@
           <a:noFill/>
         </p:spPr>
         <p:txBody>
-          <a:bodyPr wrap="square" anchor="t" lIns="0" rIns="0" tIns="0" bIns="0">
+          <a:bodyPr wrap="square" lIns="0" tIns="0" rIns="0" bIns="0" anchor="t">
             <a:spAutoFit/>
           </a:bodyPr>
           <a:lstStyle/>
@@ -6469,32 +6676,29 @@
               </a:spcAft>
             </a:pPr>
             <a:r>
+              <a:rPr sz="1150" b="1" i="0">
+                <a:solidFill>
+                  <a:srgbClr val="10B981"/>
+                </a:solidFill>
+                <a:latin typeface="Segoe UI" panose="020B0502040204020203"/>
+              </a:rPr>
+              <a:t>V0.1  </a:t>
+            </a:r>
+            <a:r>
               <a:rPr sz="1150" b="0" i="0">
                 <a:solidFill>
-                  <a:srgbClr val="064E3B"/>
-                </a:solidFill>
-                <a:latin typeface="Segoe UI"/>
-              </a:rPr>
-              <a:t/>
-            </a:r>
-            <a:r>
-              <a:rPr sz="1150" b="1" i="0">
-                <a:solidFill>
-                  <a:srgbClr val="10B981"/>
-                </a:solidFill>
-                <a:latin typeface="Segoe UI"/>
-              </a:rPr>
-              <a:t>V0.1  </a:t>
-            </a:r>
-            <a:r>
-              <a:rPr sz="1150" b="0" i="0">
-                <a:solidFill>
                   <a:srgbClr val="0F172A"/>
                 </a:solidFill>
-                <a:latin typeface="Segoe UI"/>
+                <a:latin typeface="Segoe UI" panose="020B0502040204020203"/>
               </a:rPr>
               <a:t>Operational Product</a:t>
             </a:r>
+            <a:endParaRPr sz="1150" b="0" i="0">
+              <a:solidFill>
+                <a:srgbClr val="0F172A"/>
+              </a:solidFill>
+              <a:latin typeface="Segoe UI" panose="020B0502040204020203"/>
+            </a:endParaRPr>
           </a:p>
         </p:txBody>
       </p:sp>
@@ -6559,7 +6763,7 @@
           <a:noFill/>
         </p:spPr>
         <p:txBody>
-          <a:bodyPr wrap="square" anchor="t" lIns="0" rIns="0" tIns="0" bIns="0">
+          <a:bodyPr wrap="square" lIns="0" tIns="0" rIns="0" bIns="0" anchor="t">
             <a:spAutoFit/>
           </a:bodyPr>
           <a:lstStyle/>
@@ -6576,32 +6780,29 @@
               </a:spcAft>
             </a:pPr>
             <a:r>
+              <a:rPr sz="1150" b="1" i="0">
+                <a:solidFill>
+                  <a:srgbClr val="10B981"/>
+                </a:solidFill>
+                <a:latin typeface="Segoe UI" panose="020B0502040204020203"/>
+              </a:rPr>
+              <a:t>V0.2  </a:t>
+            </a:r>
+            <a:r>
               <a:rPr sz="1150" b="0" i="0">
                 <a:solidFill>
-                  <a:srgbClr val="064E3B"/>
-                </a:solidFill>
-                <a:latin typeface="Segoe UI"/>
-              </a:rPr>
-              <a:t/>
-            </a:r>
-            <a:r>
-              <a:rPr sz="1150" b="1" i="0">
-                <a:solidFill>
-                  <a:srgbClr val="10B981"/>
-                </a:solidFill>
-                <a:latin typeface="Segoe UI"/>
-              </a:rPr>
-              <a:t>V0.2  </a:t>
-            </a:r>
-            <a:r>
-              <a:rPr sz="1150" b="0" i="0">
-                <a:solidFill>
                   <a:srgbClr val="0F172A"/>
                 </a:solidFill>
-                <a:latin typeface="Segoe UI"/>
+                <a:latin typeface="Segoe UI" panose="020B0502040204020203"/>
               </a:rPr>
               <a:t>Source of Truth</a:t>
             </a:r>
+            <a:endParaRPr sz="1150" b="0" i="0">
+              <a:solidFill>
+                <a:srgbClr val="0F172A"/>
+              </a:solidFill>
+              <a:latin typeface="Segoe UI" panose="020B0502040204020203"/>
+            </a:endParaRPr>
           </a:p>
         </p:txBody>
       </p:sp>
@@ -6666,7 +6867,7 @@
           <a:noFill/>
         </p:spPr>
         <p:txBody>
-          <a:bodyPr wrap="square" anchor="t" lIns="0" rIns="0" tIns="0" bIns="0">
+          <a:bodyPr wrap="square" lIns="0" tIns="0" rIns="0" bIns="0" anchor="t">
             <a:spAutoFit/>
           </a:bodyPr>
           <a:lstStyle/>
@@ -6683,32 +6884,29 @@
               </a:spcAft>
             </a:pPr>
             <a:r>
+              <a:rPr sz="1150" b="1" i="0">
+                <a:solidFill>
+                  <a:srgbClr val="10B981"/>
+                </a:solidFill>
+                <a:latin typeface="Segoe UI" panose="020B0502040204020203"/>
+              </a:rPr>
+              <a:t>V0.3  </a:t>
+            </a:r>
+            <a:r>
               <a:rPr sz="1150" b="0" i="0">
                 <a:solidFill>
-                  <a:srgbClr val="064E3B"/>
-                </a:solidFill>
-                <a:latin typeface="Segoe UI"/>
-              </a:rPr>
-              <a:t/>
-            </a:r>
-            <a:r>
-              <a:rPr sz="1150" b="1" i="0">
-                <a:solidFill>
-                  <a:srgbClr val="10B981"/>
-                </a:solidFill>
-                <a:latin typeface="Segoe UI"/>
-              </a:rPr>
-              <a:t>V0.3  </a:t>
-            </a:r>
-            <a:r>
-              <a:rPr sz="1150" b="0" i="0">
-                <a:solidFill>
                   <a:srgbClr val="0F172A"/>
                 </a:solidFill>
-                <a:latin typeface="Segoe UI"/>
+                <a:latin typeface="Segoe UI" panose="020B0502040204020203"/>
               </a:rPr>
               <a:t>Intelligence &amp; Expansion</a:t>
             </a:r>
+            <a:endParaRPr sz="1150" b="0" i="0">
+              <a:solidFill>
+                <a:srgbClr val="0F172A"/>
+              </a:solidFill>
+              <a:latin typeface="Segoe UI" panose="020B0502040204020203"/>
+            </a:endParaRPr>
           </a:p>
         </p:txBody>
       </p:sp>
@@ -6773,7 +6971,7 @@
           <a:noFill/>
         </p:spPr>
         <p:txBody>
-          <a:bodyPr wrap="square" anchor="t" lIns="0" rIns="0" tIns="0" bIns="0">
+          <a:bodyPr wrap="square" lIns="0" tIns="0" rIns="0" bIns="0" anchor="t">
             <a:spAutoFit/>
           </a:bodyPr>
           <a:lstStyle/>
@@ -6790,32 +6988,29 @@
               </a:spcAft>
             </a:pPr>
             <a:r>
+              <a:rPr sz="1150" b="1" i="0">
+                <a:solidFill>
+                  <a:srgbClr val="10B981"/>
+                </a:solidFill>
+                <a:latin typeface="Segoe UI" panose="020B0502040204020203"/>
+              </a:rPr>
+              <a:t>Post-SPEC  </a:t>
+            </a:r>
+            <a:r>
               <a:rPr sz="1150" b="0" i="0">
                 <a:solidFill>
-                  <a:srgbClr val="064E3B"/>
-                </a:solidFill>
-                <a:latin typeface="Segoe UI"/>
-              </a:rPr>
-              <a:t/>
-            </a:r>
-            <a:r>
-              <a:rPr sz="1150" b="1" i="0">
-                <a:solidFill>
-                  <a:srgbClr val="10B981"/>
-                </a:solidFill>
-                <a:latin typeface="Segoe UI"/>
-              </a:rPr>
-              <a:t>Post-SPEC  </a:t>
-            </a:r>
-            <a:r>
-              <a:rPr sz="1150" b="0" i="0">
-                <a:solidFill>
                   <a:srgbClr val="0F172A"/>
                 </a:solidFill>
-                <a:latin typeface="Segoe UI"/>
+                <a:latin typeface="Segoe UI" panose="020B0502040204020203"/>
               </a:rPr>
               <a:t>Onboarding, dashboard, multilingual, OCR, forecasts</a:t>
             </a:r>
+            <a:endParaRPr sz="1150" b="0" i="0">
+              <a:solidFill>
+                <a:srgbClr val="0F172A"/>
+              </a:solidFill>
+              <a:latin typeface="Segoe UI" panose="020B0502040204020203"/>
+            </a:endParaRPr>
           </a:p>
         </p:txBody>
       </p:sp>
@@ -6880,7 +7075,7 @@
           <a:noFill/>
         </p:spPr>
         <p:txBody>
-          <a:bodyPr wrap="square" anchor="t" lIns="0" rIns="0" tIns="0" bIns="0">
+          <a:bodyPr wrap="square" lIns="0" tIns="0" rIns="0" bIns="0" anchor="t">
             <a:spAutoFit/>
           </a:bodyPr>
           <a:lstStyle/>
@@ -6898,10 +7093,16 @@
                 <a:solidFill>
                   <a:srgbClr val="475569"/>
                 </a:solidFill>
-                <a:latin typeface="Segoe UI"/>
+                <a:latin typeface="Segoe UI" panose="020B0502040204020203"/>
               </a:rPr>
               <a:t>OpsGenie</a:t>
             </a:r>
+            <a:endParaRPr sz="1000" b="1" i="0">
+              <a:solidFill>
+                <a:srgbClr val="475569"/>
+              </a:solidFill>
+              <a:latin typeface="Segoe UI" panose="020B0502040204020203"/>
+            </a:endParaRPr>
           </a:p>
         </p:txBody>
       </p:sp>
@@ -6922,7 +7123,7 @@
           <a:noFill/>
         </p:spPr>
         <p:txBody>
-          <a:bodyPr wrap="square" anchor="t" lIns="0" rIns="0" tIns="0" bIns="0">
+          <a:bodyPr wrap="square" lIns="0" tIns="0" rIns="0" bIns="0" anchor="t">
             <a:spAutoFit/>
           </a:bodyPr>
           <a:lstStyle/>
@@ -6940,10 +7141,16 @@
                 <a:solidFill>
                   <a:srgbClr val="475569"/>
                 </a:solidFill>
-                <a:latin typeface="Segoe UI"/>
+                <a:latin typeface="Segoe UI" panose="020B0502040204020203"/>
               </a:rPr>
               <a:t>12</a:t>
             </a:r>
+            <a:endParaRPr sz="1000" b="0" i="0">
+              <a:solidFill>
+                <a:srgbClr val="475569"/>
+              </a:solidFill>
+              <a:latin typeface="Segoe UI" panose="020B0502040204020203"/>
+            </a:endParaRPr>
           </a:p>
         </p:txBody>
       </p:sp>
@@ -6956,7 +7163,7 @@
 </file>
 
 <file path=ppt/slides/slide13.xml><?xml version="1.0" encoding="utf-8"?>
-<p:sld xmlns:a="http://schemas.openxmlformats.org/drawingml/2006/main" xmlns:p="http://schemas.openxmlformats.org/presentationml/2006/main" xmlns:r="http://schemas.openxmlformats.org/officeDocument/2006/relationships">
+<p:sld xmlns:a="http://schemas.openxmlformats.org/drawingml/2006/main" xmlns:r="http://schemas.openxmlformats.org/officeDocument/2006/relationships" xmlns:p="http://schemas.openxmlformats.org/presentationml/2006/main">
   <p:cSld>
     <p:bg>
       <p:bgPr>
@@ -7034,7 +7241,7 @@
           <a:noFill/>
         </p:spPr>
         <p:txBody>
-          <a:bodyPr wrap="square" anchor="t" lIns="0" rIns="0" tIns="0" bIns="0">
+          <a:bodyPr wrap="square" lIns="0" tIns="0" rIns="0" bIns="0" anchor="t">
             <a:spAutoFit/>
           </a:bodyPr>
           <a:lstStyle/>
@@ -7052,10 +7259,16 @@
                 <a:solidFill>
                   <a:srgbClr val="10B981"/>
                 </a:solidFill>
-                <a:latin typeface="Segoe UI"/>
+                <a:latin typeface="Segoe UI" panose="020B0502040204020203"/>
               </a:rPr>
               <a:t>MARKET</a:t>
             </a:r>
+            <a:endParaRPr sz="1250" b="1" i="0">
+              <a:solidFill>
+                <a:srgbClr val="10B981"/>
+              </a:solidFill>
+              <a:latin typeface="Segoe UI" panose="020B0502040204020203"/>
+            </a:endParaRPr>
           </a:p>
         </p:txBody>
       </p:sp>
@@ -7076,7 +7289,7 @@
           <a:noFill/>
         </p:spPr>
         <p:txBody>
-          <a:bodyPr wrap="square" anchor="t" lIns="0" rIns="0" tIns="0" bIns="0">
+          <a:bodyPr wrap="square" lIns="0" tIns="0" rIns="0" bIns="0" anchor="t">
             <a:spAutoFit/>
           </a:bodyPr>
           <a:lstStyle/>
@@ -7097,10 +7310,16 @@
                 <a:solidFill>
                   <a:srgbClr val="064E3B"/>
                 </a:solidFill>
-                <a:latin typeface="Segoe UI"/>
+                <a:latin typeface="Segoe UI" panose="020B0502040204020203"/>
               </a:rPr>
               <a:t>A large, underserved, WhatsApp-native customer base</a:t>
             </a:r>
+            <a:endParaRPr sz="3000" b="1" i="0">
+              <a:solidFill>
+                <a:srgbClr val="064E3B"/>
+              </a:solidFill>
+              <a:latin typeface="Segoe UI" panose="020B0502040204020203"/>
+            </a:endParaRPr>
           </a:p>
         </p:txBody>
       </p:sp>
@@ -7121,7 +7340,7 @@
           <a:noFill/>
         </p:spPr>
         <p:txBody>
-          <a:bodyPr wrap="square" anchor="t" lIns="0" rIns="0" tIns="0" bIns="0">
+          <a:bodyPr wrap="square" lIns="0" tIns="0" rIns="0" bIns="0" anchor="t">
             <a:spAutoFit/>
           </a:bodyPr>
           <a:lstStyle/>
@@ -7139,10 +7358,16 @@
                 <a:solidFill>
                   <a:srgbClr val="064E3B"/>
                 </a:solidFill>
-                <a:latin typeface="Segoe UI"/>
+                <a:latin typeface="Segoe UI" panose="020B0502040204020203"/>
               </a:rPr>
               <a:t>Who we serve</a:t>
             </a:r>
+            <a:endParaRPr sz="1500" b="1" i="0">
+              <a:solidFill>
+                <a:srgbClr val="064E3B"/>
+              </a:solidFill>
+              <a:latin typeface="Segoe UI" panose="020B0502040204020203"/>
+            </a:endParaRPr>
           </a:p>
           <a:p>
             <a:pPr algn="l">
@@ -7161,10 +7386,16 @@
                 <a:solidFill>
                   <a:srgbClr val="475569"/>
                 </a:solidFill>
-                <a:latin typeface="Segoe UI"/>
+                <a:latin typeface="Segoe UI" panose="020B0502040204020203"/>
               </a:rPr>
               <a:t>FMCG, pharma, poultry/agri and wholesale B2B distributors already running Tally or Vyapar, managing 20–50 dealer accounts, facing cash-flow surprises monthly or more often.</a:t>
             </a:r>
+            <a:endParaRPr sz="1250" b="0" i="0">
+              <a:solidFill>
+                <a:srgbClr val="475569"/>
+              </a:solidFill>
+              <a:latin typeface="Segoe UI" panose="020B0502040204020203"/>
+            </a:endParaRPr>
           </a:p>
           <a:p>
             <a:pPr algn="l">
@@ -7180,10 +7411,16 @@
                 <a:solidFill>
                   <a:srgbClr val="064E3B"/>
                 </a:solidFill>
-                <a:latin typeface="Segoe UI"/>
+                <a:latin typeface="Segoe UI" panose="020B0502040204020203"/>
               </a:rPr>
               <a:t>Why WhatsApp is the wedge</a:t>
             </a:r>
+            <a:endParaRPr sz="1500" b="1" i="0">
+              <a:solidFill>
+                <a:srgbClr val="064E3B"/>
+              </a:solidFill>
+              <a:latin typeface="Segoe UI" panose="020B0502040204020203"/>
+            </a:endParaRPr>
           </a:p>
           <a:p>
             <a:pPr algn="l">
@@ -7202,10 +7439,16 @@
                 <a:solidFill>
                   <a:srgbClr val="475569"/>
                 </a:solidFill>
-                <a:latin typeface="Segoe UI"/>
+                <a:latin typeface="Segoe UI" panose="020B0502040204020203"/>
               </a:rPr>
               <a:t>It's already their primary business channel — no app to install, no login to remember, no training session required.</a:t>
             </a:r>
+            <a:endParaRPr sz="1250" b="0" i="0">
+              <a:solidFill>
+                <a:srgbClr val="475569"/>
+              </a:solidFill>
+              <a:latin typeface="Segoe UI" panose="020B0502040204020203"/>
+            </a:endParaRPr>
           </a:p>
           <a:p>
             <a:pPr algn="l">
@@ -7221,10 +7464,16 @@
                 <a:solidFill>
                   <a:srgbClr val="064E3B"/>
                 </a:solidFill>
-                <a:latin typeface="Segoe UI"/>
+                <a:latin typeface="Segoe UI" panose="020B0502040204020203"/>
               </a:rPr>
               <a:t>Why now</a:t>
             </a:r>
+            <a:endParaRPr sz="1500" b="1" i="0">
+              <a:solidFill>
+                <a:srgbClr val="064E3B"/>
+              </a:solidFill>
+              <a:latin typeface="Segoe UI" panose="020B0502040204020203"/>
+            </a:endParaRPr>
           </a:p>
           <a:p>
             <a:pPr algn="l">
@@ -7243,10 +7492,16 @@
                 <a:solidFill>
                   <a:srgbClr val="475569"/>
                 </a:solidFill>
-                <a:latin typeface="Segoe UI"/>
+                <a:latin typeface="Segoe UI" panose="020B0502040204020203"/>
               </a:rPr>
               <a:t>WhatsApp Business API access, capable low-cost LLMs, and India's UPI/GST-driven digitization of small-business records have only recently made this combination viable.</a:t>
             </a:r>
+            <a:endParaRPr sz="1250" b="0" i="0">
+              <a:solidFill>
+                <a:srgbClr val="475569"/>
+              </a:solidFill>
+              <a:latin typeface="Segoe UI" panose="020B0502040204020203"/>
+            </a:endParaRPr>
           </a:p>
         </p:txBody>
       </p:sp>
@@ -7313,7 +7568,7 @@
           <a:noFill/>
         </p:spPr>
         <p:txBody>
-          <a:bodyPr wrap="square" anchor="t" lIns="0" rIns="0" tIns="0" bIns="0">
+          <a:bodyPr wrap="square" lIns="0" tIns="0" rIns="0" bIns="0" anchor="t">
             <a:spAutoFit/>
           </a:bodyPr>
           <a:lstStyle/>
@@ -7331,10 +7586,16 @@
                 <a:solidFill>
                   <a:srgbClr val="34D399"/>
                 </a:solidFill>
-                <a:latin typeface="Segoe UI"/>
+                <a:latin typeface="Segoe UI" panose="020B0502040204020203"/>
               </a:rPr>
               <a:t>Sizing (illustrative — refine before pitching)</a:t>
             </a:r>
+            <a:endParaRPr sz="1200" b="1" i="0">
+              <a:solidFill>
+                <a:srgbClr val="34D399"/>
+              </a:solidFill>
+              <a:latin typeface="Segoe UI" panose="020B0502040204020203"/>
+            </a:endParaRPr>
           </a:p>
         </p:txBody>
       </p:sp>
@@ -7355,7 +7616,7 @@
           <a:noFill/>
         </p:spPr>
         <p:txBody>
-          <a:bodyPr wrap="square" anchor="t" lIns="0" rIns="0" tIns="0" bIns="0">
+          <a:bodyPr wrap="square" lIns="0" tIns="0" rIns="0" bIns="0" anchor="t">
             <a:spAutoFit/>
           </a:bodyPr>
           <a:lstStyle/>
@@ -7373,10 +7634,16 @@
                 <a:solidFill>
                   <a:srgbClr val="D1FAE5"/>
                 </a:solidFill>
-                <a:latin typeface="Segoe UI"/>
+                <a:latin typeface="Segoe UI" panose="020B0502040204020203"/>
               </a:rPr>
               <a:t>Tally-using businesses in India</a:t>
             </a:r>
+            <a:endParaRPr sz="1100" b="0" i="0">
+              <a:solidFill>
+                <a:srgbClr val="D1FAE5"/>
+              </a:solidFill>
+              <a:latin typeface="Segoe UI" panose="020B0502040204020203"/>
+            </a:endParaRPr>
           </a:p>
         </p:txBody>
       </p:sp>
@@ -7397,7 +7664,7 @@
           <a:noFill/>
         </p:spPr>
         <p:txBody>
-          <a:bodyPr wrap="square" anchor="t" lIns="0" rIns="0" tIns="0" bIns="0">
+          <a:bodyPr wrap="square" lIns="0" tIns="0" rIns="0" bIns="0" anchor="t">
             <a:spAutoFit/>
           </a:bodyPr>
           <a:lstStyle/>
@@ -7415,10 +7682,16 @@
                 <a:solidFill>
                   <a:srgbClr val="34D399"/>
                 </a:solidFill>
-                <a:latin typeface="Segoe UI"/>
+                <a:latin typeface="Segoe UI" panose="020B0502040204020203"/>
               </a:rPr>
               <a:t>2M+ (public Tally figure)</a:t>
             </a:r>
+            <a:endParaRPr sz="1350" b="1" i="0">
+              <a:solidFill>
+                <a:srgbClr val="34D399"/>
+              </a:solidFill>
+              <a:latin typeface="Segoe UI" panose="020B0502040204020203"/>
+            </a:endParaRPr>
           </a:p>
         </p:txBody>
       </p:sp>
@@ -7439,7 +7712,7 @@
           <a:noFill/>
         </p:spPr>
         <p:txBody>
-          <a:bodyPr wrap="square" anchor="t" lIns="0" rIns="0" tIns="0" bIns="0">
+          <a:bodyPr wrap="square" lIns="0" tIns="0" rIns="0" bIns="0" anchor="t">
             <a:spAutoFit/>
           </a:bodyPr>
           <a:lstStyle/>
@@ -7457,10 +7730,16 @@
                 <a:solidFill>
                   <a:srgbClr val="D1FAE5"/>
                 </a:solidFill>
-                <a:latin typeface="Segoe UI"/>
+                <a:latin typeface="Segoe UI" panose="020B0502040204020203"/>
               </a:rPr>
               <a:t>Est. B2B distributors, target profile</a:t>
             </a:r>
+            <a:endParaRPr sz="1100" b="0" i="0">
+              <a:solidFill>
+                <a:srgbClr val="D1FAE5"/>
+              </a:solidFill>
+              <a:latin typeface="Segoe UI" panose="020B0502040204020203"/>
+            </a:endParaRPr>
           </a:p>
         </p:txBody>
       </p:sp>
@@ -7481,7 +7760,7 @@
           <a:noFill/>
         </p:spPr>
         <p:txBody>
-          <a:bodyPr wrap="square" anchor="t" lIns="0" rIns="0" tIns="0" bIns="0">
+          <a:bodyPr wrap="square" lIns="0" tIns="0" rIns="0" bIns="0" anchor="t">
             <a:spAutoFit/>
           </a:bodyPr>
           <a:lstStyle/>
@@ -7499,10 +7778,16 @@
                 <a:solidFill>
                   <a:srgbClr val="D97706"/>
                 </a:solidFill>
-                <a:latin typeface="Segoe UI"/>
+                <a:latin typeface="Segoe UI" panose="020B0502040204020203"/>
               </a:rPr>
               <a:t>[X hundred thousand — size this]</a:t>
             </a:r>
+            <a:endParaRPr sz="1350" b="1" i="0">
+              <a:solidFill>
+                <a:srgbClr val="D97706"/>
+              </a:solidFill>
+              <a:latin typeface="Segoe UI" panose="020B0502040204020203"/>
+            </a:endParaRPr>
           </a:p>
         </p:txBody>
       </p:sp>
@@ -7523,7 +7808,7 @@
           <a:noFill/>
         </p:spPr>
         <p:txBody>
-          <a:bodyPr wrap="square" anchor="t" lIns="0" rIns="0" tIns="0" bIns="0">
+          <a:bodyPr wrap="square" lIns="0" tIns="0" rIns="0" bIns="0" anchor="t">
             <a:spAutoFit/>
           </a:bodyPr>
           <a:lstStyle/>
@@ -7541,10 +7826,16 @@
                 <a:solidFill>
                   <a:srgbClr val="D1FAE5"/>
                 </a:solidFill>
-                <a:latin typeface="Segoe UI"/>
+                <a:latin typeface="Segoe UI" panose="020B0502040204020203"/>
               </a:rPr>
               <a:t>SAM (reachable via WhatsApp, GST-registered)</a:t>
             </a:r>
+            <a:endParaRPr sz="1100" b="0" i="0">
+              <a:solidFill>
+                <a:srgbClr val="D1FAE5"/>
+              </a:solidFill>
+              <a:latin typeface="Segoe UI" panose="020B0502040204020203"/>
+            </a:endParaRPr>
           </a:p>
         </p:txBody>
       </p:sp>
@@ -7565,7 +7856,7 @@
           <a:noFill/>
         </p:spPr>
         <p:txBody>
-          <a:bodyPr wrap="square" anchor="t" lIns="0" rIns="0" tIns="0" bIns="0">
+          <a:bodyPr wrap="square" lIns="0" tIns="0" rIns="0" bIns="0" anchor="t">
             <a:spAutoFit/>
           </a:bodyPr>
           <a:lstStyle/>
@@ -7583,10 +7874,16 @@
                 <a:solidFill>
                   <a:srgbClr val="D97706"/>
                 </a:solidFill>
-                <a:latin typeface="Segoe UI"/>
+                <a:latin typeface="Segoe UI" panose="020B0502040204020203"/>
               </a:rPr>
               <a:t>[refine]</a:t>
             </a:r>
+            <a:endParaRPr sz="1350" b="1" i="0">
+              <a:solidFill>
+                <a:srgbClr val="D97706"/>
+              </a:solidFill>
+              <a:latin typeface="Segoe UI" panose="020B0502040204020203"/>
+            </a:endParaRPr>
           </a:p>
         </p:txBody>
       </p:sp>
@@ -7607,7 +7904,7 @@
           <a:noFill/>
         </p:spPr>
         <p:txBody>
-          <a:bodyPr wrap="square" anchor="t" lIns="0" rIns="0" tIns="0" bIns="0">
+          <a:bodyPr wrap="square" lIns="0" tIns="0" rIns="0" bIns="0" anchor="t">
             <a:spAutoFit/>
           </a:bodyPr>
           <a:lstStyle/>
@@ -7625,10 +7922,16 @@
                 <a:solidFill>
                   <a:srgbClr val="D1FAE5"/>
                 </a:solidFill>
-                <a:latin typeface="Segoe UI"/>
+                <a:latin typeface="Segoe UI" panose="020B0502040204020203"/>
               </a:rPr>
               <a:t>SOM (Yr 1 pilot geography)</a:t>
             </a:r>
+            <a:endParaRPr sz="1100" b="0" i="0">
+              <a:solidFill>
+                <a:srgbClr val="D1FAE5"/>
+              </a:solidFill>
+              <a:latin typeface="Segoe UI" panose="020B0502040204020203"/>
+            </a:endParaRPr>
           </a:p>
         </p:txBody>
       </p:sp>
@@ -7649,7 +7952,7 @@
           <a:noFill/>
         </p:spPr>
         <p:txBody>
-          <a:bodyPr wrap="square" anchor="t" lIns="0" rIns="0" tIns="0" bIns="0">
+          <a:bodyPr wrap="square" lIns="0" tIns="0" rIns="0" bIns="0" anchor="t">
             <a:spAutoFit/>
           </a:bodyPr>
           <a:lstStyle/>
@@ -7667,10 +7970,16 @@
                 <a:solidFill>
                   <a:srgbClr val="D97706"/>
                 </a:solidFill>
-                <a:latin typeface="Segoe UI"/>
+                <a:latin typeface="Segoe UI" panose="020B0502040204020203"/>
               </a:rPr>
               <a:t>[refine]</a:t>
             </a:r>
+            <a:endParaRPr sz="1350" b="1" i="0">
+              <a:solidFill>
+                <a:srgbClr val="D97706"/>
+              </a:solidFill>
+              <a:latin typeface="Segoe UI" panose="020B0502040204020203"/>
+            </a:endParaRPr>
           </a:p>
         </p:txBody>
       </p:sp>
@@ -7735,7 +8044,7 @@
           <a:noFill/>
         </p:spPr>
         <p:txBody>
-          <a:bodyPr wrap="square" anchor="t" lIns="0" rIns="0" tIns="0" bIns="0">
+          <a:bodyPr wrap="square" lIns="0" tIns="0" rIns="0" bIns="0" anchor="t">
             <a:spAutoFit/>
           </a:bodyPr>
           <a:lstStyle/>
@@ -7753,10 +8062,16 @@
                 <a:solidFill>
                   <a:srgbClr val="475569"/>
                 </a:solidFill>
-                <a:latin typeface="Segoe UI"/>
+                <a:latin typeface="Segoe UI" panose="020B0502040204020203"/>
               </a:rPr>
               <a:t>OpsGenie</a:t>
             </a:r>
+            <a:endParaRPr sz="1000" b="1" i="0">
+              <a:solidFill>
+                <a:srgbClr val="475569"/>
+              </a:solidFill>
+              <a:latin typeface="Segoe UI" panose="020B0502040204020203"/>
+            </a:endParaRPr>
           </a:p>
         </p:txBody>
       </p:sp>
@@ -7777,7 +8092,7 @@
           <a:noFill/>
         </p:spPr>
         <p:txBody>
-          <a:bodyPr wrap="square" anchor="t" lIns="0" rIns="0" tIns="0" bIns="0">
+          <a:bodyPr wrap="square" lIns="0" tIns="0" rIns="0" bIns="0" anchor="t">
             <a:spAutoFit/>
           </a:bodyPr>
           <a:lstStyle/>
@@ -7795,10 +8110,16 @@
                 <a:solidFill>
                   <a:srgbClr val="475569"/>
                 </a:solidFill>
-                <a:latin typeface="Segoe UI"/>
+                <a:latin typeface="Segoe UI" panose="020B0502040204020203"/>
               </a:rPr>
               <a:t>13</a:t>
             </a:r>
+            <a:endParaRPr sz="1000" b="0" i="0">
+              <a:solidFill>
+                <a:srgbClr val="475569"/>
+              </a:solidFill>
+              <a:latin typeface="Segoe UI" panose="020B0502040204020203"/>
+            </a:endParaRPr>
           </a:p>
         </p:txBody>
       </p:sp>
@@ -7811,7 +8132,7 @@
 </file>
 
 <file path=ppt/slides/slide14.xml><?xml version="1.0" encoding="utf-8"?>
-<p:sld xmlns:a="http://schemas.openxmlformats.org/drawingml/2006/main" xmlns:p="http://schemas.openxmlformats.org/presentationml/2006/main" xmlns:r="http://schemas.openxmlformats.org/officeDocument/2006/relationships">
+<p:sld xmlns:a="http://schemas.openxmlformats.org/drawingml/2006/main" xmlns:r="http://schemas.openxmlformats.org/officeDocument/2006/relationships" xmlns:p="http://schemas.openxmlformats.org/presentationml/2006/main">
   <p:cSld>
     <p:bg>
       <p:bgPr>
@@ -7889,7 +8210,7 @@
           <a:noFill/>
         </p:spPr>
         <p:txBody>
-          <a:bodyPr wrap="square" anchor="t" lIns="0" rIns="0" tIns="0" bIns="0">
+          <a:bodyPr wrap="square" lIns="0" tIns="0" rIns="0" bIns="0" anchor="t">
             <a:spAutoFit/>
           </a:bodyPr>
           <a:lstStyle/>
@@ -7907,10 +8228,16 @@
                 <a:solidFill>
                   <a:srgbClr val="10B981"/>
                 </a:solidFill>
-                <a:latin typeface="Segoe UI"/>
+                <a:latin typeface="Segoe UI" panose="020B0502040204020203"/>
               </a:rPr>
               <a:t>BUSINESS MODEL</a:t>
             </a:r>
+            <a:endParaRPr sz="1250" b="1" i="0">
+              <a:solidFill>
+                <a:srgbClr val="10B981"/>
+              </a:solidFill>
+              <a:latin typeface="Segoe UI" panose="020B0502040204020203"/>
+            </a:endParaRPr>
           </a:p>
         </p:txBody>
       </p:sp>
@@ -7931,7 +8258,7 @@
           <a:noFill/>
         </p:spPr>
         <p:txBody>
-          <a:bodyPr wrap="square" anchor="t" lIns="0" rIns="0" tIns="0" bIns="0">
+          <a:bodyPr wrap="square" lIns="0" tIns="0" rIns="0" bIns="0" anchor="t">
             <a:spAutoFit/>
           </a:bodyPr>
           <a:lstStyle/>
@@ -7952,10 +8279,16 @@
                 <a:solidFill>
                   <a:srgbClr val="064E3B"/>
                 </a:solidFill>
-                <a:latin typeface="Segoe UI"/>
+                <a:latin typeface="Segoe UI" panose="020B0502040204020203"/>
               </a:rPr>
               <a:t>Simple SaaS, distribution through the network already in the chat</a:t>
             </a:r>
+            <a:endParaRPr sz="3000" b="1" i="0">
+              <a:solidFill>
+                <a:srgbClr val="064E3B"/>
+              </a:solidFill>
+              <a:latin typeface="Segoe UI" panose="020B0502040204020203"/>
+            </a:endParaRPr>
           </a:p>
         </p:txBody>
       </p:sp>
@@ -8024,7 +8357,7 @@
           <a:noFill/>
         </p:spPr>
         <p:txBody>
-          <a:bodyPr wrap="square" anchor="t" lIns="0" rIns="0" tIns="0" bIns="0">
+          <a:bodyPr wrap="square" lIns="0" tIns="0" rIns="0" bIns="0" anchor="t">
             <a:spAutoFit/>
           </a:bodyPr>
           <a:lstStyle/>
@@ -8042,10 +8375,16 @@
                 <a:solidFill>
                   <a:srgbClr val="064E3B"/>
                 </a:solidFill>
-                <a:latin typeface="Segoe UI"/>
+                <a:latin typeface="Segoe UI" panose="020B0502040204020203"/>
               </a:rPr>
               <a:t>Subscription</a:t>
             </a:r>
+            <a:endParaRPr sz="1550" b="1" i="0">
+              <a:solidFill>
+                <a:srgbClr val="064E3B"/>
+              </a:solidFill>
+              <a:latin typeface="Segoe UI" panose="020B0502040204020203"/>
+            </a:endParaRPr>
           </a:p>
         </p:txBody>
       </p:sp>
@@ -8066,7 +8405,7 @@
           <a:noFill/>
         </p:spPr>
         <p:txBody>
-          <a:bodyPr wrap="square" anchor="t" lIns="0" rIns="0" tIns="0" bIns="0">
+          <a:bodyPr wrap="square" lIns="0" tIns="0" rIns="0" bIns="0" anchor="t">
             <a:spAutoFit/>
           </a:bodyPr>
           <a:lstStyle/>
@@ -8087,10 +8426,16 @@
                 <a:solidFill>
                   <a:srgbClr val="475569"/>
                 </a:solidFill>
-                <a:latin typeface="Segoe UI"/>
+                <a:latin typeface="Segoe UI" panose="020B0502040204020203"/>
               </a:rPr>
               <a:t>₹999/month per distributor (pilot pricing). Founder-activated today; self-serve payment is the next infrastructure step.</a:t>
             </a:r>
+            <a:endParaRPr sz="1200" b="0" i="0">
+              <a:solidFill>
+                <a:srgbClr val="475569"/>
+              </a:solidFill>
+              <a:latin typeface="Segoe UI" panose="020B0502040204020203"/>
+            </a:endParaRPr>
           </a:p>
         </p:txBody>
       </p:sp>
@@ -8159,7 +8504,7 @@
           <a:noFill/>
         </p:spPr>
         <p:txBody>
-          <a:bodyPr wrap="square" anchor="t" lIns="0" rIns="0" tIns="0" bIns="0">
+          <a:bodyPr wrap="square" lIns="0" tIns="0" rIns="0" bIns="0" anchor="t">
             <a:spAutoFit/>
           </a:bodyPr>
           <a:lstStyle/>
@@ -8177,10 +8522,16 @@
                 <a:solidFill>
                   <a:srgbClr val="064E3B"/>
                 </a:solidFill>
-                <a:latin typeface="Segoe UI"/>
+                <a:latin typeface="Segoe UI" panose="020B0502040204020203"/>
               </a:rPr>
               <a:t>Low CAC channel</a:t>
             </a:r>
+            <a:endParaRPr sz="1550" b="1" i="0">
+              <a:solidFill>
+                <a:srgbClr val="064E3B"/>
+              </a:solidFill>
+              <a:latin typeface="Segoe UI" panose="020B0502040204020203"/>
+            </a:endParaRPr>
           </a:p>
         </p:txBody>
       </p:sp>
@@ -8201,7 +8552,7 @@
           <a:noFill/>
         </p:spPr>
         <p:txBody>
-          <a:bodyPr wrap="square" anchor="t" lIns="0" rIns="0" tIns="0" bIns="0">
+          <a:bodyPr wrap="square" lIns="0" tIns="0" rIns="0" bIns="0" anchor="t">
             <a:spAutoFit/>
           </a:bodyPr>
           <a:lstStyle/>
@@ -8222,10 +8573,16 @@
                 <a:solidFill>
                   <a:srgbClr val="475569"/>
                 </a:solidFill>
-                <a:latin typeface="Segoe UI"/>
+                <a:latin typeface="Segoe UI" panose="020B0502040204020203"/>
               </a:rPr>
               <a:t>WhatsApp is both the product and the distribution surface — a distributor’s own dealer/supplier network sees the product working.</a:t>
             </a:r>
+            <a:endParaRPr sz="1200" b="0" i="0">
+              <a:solidFill>
+                <a:srgbClr val="475569"/>
+              </a:solidFill>
+              <a:latin typeface="Segoe UI" panose="020B0502040204020203"/>
+            </a:endParaRPr>
           </a:p>
         </p:txBody>
       </p:sp>
@@ -8294,7 +8651,7 @@
           <a:noFill/>
         </p:spPr>
         <p:txBody>
-          <a:bodyPr wrap="square" anchor="t" lIns="0" rIns="0" tIns="0" bIns="0">
+          <a:bodyPr wrap="square" lIns="0" tIns="0" rIns="0" bIns="0" anchor="t">
             <a:spAutoFit/>
           </a:bodyPr>
           <a:lstStyle/>
@@ -8312,10 +8669,16 @@
                 <a:solidFill>
                   <a:srgbClr val="064E3B"/>
                 </a:solidFill>
-                <a:latin typeface="Segoe UI"/>
+                <a:latin typeface="Segoe UI" panose="020B0502040204020203"/>
               </a:rPr>
               <a:t>Expansion path</a:t>
             </a:r>
+            <a:endParaRPr sz="1550" b="1" i="0">
+              <a:solidFill>
+                <a:srgbClr val="064E3B"/>
+              </a:solidFill>
+              <a:latin typeface="Segoe UI" panose="020B0502040204020203"/>
+            </a:endParaRPr>
           </a:p>
         </p:txBody>
       </p:sp>
@@ -8336,7 +8699,7 @@
           <a:noFill/>
         </p:spPr>
         <p:txBody>
-          <a:bodyPr wrap="square" anchor="t" lIns="0" rIns="0" tIns="0" bIns="0">
+          <a:bodyPr wrap="square" lIns="0" tIns="0" rIns="0" bIns="0" anchor="t">
             <a:spAutoFit/>
           </a:bodyPr>
           <a:lstStyle/>
@@ -8357,10 +8720,16 @@
                 <a:solidFill>
                   <a:srgbClr val="475569"/>
                 </a:solidFill>
-                <a:latin typeface="Segoe UI"/>
+                <a:latin typeface="Segoe UI" panose="020B0502040204020203"/>
               </a:rPr>
               <a:t>Land with one distributor → their accountant/operator becomes the champion → word-of-mouth within tight-knit distributor trade circles.</a:t>
             </a:r>
+            <a:endParaRPr sz="1200" b="0" i="0">
+              <a:solidFill>
+                <a:srgbClr val="475569"/>
+              </a:solidFill>
+              <a:latin typeface="Segoe UI" panose="020B0502040204020203"/>
+            </a:endParaRPr>
           </a:p>
         </p:txBody>
       </p:sp>
@@ -8381,7 +8750,7 @@
           <a:noFill/>
         </p:spPr>
         <p:txBody>
-          <a:bodyPr wrap="square" anchor="t" lIns="0" rIns="0" tIns="0" bIns="0">
+          <a:bodyPr wrap="square" lIns="0" tIns="0" rIns="0" bIns="0" anchor="t">
             <a:spAutoFit/>
           </a:bodyPr>
           <a:lstStyle/>
@@ -8402,10 +8771,16 @@
                 <a:solidFill>
                   <a:srgbClr val="475569"/>
                 </a:solidFill>
-                <a:latin typeface="Segoe UI"/>
+                <a:latin typeface="Segoe UI" panose="020B0502040204020203"/>
               </a:rPr>
               <a:t>Known, deliberately-deferred gap: no payment gateway yet — subscription activation is manual today (correct sequencing for pilot validation, per this project’s phase-discipline principle: prove the product before automating billing for it).</a:t>
             </a:r>
+            <a:endParaRPr sz="1150" b="0" i="1">
+              <a:solidFill>
+                <a:srgbClr val="475569"/>
+              </a:solidFill>
+              <a:latin typeface="Segoe UI" panose="020B0502040204020203"/>
+            </a:endParaRPr>
           </a:p>
         </p:txBody>
       </p:sp>
@@ -8470,7 +8845,7 @@
           <a:noFill/>
         </p:spPr>
         <p:txBody>
-          <a:bodyPr wrap="square" anchor="t" lIns="0" rIns="0" tIns="0" bIns="0">
+          <a:bodyPr wrap="square" lIns="0" tIns="0" rIns="0" bIns="0" anchor="t">
             <a:spAutoFit/>
           </a:bodyPr>
           <a:lstStyle/>
@@ -8488,10 +8863,16 @@
                 <a:solidFill>
                   <a:srgbClr val="475569"/>
                 </a:solidFill>
-                <a:latin typeface="Segoe UI"/>
+                <a:latin typeface="Segoe UI" panose="020B0502040204020203"/>
               </a:rPr>
               <a:t>OpsGenie</a:t>
             </a:r>
+            <a:endParaRPr sz="1000" b="1" i="0">
+              <a:solidFill>
+                <a:srgbClr val="475569"/>
+              </a:solidFill>
+              <a:latin typeface="Segoe UI" panose="020B0502040204020203"/>
+            </a:endParaRPr>
           </a:p>
         </p:txBody>
       </p:sp>
@@ -8512,7 +8893,7 @@
           <a:noFill/>
         </p:spPr>
         <p:txBody>
-          <a:bodyPr wrap="square" anchor="t" lIns="0" rIns="0" tIns="0" bIns="0">
+          <a:bodyPr wrap="square" lIns="0" tIns="0" rIns="0" bIns="0" anchor="t">
             <a:spAutoFit/>
           </a:bodyPr>
           <a:lstStyle/>
@@ -8530,10 +8911,16 @@
                 <a:solidFill>
                   <a:srgbClr val="475569"/>
                 </a:solidFill>
-                <a:latin typeface="Segoe UI"/>
+                <a:latin typeface="Segoe UI" panose="020B0502040204020203"/>
               </a:rPr>
               <a:t>14</a:t>
             </a:r>
+            <a:endParaRPr sz="1000" b="0" i="0">
+              <a:solidFill>
+                <a:srgbClr val="475569"/>
+              </a:solidFill>
+              <a:latin typeface="Segoe UI" panose="020B0502040204020203"/>
+            </a:endParaRPr>
           </a:p>
         </p:txBody>
       </p:sp>
@@ -8546,7 +8933,7 @@
 </file>
 
 <file path=ppt/slides/slide15.xml><?xml version="1.0" encoding="utf-8"?>
-<p:sld xmlns:a="http://schemas.openxmlformats.org/drawingml/2006/main" xmlns:p="http://schemas.openxmlformats.org/presentationml/2006/main" xmlns:r="http://schemas.openxmlformats.org/officeDocument/2006/relationships">
+<p:sld xmlns:a="http://schemas.openxmlformats.org/drawingml/2006/main" xmlns:r="http://schemas.openxmlformats.org/officeDocument/2006/relationships" xmlns:p="http://schemas.openxmlformats.org/presentationml/2006/main">
   <p:cSld>
     <p:bg>
       <p:bgPr>
@@ -8624,7 +9011,7 @@
           <a:noFill/>
         </p:spPr>
         <p:txBody>
-          <a:bodyPr wrap="square" anchor="t" lIns="0" rIns="0" tIns="0" bIns="0">
+          <a:bodyPr wrap="square" lIns="0" tIns="0" rIns="0" bIns="0" anchor="t">
             <a:spAutoFit/>
           </a:bodyPr>
           <a:lstStyle/>
@@ -8642,10 +9029,16 @@
                 <a:solidFill>
                   <a:srgbClr val="10B981"/>
                 </a:solidFill>
-                <a:latin typeface="Segoe UI"/>
+                <a:latin typeface="Segoe UI" panose="020B0502040204020203"/>
               </a:rPr>
               <a:t>WHAT’S NEXT</a:t>
             </a:r>
+            <a:endParaRPr sz="1250" b="1" i="0">
+              <a:solidFill>
+                <a:srgbClr val="10B981"/>
+              </a:solidFill>
+              <a:latin typeface="Segoe UI" panose="020B0502040204020203"/>
+            </a:endParaRPr>
           </a:p>
         </p:txBody>
       </p:sp>
@@ -8666,7 +9059,7 @@
           <a:noFill/>
         </p:spPr>
         <p:txBody>
-          <a:bodyPr wrap="square" anchor="t" lIns="0" rIns="0" tIns="0" bIns="0">
+          <a:bodyPr wrap="square" lIns="0" tIns="0" rIns="0" bIns="0" anchor="t">
             <a:spAutoFit/>
           </a:bodyPr>
           <a:lstStyle/>
@@ -8687,10 +9080,16 @@
                 <a:solidFill>
                   <a:srgbClr val="064E3B"/>
                 </a:solidFill>
-                <a:latin typeface="Segoe UI"/>
+                <a:latin typeface="Segoe UI" panose="020B0502040204020203"/>
               </a:rPr>
               <a:t>Harden for scale, then widen the funnel</a:t>
             </a:r>
+            <a:endParaRPr sz="3000" b="1" i="0">
+              <a:solidFill>
+                <a:srgbClr val="064E3B"/>
+              </a:solidFill>
+              <a:latin typeface="Segoe UI" panose="020B0502040204020203"/>
+            </a:endParaRPr>
           </a:p>
         </p:txBody>
       </p:sp>
@@ -8803,7 +9202,7 @@
           <a:noFill/>
         </p:spPr>
         <p:txBody>
-          <a:bodyPr wrap="square" anchor="ctr" lIns="0" rIns="0" tIns="0" bIns="0">
+          <a:bodyPr wrap="square" lIns="0" tIns="0" rIns="0" bIns="0" anchor="ctr">
             <a:spAutoFit/>
           </a:bodyPr>
           <a:lstStyle/>
@@ -8821,10 +9220,16 @@
                 <a:solidFill>
                   <a:srgbClr val="FFFFFF"/>
                 </a:solidFill>
-                <a:latin typeface="Segoe UI"/>
+                <a:latin typeface="Segoe UI" panose="020B0502040204020203"/>
               </a:rPr>
               <a:t>Harden for scale</a:t>
             </a:r>
+            <a:endParaRPr sz="1350" b="1" i="0">
+              <a:solidFill>
+                <a:srgbClr val="FFFFFF"/>
+              </a:solidFill>
+              <a:latin typeface="Segoe UI" panose="020B0502040204020203"/>
+            </a:endParaRPr>
           </a:p>
         </p:txBody>
       </p:sp>
@@ -8845,7 +9250,7 @@
           <a:noFill/>
         </p:spPr>
         <p:txBody>
-          <a:bodyPr wrap="square" anchor="t" lIns="0" rIns="0" tIns="0" bIns="0">
+          <a:bodyPr wrap="square" lIns="0" tIns="0" rIns="0" bIns="0" anchor="t">
             <a:spAutoFit/>
           </a:bodyPr>
           <a:lstStyle/>
@@ -8862,32 +9267,29 @@
               </a:spcAft>
             </a:pPr>
             <a:r>
+              <a:rPr sz="1180" b="1" i="0">
+                <a:solidFill>
+                  <a:srgbClr val="10B981"/>
+                </a:solidFill>
+                <a:latin typeface="Segoe UI" panose="020B0502040204020203"/>
+              </a:rPr>
+              <a:t>•  </a:t>
+            </a:r>
+            <a:r>
               <a:rPr sz="1180" b="0" i="0">
                 <a:solidFill>
                   <a:srgbClr val="0F172A"/>
                 </a:solidFill>
-                <a:latin typeface="Segoe UI"/>
-              </a:rPr>
-              <a:t/>
-            </a:r>
-            <a:r>
-              <a:rPr sz="1180" b="1" i="0">
-                <a:solidFill>
-                  <a:srgbClr val="10B981"/>
-                </a:solidFill>
-                <a:latin typeface="Segoe UI"/>
-              </a:rPr>
-              <a:t>•  </a:t>
-            </a:r>
-            <a:r>
-              <a:rPr sz="1180" b="0" i="0">
-                <a:solidFill>
-                  <a:srgbClr val="0F172A"/>
-                </a:solidFill>
-                <a:latin typeface="Segoe UI"/>
+                <a:latin typeface="Segoe UI" panose="020B0502040204020203"/>
               </a:rPr>
               <a:t>CI pipeline running the full suite on every change</a:t>
             </a:r>
+            <a:endParaRPr sz="1180" b="0" i="0">
+              <a:solidFill>
+                <a:srgbClr val="0F172A"/>
+              </a:solidFill>
+              <a:latin typeface="Segoe UI" panose="020B0502040204020203"/>
+            </a:endParaRPr>
           </a:p>
           <a:p>
             <a:pPr algn="l">
@@ -8902,32 +9304,29 @@
               </a:spcAft>
             </a:pPr>
             <a:r>
+              <a:rPr sz="1180" b="1" i="0">
+                <a:solidFill>
+                  <a:srgbClr val="10B981"/>
+                </a:solidFill>
+                <a:latin typeface="Segoe UI" panose="020B0502040204020203"/>
+              </a:rPr>
+              <a:t>•  </a:t>
+            </a:r>
+            <a:r>
               <a:rPr sz="1180" b="0" i="0">
                 <a:solidFill>
                   <a:srgbClr val="0F172A"/>
                 </a:solidFill>
-                <a:latin typeface="Segoe UI"/>
-              </a:rPr>
-              <a:t/>
-            </a:r>
-            <a:r>
-              <a:rPr sz="1180" b="1" i="0">
-                <a:solidFill>
-                  <a:srgbClr val="10B981"/>
-                </a:solidFill>
-                <a:latin typeface="Segoe UI"/>
-              </a:rPr>
-              <a:t>•  </a:t>
-            </a:r>
-            <a:r>
-              <a:rPr sz="1180" b="0" i="0">
-                <a:solidFill>
-                  <a:srgbClr val="0F172A"/>
-                </a:solidFill>
-                <a:latin typeface="Segoe UI"/>
+                <a:latin typeface="Segoe UI" panose="020B0502040204020203"/>
               </a:rPr>
               <a:t>LLM provider timeouts + scheduler catch-up</a:t>
             </a:r>
+            <a:endParaRPr sz="1180" b="0" i="0">
+              <a:solidFill>
+                <a:srgbClr val="0F172A"/>
+              </a:solidFill>
+              <a:latin typeface="Segoe UI" panose="020B0502040204020203"/>
+            </a:endParaRPr>
           </a:p>
           <a:p>
             <a:pPr algn="l">
@@ -8942,32 +9341,29 @@
               </a:spcAft>
             </a:pPr>
             <a:r>
+              <a:rPr sz="1180" b="1" i="0">
+                <a:solidFill>
+                  <a:srgbClr val="10B981"/>
+                </a:solidFill>
+                <a:latin typeface="Segoe UI" panose="020B0502040204020203"/>
+              </a:rPr>
+              <a:t>•  </a:t>
+            </a:r>
+            <a:r>
               <a:rPr sz="1180" b="0" i="0">
                 <a:solidFill>
                   <a:srgbClr val="0F172A"/>
                 </a:solidFill>
-                <a:latin typeface="Segoe UI"/>
-              </a:rPr>
-              <a:t/>
-            </a:r>
-            <a:r>
-              <a:rPr sz="1180" b="1" i="0">
-                <a:solidFill>
-                  <a:srgbClr val="10B981"/>
-                </a:solidFill>
-                <a:latin typeface="Segoe UI"/>
-              </a:rPr>
-              <a:t>•  </a:t>
-            </a:r>
-            <a:r>
-              <a:rPr sz="1180" b="0" i="0">
-                <a:solidFill>
-                  <a:srgbClr val="0F172A"/>
-                </a:solidFill>
-                <a:latin typeface="Segoe UI"/>
+                <a:latin typeface="Segoe UI" panose="020B0502040204020203"/>
               </a:rPr>
               <a:t>Security hardening (rate limiting, session expiry)</a:t>
             </a:r>
+            <a:endParaRPr sz="1180" b="0" i="0">
+              <a:solidFill>
+                <a:srgbClr val="0F172A"/>
+              </a:solidFill>
+              <a:latin typeface="Segoe UI" panose="020B0502040204020203"/>
+            </a:endParaRPr>
           </a:p>
         </p:txBody>
       </p:sp>
@@ -9080,7 +9476,7 @@
           <a:noFill/>
         </p:spPr>
         <p:txBody>
-          <a:bodyPr wrap="square" anchor="ctr" lIns="0" rIns="0" tIns="0" bIns="0">
+          <a:bodyPr wrap="square" lIns="0" tIns="0" rIns="0" bIns="0" anchor="ctr">
             <a:spAutoFit/>
           </a:bodyPr>
           <a:lstStyle/>
@@ -9098,10 +9494,16 @@
                 <a:solidFill>
                   <a:srgbClr val="FFFFFF"/>
                 </a:solidFill>
-                <a:latin typeface="Segoe UI"/>
+                <a:latin typeface="Segoe UI" panose="020B0502040204020203"/>
               </a:rPr>
               <a:t>Widen the product</a:t>
             </a:r>
+            <a:endParaRPr sz="1350" b="1" i="0">
+              <a:solidFill>
+                <a:srgbClr val="FFFFFF"/>
+              </a:solidFill>
+              <a:latin typeface="Segoe UI" panose="020B0502040204020203"/>
+            </a:endParaRPr>
           </a:p>
         </p:txBody>
       </p:sp>
@@ -9122,7 +9524,7 @@
           <a:noFill/>
         </p:spPr>
         <p:txBody>
-          <a:bodyPr wrap="square" anchor="t" lIns="0" rIns="0" tIns="0" bIns="0">
+          <a:bodyPr wrap="square" lIns="0" tIns="0" rIns="0" bIns="0" anchor="t">
             <a:spAutoFit/>
           </a:bodyPr>
           <a:lstStyle/>
@@ -9139,32 +9541,29 @@
               </a:spcAft>
             </a:pPr>
             <a:r>
+              <a:rPr sz="1180" b="1" i="0">
+                <a:solidFill>
+                  <a:srgbClr val="10B981"/>
+                </a:solidFill>
+                <a:latin typeface="Segoe UI" panose="020B0502040204020203"/>
+              </a:rPr>
+              <a:t>•  </a:t>
+            </a:r>
+            <a:r>
               <a:rPr sz="1180" b="0" i="0">
                 <a:solidFill>
                   <a:srgbClr val="0F172A"/>
                 </a:solidFill>
-                <a:latin typeface="Segoe UI"/>
-              </a:rPr>
-              <a:t/>
-            </a:r>
-            <a:r>
-              <a:rPr sz="1180" b="1" i="0">
-                <a:solidFill>
-                  <a:srgbClr val="10B981"/>
-                </a:solidFill>
-                <a:latin typeface="Segoe UI"/>
-              </a:rPr>
-              <a:t>•  </a:t>
-            </a:r>
-            <a:r>
-              <a:rPr sz="1180" b="0" i="0">
-                <a:solidFill>
-                  <a:srgbClr val="0F172A"/>
-                </a:solidFill>
-                <a:latin typeface="Segoe UI"/>
+                <a:latin typeface="Segoe UI" panose="020B0502040204020203"/>
               </a:rPr>
               <a:t>Voice notes (low-literacy operators)</a:t>
             </a:r>
+            <a:endParaRPr sz="1180" b="0" i="0">
+              <a:solidFill>
+                <a:srgbClr val="0F172A"/>
+              </a:solidFill>
+              <a:latin typeface="Segoe UI" panose="020B0502040204020203"/>
+            </a:endParaRPr>
           </a:p>
           <a:p>
             <a:pPr algn="l">
@@ -9179,32 +9578,29 @@
               </a:spcAft>
             </a:pPr>
             <a:r>
+              <a:rPr sz="1180" b="1" i="0">
+                <a:solidFill>
+                  <a:srgbClr val="10B981"/>
+                </a:solidFill>
+                <a:latin typeface="Segoe UI" panose="020B0502040204020203"/>
+              </a:rPr>
+              <a:t>•  </a:t>
+            </a:r>
+            <a:r>
               <a:rPr sz="1180" b="0" i="0">
                 <a:solidFill>
                   <a:srgbClr val="0F172A"/>
                 </a:solidFill>
-                <a:latin typeface="Segoe UI"/>
-              </a:rPr>
-              <a:t/>
-            </a:r>
-            <a:r>
-              <a:rPr sz="1180" b="1" i="0">
-                <a:solidFill>
-                  <a:srgbClr val="10B981"/>
-                </a:solidFill>
-                <a:latin typeface="Segoe UI"/>
-              </a:rPr>
-              <a:t>•  </a:t>
-            </a:r>
-            <a:r>
-              <a:rPr sz="1180" b="0" i="0">
-                <a:solidFill>
-                  <a:srgbClr val="0F172A"/>
-                </a:solidFill>
-                <a:latin typeface="Segoe UI"/>
+                <a:latin typeface="Segoe UI" panose="020B0502040204020203"/>
               </a:rPr>
               <a:t>Self-serve payment gateway</a:t>
             </a:r>
+            <a:endParaRPr sz="1180" b="0" i="0">
+              <a:solidFill>
+                <a:srgbClr val="0F172A"/>
+              </a:solidFill>
+              <a:latin typeface="Segoe UI" panose="020B0502040204020203"/>
+            </a:endParaRPr>
           </a:p>
           <a:p>
             <a:pPr algn="l">
@@ -9219,32 +9615,29 @@
               </a:spcAft>
             </a:pPr>
             <a:r>
+              <a:rPr sz="1180" b="1" i="0">
+                <a:solidFill>
+                  <a:srgbClr val="10B981"/>
+                </a:solidFill>
+                <a:latin typeface="Segoe UI" panose="020B0502040204020203"/>
+              </a:rPr>
+              <a:t>•  </a:t>
+            </a:r>
+            <a:r>
               <a:rPr sz="1180" b="0" i="0">
                 <a:solidFill>
                   <a:srgbClr val="0F172A"/>
                 </a:solidFill>
-                <a:latin typeface="Segoe UI"/>
-              </a:rPr>
-              <a:t/>
-            </a:r>
-            <a:r>
-              <a:rPr sz="1180" b="1" i="0">
-                <a:solidFill>
-                  <a:srgbClr val="10B981"/>
-                </a:solidFill>
-                <a:latin typeface="Segoe UI"/>
-              </a:rPr>
-              <a:t>•  </a:t>
-            </a:r>
-            <a:r>
-              <a:rPr sz="1180" b="0" i="0">
-                <a:solidFill>
-                  <a:srgbClr val="0F172A"/>
-                </a:solidFill>
-                <a:latin typeface="Segoe UI"/>
+                <a:latin typeface="Segoe UI" panose="020B0502040204020203"/>
               </a:rPr>
               <a:t>GSTR-filing-ready export tier</a:t>
             </a:r>
+            <a:endParaRPr sz="1180" b="0" i="0">
+              <a:solidFill>
+                <a:srgbClr val="0F172A"/>
+              </a:solidFill>
+              <a:latin typeface="Segoe UI" panose="020B0502040204020203"/>
+            </a:endParaRPr>
           </a:p>
         </p:txBody>
       </p:sp>
@@ -9357,7 +9750,7 @@
           <a:noFill/>
         </p:spPr>
         <p:txBody>
-          <a:bodyPr wrap="square" anchor="ctr" lIns="0" rIns="0" tIns="0" bIns="0">
+          <a:bodyPr wrap="square" lIns="0" tIns="0" rIns="0" bIns="0" anchor="ctr">
             <a:spAutoFit/>
           </a:bodyPr>
           <a:lstStyle/>
@@ -9375,10 +9768,16 @@
                 <a:solidFill>
                   <a:srgbClr val="FFFFFF"/>
                 </a:solidFill>
-                <a:latin typeface="Segoe UI"/>
+                <a:latin typeface="Segoe UI" panose="020B0502040204020203"/>
               </a:rPr>
               <a:t>Grow the pilot base</a:t>
             </a:r>
+            <a:endParaRPr sz="1350" b="1" i="0">
+              <a:solidFill>
+                <a:srgbClr val="FFFFFF"/>
+              </a:solidFill>
+              <a:latin typeface="Segoe UI" panose="020B0502040204020203"/>
+            </a:endParaRPr>
           </a:p>
         </p:txBody>
       </p:sp>
@@ -9399,7 +9798,7 @@
           <a:noFill/>
         </p:spPr>
         <p:txBody>
-          <a:bodyPr wrap="square" anchor="t" lIns="0" rIns="0" tIns="0" bIns="0">
+          <a:bodyPr wrap="square" lIns="0" tIns="0" rIns="0" bIns="0" anchor="t">
             <a:spAutoFit/>
           </a:bodyPr>
           <a:lstStyle/>
@@ -9416,32 +9815,29 @@
               </a:spcAft>
             </a:pPr>
             <a:r>
+              <a:rPr sz="1180" b="1" i="0">
+                <a:solidFill>
+                  <a:srgbClr val="10B981"/>
+                </a:solidFill>
+                <a:latin typeface="Segoe UI" panose="020B0502040204020203"/>
+              </a:rPr>
+              <a:t>•  </a:t>
+            </a:r>
+            <a:r>
               <a:rPr sz="1180" b="0" i="0">
                 <a:solidFill>
                   <a:srgbClr val="0F172A"/>
                 </a:solidFill>
-                <a:latin typeface="Segoe UI"/>
-              </a:rPr>
-              <a:t/>
-            </a:r>
-            <a:r>
-              <a:rPr sz="1180" b="1" i="0">
-                <a:solidFill>
-                  <a:srgbClr val="10B981"/>
-                </a:solidFill>
-                <a:latin typeface="Segoe UI"/>
-              </a:rPr>
-              <a:t>•  </a:t>
-            </a:r>
-            <a:r>
-              <a:rPr sz="1180" b="0" i="0">
-                <a:solidFill>
-                  <a:srgbClr val="0F172A"/>
-                </a:solidFill>
-                <a:latin typeface="Segoe UI"/>
+                <a:latin typeface="Segoe UI" panose="020B0502040204020203"/>
               </a:rPr>
               <a:t>Formalize the current pilot into a case study</a:t>
             </a:r>
+            <a:endParaRPr sz="1180" b="0" i="0">
+              <a:solidFill>
+                <a:srgbClr val="0F172A"/>
+              </a:solidFill>
+              <a:latin typeface="Segoe UI" panose="020B0502040204020203"/>
+            </a:endParaRPr>
           </a:p>
           <a:p>
             <a:pPr algn="l">
@@ -9456,32 +9852,29 @@
               </a:spcAft>
             </a:pPr>
             <a:r>
+              <a:rPr sz="1180" b="1" i="0">
+                <a:solidFill>
+                  <a:srgbClr val="10B981"/>
+                </a:solidFill>
+                <a:latin typeface="Segoe UI" panose="020B0502040204020203"/>
+              </a:rPr>
+              <a:t>•  </a:t>
+            </a:r>
+            <a:r>
               <a:rPr sz="1180" b="0" i="0">
                 <a:solidFill>
                   <a:srgbClr val="0F172A"/>
                 </a:solidFill>
-                <a:latin typeface="Segoe UI"/>
-              </a:rPr>
-              <a:t/>
-            </a:r>
-            <a:r>
-              <a:rPr sz="1180" b="1" i="0">
-                <a:solidFill>
-                  <a:srgbClr val="10B981"/>
-                </a:solidFill>
-                <a:latin typeface="Segoe UI"/>
-              </a:rPr>
-              <a:t>•  </a:t>
-            </a:r>
-            <a:r>
-              <a:rPr sz="1180" b="0" i="0">
-                <a:solidFill>
-                  <a:srgbClr val="0F172A"/>
-                </a:solidFill>
-                <a:latin typeface="Segoe UI"/>
+                <a:latin typeface="Segoe UI" panose="020B0502040204020203"/>
               </a:rPr>
               <a:t>Onboard the next cohort of distributors</a:t>
             </a:r>
+            <a:endParaRPr sz="1180" b="0" i="0">
+              <a:solidFill>
+                <a:srgbClr val="0F172A"/>
+              </a:solidFill>
+              <a:latin typeface="Segoe UI" panose="020B0502040204020203"/>
+            </a:endParaRPr>
           </a:p>
           <a:p>
             <a:pPr algn="l">
@@ -9496,32 +9889,29 @@
               </a:spcAft>
             </a:pPr>
             <a:r>
+              <a:rPr sz="1180" b="1" i="0">
+                <a:solidFill>
+                  <a:srgbClr val="10B981"/>
+                </a:solidFill>
+                <a:latin typeface="Segoe UI" panose="020B0502040204020203"/>
+              </a:rPr>
+              <a:t>•  </a:t>
+            </a:r>
+            <a:r>
               <a:rPr sz="1180" b="0" i="0">
                 <a:solidFill>
                   <a:srgbClr val="0F172A"/>
                 </a:solidFill>
-                <a:latin typeface="Segoe UI"/>
-              </a:rPr>
-              <a:t/>
-            </a:r>
-            <a:r>
-              <a:rPr sz="1180" b="1" i="0">
-                <a:solidFill>
-                  <a:srgbClr val="10B981"/>
-                </a:solidFill>
-                <a:latin typeface="Segoe UI"/>
-              </a:rPr>
-              <a:t>•  </a:t>
-            </a:r>
-            <a:r>
-              <a:rPr sz="1180" b="0" i="0">
-                <a:solidFill>
-                  <a:srgbClr val="0F172A"/>
-                </a:solidFill>
-                <a:latin typeface="Segoe UI"/>
+                <a:latin typeface="Segoe UI" panose="020B0502040204020203"/>
               </a:rPr>
               <a:t>Meta-approved marketing/reminder templates</a:t>
             </a:r>
+            <a:endParaRPr sz="1180" b="0" i="0">
+              <a:solidFill>
+                <a:srgbClr val="0F172A"/>
+              </a:solidFill>
+              <a:latin typeface="Segoe UI" panose="020B0502040204020203"/>
+            </a:endParaRPr>
           </a:p>
         </p:txBody>
       </p:sp>
@@ -9586,7 +9976,7 @@
           <a:noFill/>
         </p:spPr>
         <p:txBody>
-          <a:bodyPr wrap="square" anchor="t" lIns="0" rIns="0" tIns="0" bIns="0">
+          <a:bodyPr wrap="square" lIns="0" tIns="0" rIns="0" bIns="0" anchor="t">
             <a:spAutoFit/>
           </a:bodyPr>
           <a:lstStyle/>
@@ -9604,10 +9994,16 @@
                 <a:solidFill>
                   <a:srgbClr val="475569"/>
                 </a:solidFill>
-                <a:latin typeface="Segoe UI"/>
+                <a:latin typeface="Segoe UI" panose="020B0502040204020203"/>
               </a:rPr>
               <a:t>OpsGenie</a:t>
             </a:r>
+            <a:endParaRPr sz="1000" b="1" i="0">
+              <a:solidFill>
+                <a:srgbClr val="475569"/>
+              </a:solidFill>
+              <a:latin typeface="Segoe UI" panose="020B0502040204020203"/>
+            </a:endParaRPr>
           </a:p>
         </p:txBody>
       </p:sp>
@@ -9628,7 +10024,7 @@
           <a:noFill/>
         </p:spPr>
         <p:txBody>
-          <a:bodyPr wrap="square" anchor="t" lIns="0" rIns="0" tIns="0" bIns="0">
+          <a:bodyPr wrap="square" lIns="0" tIns="0" rIns="0" bIns="0" anchor="t">
             <a:spAutoFit/>
           </a:bodyPr>
           <a:lstStyle/>
@@ -9646,10 +10042,16 @@
                 <a:solidFill>
                   <a:srgbClr val="475569"/>
                 </a:solidFill>
-                <a:latin typeface="Segoe UI"/>
+                <a:latin typeface="Segoe UI" panose="020B0502040204020203"/>
               </a:rPr>
               <a:t>15</a:t>
             </a:r>
+            <a:endParaRPr sz="1000" b="0" i="0">
+              <a:solidFill>
+                <a:srgbClr val="475569"/>
+              </a:solidFill>
+              <a:latin typeface="Segoe UI" panose="020B0502040204020203"/>
+            </a:endParaRPr>
           </a:p>
         </p:txBody>
       </p:sp>
@@ -9662,7 +10064,7 @@
 </file>
 
 <file path=ppt/slides/slide16.xml><?xml version="1.0" encoding="utf-8"?>
-<p:sld xmlns:a="http://schemas.openxmlformats.org/drawingml/2006/main" xmlns:p="http://schemas.openxmlformats.org/presentationml/2006/main" xmlns:r="http://schemas.openxmlformats.org/officeDocument/2006/relationships">
+<p:sld xmlns:a="http://schemas.openxmlformats.org/drawingml/2006/main" xmlns:r="http://schemas.openxmlformats.org/officeDocument/2006/relationships" xmlns:p="http://schemas.openxmlformats.org/presentationml/2006/main">
   <p:cSld>
     <p:bg>
       <p:bgPr>
@@ -9740,7 +10142,7 @@
           <a:noFill/>
         </p:spPr>
         <p:txBody>
-          <a:bodyPr wrap="square" anchor="t" lIns="0" rIns="0" tIns="0" bIns="0">
+          <a:bodyPr wrap="square" lIns="0" tIns="0" rIns="0" bIns="0" anchor="t">
             <a:spAutoFit/>
           </a:bodyPr>
           <a:lstStyle/>
@@ -9758,10 +10160,16 @@
                 <a:solidFill>
                   <a:srgbClr val="10B981"/>
                 </a:solidFill>
-                <a:latin typeface="Segoe UI"/>
+                <a:latin typeface="Segoe UI" panose="020B0502040204020203"/>
               </a:rPr>
               <a:t>THE ASK</a:t>
             </a:r>
+            <a:endParaRPr sz="1250" b="1" i="0">
+              <a:solidFill>
+                <a:srgbClr val="10B981"/>
+              </a:solidFill>
+              <a:latin typeface="Segoe UI" panose="020B0502040204020203"/>
+            </a:endParaRPr>
           </a:p>
         </p:txBody>
       </p:sp>
@@ -9782,7 +10190,7 @@
           <a:noFill/>
         </p:spPr>
         <p:txBody>
-          <a:bodyPr wrap="square" anchor="t" lIns="0" rIns="0" tIns="0" bIns="0">
+          <a:bodyPr wrap="square" lIns="0" tIns="0" rIns="0" bIns="0" anchor="t">
             <a:spAutoFit/>
           </a:bodyPr>
           <a:lstStyle/>
@@ -9803,10 +10211,16 @@
                 <a:solidFill>
                   <a:srgbClr val="FFFFFF"/>
                 </a:solidFill>
-                <a:latin typeface="Segoe UI"/>
+                <a:latin typeface="Segoe UI" panose="020B0502040204020203"/>
               </a:rPr>
               <a:t>[Placeholder — fill in before presenting]</a:t>
             </a:r>
+            <a:endParaRPr sz="3000" b="1" i="0">
+              <a:solidFill>
+                <a:srgbClr val="FFFFFF"/>
+              </a:solidFill>
+              <a:latin typeface="Segoe UI" panose="020B0502040204020203"/>
+            </a:endParaRPr>
           </a:p>
         </p:txBody>
       </p:sp>
@@ -9827,7 +10241,7 @@
           <a:noFill/>
         </p:spPr>
         <p:txBody>
-          <a:bodyPr wrap="square" anchor="t" lIns="0" rIns="0" tIns="0" bIns="0">
+          <a:bodyPr wrap="square" lIns="0" tIns="0" rIns="0" bIns="0" anchor="t">
             <a:spAutoFit/>
           </a:bodyPr>
           <a:lstStyle/>
@@ -9845,10 +10259,16 @@
                 <a:solidFill>
                   <a:srgbClr val="34D399"/>
                 </a:solidFill>
-                <a:latin typeface="Segoe UI"/>
+                <a:latin typeface="Segoe UI" panose="020B0502040204020203"/>
               </a:rPr>
               <a:t>Raising ₹[X] to fund the next [12/18] months</a:t>
             </a:r>
+            <a:endParaRPr sz="2400" b="1" i="0">
+              <a:solidFill>
+                <a:srgbClr val="34D399"/>
+              </a:solidFill>
+              <a:latin typeface="Segoe UI" panose="020B0502040204020203"/>
+            </a:endParaRPr>
           </a:p>
         </p:txBody>
       </p:sp>
@@ -9869,7 +10289,7 @@
           <a:noFill/>
         </p:spPr>
         <p:txBody>
-          <a:bodyPr wrap="square" anchor="t" lIns="0" rIns="0" tIns="0" bIns="0">
+          <a:bodyPr wrap="square" lIns="0" tIns="0" rIns="0" bIns="0" anchor="t">
             <a:spAutoFit/>
           </a:bodyPr>
           <a:lstStyle/>
@@ -9886,32 +10306,29 @@
               </a:spcAft>
             </a:pPr>
             <a:r>
+              <a:rPr sz="1400" b="1" i="0">
+                <a:solidFill>
+                  <a:srgbClr val="34D399"/>
+                </a:solidFill>
+                <a:latin typeface="Segoe UI" panose="020B0502040204020203"/>
+              </a:rPr>
+              <a:t>▸  </a:t>
+            </a:r>
+            <a:r>
               <a:rPr sz="1400" b="0" i="0">
                 <a:solidFill>
-                  <a:srgbClr val="FFFFFF"/>
-                </a:solidFill>
-                <a:latin typeface="Segoe UI"/>
-              </a:rPr>
-              <a:t/>
-            </a:r>
-            <a:r>
-              <a:rPr sz="1400" b="1" i="0">
-                <a:solidFill>
-                  <a:srgbClr val="34D399"/>
-                </a:solidFill>
-                <a:latin typeface="Segoe UI"/>
-              </a:rPr>
-              <a:t>▸  </a:t>
-            </a:r>
-            <a:r>
-              <a:rPr sz="1400" b="0" i="0">
-                <a:solidFill>
                   <a:srgbClr val="EAFBF3"/>
                 </a:solidFill>
-                <a:latin typeface="Segoe UI"/>
+                <a:latin typeface="Segoe UI" panose="020B0502040204020203"/>
               </a:rPr>
               <a:t>[N] engineering hires to build CI, harden scheduling/security, and ship the next feature tier</a:t>
             </a:r>
+            <a:endParaRPr sz="1400" b="0" i="0">
+              <a:solidFill>
+                <a:srgbClr val="EAFBF3"/>
+              </a:solidFill>
+              <a:latin typeface="Segoe UI" panose="020B0502040204020203"/>
+            </a:endParaRPr>
           </a:p>
           <a:p>
             <a:pPr algn="l">
@@ -9926,32 +10343,29 @@
               </a:spcAft>
             </a:pPr>
             <a:r>
+              <a:rPr sz="1400" b="1" i="0">
+                <a:solidFill>
+                  <a:srgbClr val="34D399"/>
+                </a:solidFill>
+                <a:latin typeface="Segoe UI" panose="020B0502040204020203"/>
+              </a:rPr>
+              <a:t>▸  </a:t>
+            </a:r>
+            <a:r>
               <a:rPr sz="1400" b="0" i="0">
                 <a:solidFill>
-                  <a:srgbClr val="FFFFFF"/>
-                </a:solidFill>
-                <a:latin typeface="Segoe UI"/>
-              </a:rPr>
-              <a:t/>
-            </a:r>
-            <a:r>
-              <a:rPr sz="1400" b="1" i="0">
-                <a:solidFill>
-                  <a:srgbClr val="34D399"/>
-                </a:solidFill>
-                <a:latin typeface="Segoe UI"/>
-              </a:rPr>
-              <a:t>▸  </a:t>
-            </a:r>
-            <a:r>
-              <a:rPr sz="1400" b="0" i="0">
-                <a:solidFill>
                   <a:srgbClr val="EAFBF3"/>
                 </a:solidFill>
-                <a:latin typeface="Segoe UI"/>
+                <a:latin typeface="Segoe UI" panose="020B0502040204020203"/>
               </a:rPr>
               <a:t>Go-to-market into [N] additional pilot distributors across [geography/vertical]</a:t>
             </a:r>
+            <a:endParaRPr sz="1400" b="0" i="0">
+              <a:solidFill>
+                <a:srgbClr val="EAFBF3"/>
+              </a:solidFill>
+              <a:latin typeface="Segoe UI" panose="020B0502040204020203"/>
+            </a:endParaRPr>
           </a:p>
           <a:p>
             <a:pPr algn="l">
@@ -9966,32 +10380,29 @@
               </a:spcAft>
             </a:pPr>
             <a:r>
+              <a:rPr sz="1400" b="1" i="0">
+                <a:solidFill>
+                  <a:srgbClr val="34D399"/>
+                </a:solidFill>
+                <a:latin typeface="Segoe UI" panose="020B0502040204020203"/>
+              </a:rPr>
+              <a:t>▸  </a:t>
+            </a:r>
+            <a:r>
               <a:rPr sz="1400" b="0" i="0">
                 <a:solidFill>
-                  <a:srgbClr val="FFFFFF"/>
-                </a:solidFill>
-                <a:latin typeface="Segoe UI"/>
-              </a:rPr>
-              <a:t/>
-            </a:r>
-            <a:r>
-              <a:rPr sz="1400" b="1" i="0">
-                <a:solidFill>
-                  <a:srgbClr val="34D399"/>
-                </a:solidFill>
-                <a:latin typeface="Segoe UI"/>
-              </a:rPr>
-              <a:t>▸  </a:t>
-            </a:r>
-            <a:r>
-              <a:rPr sz="1400" b="0" i="0">
-                <a:solidFill>
                   <a:srgbClr val="EAFBF3"/>
                 </a:solidFill>
-                <a:latin typeface="Segoe UI"/>
+                <a:latin typeface="Segoe UI" panose="020B0502040204020203"/>
               </a:rPr>
               <a:t>Meta template approvals + WhatsApp Business API scale-up costs</a:t>
             </a:r>
+            <a:endParaRPr sz="1400" b="0" i="0">
+              <a:solidFill>
+                <a:srgbClr val="EAFBF3"/>
+              </a:solidFill>
+              <a:latin typeface="Segoe UI" panose="020B0502040204020203"/>
+            </a:endParaRPr>
           </a:p>
           <a:p>
             <a:pPr algn="l">
@@ -10006,32 +10417,29 @@
               </a:spcAft>
             </a:pPr>
             <a:r>
+              <a:rPr sz="1400" b="1" i="0">
+                <a:solidFill>
+                  <a:srgbClr val="34D399"/>
+                </a:solidFill>
+                <a:latin typeface="Segoe UI" panose="020B0502040204020203"/>
+              </a:rPr>
+              <a:t>▸  </a:t>
+            </a:r>
+            <a:r>
               <a:rPr sz="1400" b="0" i="0">
                 <a:solidFill>
-                  <a:srgbClr val="FFFFFF"/>
-                </a:solidFill>
-                <a:latin typeface="Segoe UI"/>
-              </a:rPr>
-              <a:t/>
-            </a:r>
-            <a:r>
-              <a:rPr sz="1400" b="1" i="0">
-                <a:solidFill>
-                  <a:srgbClr val="34D399"/>
-                </a:solidFill>
-                <a:latin typeface="Segoe UI"/>
-              </a:rPr>
-              <a:t>▸  </a:t>
-            </a:r>
-            <a:r>
-              <a:rPr sz="1400" b="0" i="0">
-                <a:solidFill>
                   <a:srgbClr val="EAFBF3"/>
                 </a:solidFill>
-                <a:latin typeface="Segoe UI"/>
+                <a:latin typeface="Segoe UI" panose="020B0502040204020203"/>
               </a:rPr>
               <a:t>Runway to a self-serve payment gateway and repeatable onboarding motion</a:t>
             </a:r>
+            <a:endParaRPr sz="1400" b="0" i="0">
+              <a:solidFill>
+                <a:srgbClr val="EAFBF3"/>
+              </a:solidFill>
+              <a:latin typeface="Segoe UI" panose="020B0502040204020203"/>
+            </a:endParaRPr>
           </a:p>
         </p:txBody>
       </p:sp>
@@ -10052,7 +10460,7 @@
           <a:noFill/>
         </p:spPr>
         <p:txBody>
-          <a:bodyPr wrap="square" anchor="t" lIns="0" rIns="0" tIns="0" bIns="0">
+          <a:bodyPr wrap="square" lIns="0" tIns="0" rIns="0" bIns="0" anchor="t">
             <a:spAutoFit/>
           </a:bodyPr>
           <a:lstStyle/>
@@ -10070,10 +10478,16 @@
                 <a:solidFill>
                   <a:srgbClr val="D97706"/>
                 </a:solidFill>
-                <a:latin typeface="Segoe UI"/>
+                <a:latin typeface="Segoe UI" panose="020B0502040204020203"/>
               </a:rPr>
               <a:t>Note: figures on this slide are placeholders — fill in your actual raise amount, hiring plan, and geography before sending this deck out.</a:t>
             </a:r>
+            <a:endParaRPr sz="1050" b="0" i="1">
+              <a:solidFill>
+                <a:srgbClr val="D97706"/>
+              </a:solidFill>
+              <a:latin typeface="Segoe UI" panose="020B0502040204020203"/>
+            </a:endParaRPr>
           </a:p>
         </p:txBody>
       </p:sp>
@@ -10138,7 +10552,7 @@
           <a:noFill/>
         </p:spPr>
         <p:txBody>
-          <a:bodyPr wrap="square" anchor="t" lIns="0" rIns="0" tIns="0" bIns="0">
+          <a:bodyPr wrap="square" lIns="0" tIns="0" rIns="0" bIns="0" anchor="t">
             <a:spAutoFit/>
           </a:bodyPr>
           <a:lstStyle/>
@@ -10156,10 +10570,16 @@
                 <a:solidFill>
                   <a:srgbClr val="475569"/>
                 </a:solidFill>
-                <a:latin typeface="Segoe UI"/>
+                <a:latin typeface="Segoe UI" panose="020B0502040204020203"/>
               </a:rPr>
               <a:t>OpsGenie</a:t>
             </a:r>
+            <a:endParaRPr sz="1000" b="1" i="0">
+              <a:solidFill>
+                <a:srgbClr val="475569"/>
+              </a:solidFill>
+              <a:latin typeface="Segoe UI" panose="020B0502040204020203"/>
+            </a:endParaRPr>
           </a:p>
         </p:txBody>
       </p:sp>
@@ -10180,7 +10600,7 @@
           <a:noFill/>
         </p:spPr>
         <p:txBody>
-          <a:bodyPr wrap="square" anchor="t" lIns="0" rIns="0" tIns="0" bIns="0">
+          <a:bodyPr wrap="square" lIns="0" tIns="0" rIns="0" bIns="0" anchor="t">
             <a:spAutoFit/>
           </a:bodyPr>
           <a:lstStyle/>
@@ -10198,10 +10618,16 @@
                 <a:solidFill>
                   <a:srgbClr val="475569"/>
                 </a:solidFill>
-                <a:latin typeface="Segoe UI"/>
+                <a:latin typeface="Segoe UI" panose="020B0502040204020203"/>
               </a:rPr>
               <a:t>16</a:t>
             </a:r>
+            <a:endParaRPr sz="1000" b="0" i="0">
+              <a:solidFill>
+                <a:srgbClr val="475569"/>
+              </a:solidFill>
+              <a:latin typeface="Segoe UI" panose="020B0502040204020203"/>
+            </a:endParaRPr>
           </a:p>
         </p:txBody>
       </p:sp>
@@ -10214,7 +10640,7 @@
 </file>
 
 <file path=ppt/slides/slide17.xml><?xml version="1.0" encoding="utf-8"?>
-<p:sld xmlns:a="http://schemas.openxmlformats.org/drawingml/2006/main" xmlns:p="http://schemas.openxmlformats.org/presentationml/2006/main" xmlns:r="http://schemas.openxmlformats.org/officeDocument/2006/relationships">
+<p:sld xmlns:a="http://schemas.openxmlformats.org/drawingml/2006/main" xmlns:r="http://schemas.openxmlformats.org/officeDocument/2006/relationships" xmlns:p="http://schemas.openxmlformats.org/presentationml/2006/main">
   <p:cSld>
     <p:bg>
       <p:bgPr>
@@ -10294,7 +10720,7 @@
           <a:noFill/>
         </p:spPr>
         <p:txBody>
-          <a:bodyPr wrap="square" anchor="t" lIns="0" rIns="0" tIns="0" bIns="0">
+          <a:bodyPr wrap="square" lIns="0" tIns="0" rIns="0" bIns="0" anchor="t">
             <a:spAutoFit/>
           </a:bodyPr>
           <a:lstStyle/>
@@ -10312,10 +10738,16 @@
                 <a:solidFill>
                   <a:srgbClr val="FFFFFF"/>
                 </a:solidFill>
-                <a:latin typeface="Segoe UI"/>
+                <a:latin typeface="Segoe UI" panose="020B0502040204020203"/>
               </a:rPr>
               <a:t>Every morning, before the day begins.</a:t>
             </a:r>
+            <a:endParaRPr sz="3200" b="1" i="0">
+              <a:solidFill>
+                <a:srgbClr val="FFFFFF"/>
+              </a:solidFill>
+              <a:latin typeface="Segoe UI" panose="020B0502040204020203"/>
+            </a:endParaRPr>
           </a:p>
         </p:txBody>
       </p:sp>
@@ -10328,7 +10760,7 @@
         <p:spPr>
           <a:xfrm>
             <a:off x="868680" y="3429000"/>
-            <a:ext cx="9144000" cy="548640"/>
+            <a:ext cx="9144000" cy="230505"/>
           </a:xfrm>
           <a:prstGeom prst="rect">
             <a:avLst/>
@@ -10336,7 +10768,7 @@
           <a:noFill/>
         </p:spPr>
         <p:txBody>
-          <a:bodyPr wrap="square" anchor="t" lIns="0" rIns="0" tIns="0" bIns="0">
+          <a:bodyPr wrap="square" lIns="0" tIns="0" rIns="0" bIns="0" anchor="t">
             <a:spAutoFit/>
           </a:bodyPr>
           <a:lstStyle/>
@@ -10354,10 +10786,16 @@
                 <a:solidFill>
                   <a:srgbClr val="34D399"/>
                 </a:solidFill>
-                <a:latin typeface="Segoe UI"/>
-              </a:rPr>
-              <a:t>OpsGenie · tripathyspandan23@gmail.com</a:t>
-            </a:r>
+                <a:latin typeface="Segoe UI" panose="020B0502040204020203"/>
+              </a:rPr>
+              <a:t>OpsGenie</a:t>
+            </a:r>
+            <a:endParaRPr sz="1500" b="0" i="0">
+              <a:solidFill>
+                <a:srgbClr val="34D399"/>
+              </a:solidFill>
+              <a:latin typeface="Segoe UI" panose="020B0502040204020203"/>
+            </a:endParaRPr>
           </a:p>
         </p:txBody>
       </p:sp>
@@ -10370,7 +10808,7 @@
 </file>
 
 <file path=ppt/slides/slide2.xml><?xml version="1.0" encoding="utf-8"?>
-<p:sld xmlns:a="http://schemas.openxmlformats.org/drawingml/2006/main" xmlns:p="http://schemas.openxmlformats.org/presentationml/2006/main" xmlns:r="http://schemas.openxmlformats.org/officeDocument/2006/relationships">
+<p:sld xmlns:a="http://schemas.openxmlformats.org/drawingml/2006/main" xmlns:r="http://schemas.openxmlformats.org/officeDocument/2006/relationships" xmlns:p="http://schemas.openxmlformats.org/presentationml/2006/main">
   <p:cSld>
     <p:bg>
       <p:bgPr>
@@ -10448,7 +10886,7 @@
           <a:noFill/>
         </p:spPr>
         <p:txBody>
-          <a:bodyPr wrap="square" anchor="t" lIns="0" rIns="0" tIns="0" bIns="0">
+          <a:bodyPr wrap="square" lIns="0" tIns="0" rIns="0" bIns="0" anchor="t">
             <a:spAutoFit/>
           </a:bodyPr>
           <a:lstStyle/>
@@ -10466,10 +10904,16 @@
                 <a:solidFill>
                   <a:srgbClr val="10B981"/>
                 </a:solidFill>
-                <a:latin typeface="Segoe UI"/>
+                <a:latin typeface="Segoe UI" panose="020B0502040204020203"/>
               </a:rPr>
               <a:t>THE PROBLEM</a:t>
             </a:r>
+            <a:endParaRPr sz="1250" b="1" i="0">
+              <a:solidFill>
+                <a:srgbClr val="10B981"/>
+              </a:solidFill>
+              <a:latin typeface="Segoe UI" panose="020B0502040204020203"/>
+            </a:endParaRPr>
           </a:p>
         </p:txBody>
       </p:sp>
@@ -10490,7 +10934,7 @@
           <a:noFill/>
         </p:spPr>
         <p:txBody>
-          <a:bodyPr wrap="square" anchor="t" lIns="0" rIns="0" tIns="0" bIns="0">
+          <a:bodyPr wrap="square" lIns="0" tIns="0" rIns="0" bIns="0" anchor="t">
             <a:spAutoFit/>
           </a:bodyPr>
           <a:lstStyle/>
@@ -10511,11 +10955,17 @@
                 <a:solidFill>
                   <a:srgbClr val="064E3B"/>
                 </a:solidFill>
-                <a:latin typeface="Segoe UI"/>
+                <a:latin typeface="Segoe UI" panose="020B0502040204020203"/>
               </a:rPr>
               <a:t>A distributor’s financial reality lives in Tally.
 Their daily decisions happen on WhatsApp and phone calls.</a:t>
             </a:r>
+            <a:endParaRPr sz="3000" b="1" i="0">
+              <a:solidFill>
+                <a:srgbClr val="064E3B"/>
+              </a:solidFill>
+              <a:latin typeface="Segoe UI" panose="020B0502040204020203"/>
+            </a:endParaRPr>
           </a:p>
         </p:txBody>
       </p:sp>
@@ -10584,7 +11034,7 @@
           <a:noFill/>
         </p:spPr>
         <p:txBody>
-          <a:bodyPr wrap="square" anchor="t" lIns="0" rIns="0" tIns="0" bIns="0">
+          <a:bodyPr wrap="square" lIns="0" tIns="0" rIns="0" bIns="0" anchor="t">
             <a:spAutoFit/>
           </a:bodyPr>
           <a:lstStyle/>
@@ -10602,10 +11052,16 @@
                 <a:solidFill>
                   <a:srgbClr val="34D399"/>
                 </a:solidFill>
-                <a:latin typeface="Segoe UI"/>
+                <a:latin typeface="Segoe UI" panose="020B0502040204020203"/>
               </a:rPr>
               <a:t>01</a:t>
             </a:r>
+            <a:endParaRPr sz="2600" b="1" i="0">
+              <a:solidFill>
+                <a:srgbClr val="34D399"/>
+              </a:solidFill>
+              <a:latin typeface="Segoe UI" panose="020B0502040204020203"/>
+            </a:endParaRPr>
           </a:p>
         </p:txBody>
       </p:sp>
@@ -10626,7 +11082,7 @@
           <a:noFill/>
         </p:spPr>
         <p:txBody>
-          <a:bodyPr wrap="square" anchor="t" lIns="0" rIns="0" tIns="0" bIns="0">
+          <a:bodyPr wrap="square" lIns="0" tIns="0" rIns="0" bIns="0" anchor="t">
             <a:spAutoFit/>
           </a:bodyPr>
           <a:lstStyle/>
@@ -10647,10 +11103,16 @@
                 <a:solidFill>
                   <a:srgbClr val="064E3B"/>
                 </a:solidFill>
-                <a:latin typeface="Segoe UI"/>
+                <a:latin typeface="Segoe UI" panose="020B0502040204020203"/>
               </a:rPr>
               <a:t>Data ≠ decisions</a:t>
             </a:r>
+            <a:endParaRPr sz="1700" b="1" i="0">
+              <a:solidFill>
+                <a:srgbClr val="064E3B"/>
+              </a:solidFill>
+              <a:latin typeface="Segoe UI" panose="020B0502040204020203"/>
+            </a:endParaRPr>
           </a:p>
         </p:txBody>
       </p:sp>
@@ -10671,7 +11133,7 @@
           <a:noFill/>
         </p:spPr>
         <p:txBody>
-          <a:bodyPr wrap="square" anchor="t" lIns="0" rIns="0" tIns="0" bIns="0">
+          <a:bodyPr wrap="square" lIns="0" tIns="0" rIns="0" bIns="0" anchor="t">
             <a:spAutoFit/>
           </a:bodyPr>
           <a:lstStyle/>
@@ -10692,10 +11154,16 @@
                 <a:solidFill>
                   <a:srgbClr val="475569"/>
                 </a:solidFill>
-                <a:latin typeface="Segoe UI"/>
+                <a:latin typeface="Segoe UI" panose="020B0502040204020203"/>
               </a:rPr>
               <a:t>Books are accurate, but nobody turns them into “what do I do today” fast enough to matter.</a:t>
             </a:r>
+            <a:endParaRPr sz="1250" b="0" i="0">
+              <a:solidFill>
+                <a:srgbClr val="475569"/>
+              </a:solidFill>
+              <a:latin typeface="Segoe UI" panose="020B0502040204020203"/>
+            </a:endParaRPr>
           </a:p>
         </p:txBody>
       </p:sp>
@@ -10764,7 +11232,7 @@
           <a:noFill/>
         </p:spPr>
         <p:txBody>
-          <a:bodyPr wrap="square" anchor="t" lIns="0" rIns="0" tIns="0" bIns="0">
+          <a:bodyPr wrap="square" lIns="0" tIns="0" rIns="0" bIns="0" anchor="t">
             <a:spAutoFit/>
           </a:bodyPr>
           <a:lstStyle/>
@@ -10782,10 +11250,16 @@
                 <a:solidFill>
                   <a:srgbClr val="34D399"/>
                 </a:solidFill>
-                <a:latin typeface="Segoe UI"/>
+                <a:latin typeface="Segoe UI" panose="020B0502040204020203"/>
               </a:rPr>
               <a:t>02</a:t>
             </a:r>
+            <a:endParaRPr sz="2600" b="1" i="0">
+              <a:solidFill>
+                <a:srgbClr val="34D399"/>
+              </a:solidFill>
+              <a:latin typeface="Segoe UI" panose="020B0502040204020203"/>
+            </a:endParaRPr>
           </a:p>
         </p:txBody>
       </p:sp>
@@ -10806,7 +11280,7 @@
           <a:noFill/>
         </p:spPr>
         <p:txBody>
-          <a:bodyPr wrap="square" anchor="t" lIns="0" rIns="0" tIns="0" bIns="0">
+          <a:bodyPr wrap="square" lIns="0" tIns="0" rIns="0" bIns="0" anchor="t">
             <a:spAutoFit/>
           </a:bodyPr>
           <a:lstStyle/>
@@ -10827,10 +11301,16 @@
                 <a:solidFill>
                   <a:srgbClr val="064E3B"/>
                 </a:solidFill>
-                <a:latin typeface="Segoe UI"/>
+                <a:latin typeface="Segoe UI" panose="020B0502040204020203"/>
               </a:rPr>
               <a:t>Monthly cash surprises</a:t>
             </a:r>
+            <a:endParaRPr sz="1700" b="1" i="0">
+              <a:solidFill>
+                <a:srgbClr val="064E3B"/>
+              </a:solidFill>
+              <a:latin typeface="Segoe UI" panose="020B0502040204020203"/>
+            </a:endParaRPr>
           </a:p>
         </p:txBody>
       </p:sp>
@@ -10851,7 +11331,7 @@
           <a:noFill/>
         </p:spPr>
         <p:txBody>
-          <a:bodyPr wrap="square" anchor="t" lIns="0" rIns="0" tIns="0" bIns="0">
+          <a:bodyPr wrap="square" lIns="0" tIns="0" rIns="0" bIns="0" anchor="t">
             <a:spAutoFit/>
           </a:bodyPr>
           <a:lstStyle/>
@@ -10872,10 +11352,16 @@
                 <a:solidFill>
                   <a:srgbClr val="475569"/>
                 </a:solidFill>
-                <a:latin typeface="Segoe UI"/>
+                <a:latin typeface="Segoe UI" panose="020B0502040204020203"/>
               </a:rPr>
               <a:t>Distributors managing 20–50 dealer accounts hit cash-flow surprises monthly or more often — discovered too late to act on.</a:t>
             </a:r>
+            <a:endParaRPr sz="1250" b="0" i="0">
+              <a:solidFill>
+                <a:srgbClr val="475569"/>
+              </a:solidFill>
+              <a:latin typeface="Segoe UI" panose="020B0502040204020203"/>
+            </a:endParaRPr>
           </a:p>
         </p:txBody>
       </p:sp>
@@ -10944,7 +11430,7 @@
           <a:noFill/>
         </p:spPr>
         <p:txBody>
-          <a:bodyPr wrap="square" anchor="t" lIns="0" rIns="0" tIns="0" bIns="0">
+          <a:bodyPr wrap="square" lIns="0" tIns="0" rIns="0" bIns="0" anchor="t">
             <a:spAutoFit/>
           </a:bodyPr>
           <a:lstStyle/>
@@ -10962,10 +11448,16 @@
                 <a:solidFill>
                   <a:srgbClr val="34D399"/>
                 </a:solidFill>
-                <a:latin typeface="Segoe UI"/>
+                <a:latin typeface="Segoe UI" panose="020B0502040204020203"/>
               </a:rPr>
               <a:t>03</a:t>
             </a:r>
+            <a:endParaRPr sz="2600" b="1" i="0">
+              <a:solidFill>
+                <a:srgbClr val="34D399"/>
+              </a:solidFill>
+              <a:latin typeface="Segoe UI" panose="020B0502040204020203"/>
+            </a:endParaRPr>
           </a:p>
         </p:txBody>
       </p:sp>
@@ -10986,7 +11478,7 @@
           <a:noFill/>
         </p:spPr>
         <p:txBody>
-          <a:bodyPr wrap="square" anchor="t" lIns="0" rIns="0" tIns="0" bIns="0">
+          <a:bodyPr wrap="square" lIns="0" tIns="0" rIns="0" bIns="0" anchor="t">
             <a:spAutoFit/>
           </a:bodyPr>
           <a:lstStyle/>
@@ -11007,10 +11499,16 @@
                 <a:solidFill>
                   <a:srgbClr val="064E3B"/>
                 </a:solidFill>
-                <a:latin typeface="Segoe UI"/>
+                <a:latin typeface="Segoe UI" panose="020B0502040204020203"/>
               </a:rPr>
               <a:t>Zero appetite for new software</a:t>
             </a:r>
+            <a:endParaRPr sz="1700" b="1" i="0">
+              <a:solidFill>
+                <a:srgbClr val="064E3B"/>
+              </a:solidFill>
+              <a:latin typeface="Segoe UI" panose="020B0502040204020203"/>
+            </a:endParaRPr>
           </a:p>
         </p:txBody>
       </p:sp>
@@ -11031,7 +11529,7 @@
           <a:noFill/>
         </p:spPr>
         <p:txBody>
-          <a:bodyPr wrap="square" anchor="t" lIns="0" rIns="0" tIns="0" bIns="0">
+          <a:bodyPr wrap="square" lIns="0" tIns="0" rIns="0" bIns="0" anchor="t">
             <a:spAutoFit/>
           </a:bodyPr>
           <a:lstStyle/>
@@ -11052,10 +11550,16 @@
                 <a:solidFill>
                   <a:srgbClr val="475569"/>
                 </a:solidFill>
-                <a:latin typeface="Segoe UI"/>
+                <a:latin typeface="Segoe UI" panose="020B0502040204020203"/>
               </a:rPr>
               <a:t>They already run Tally/Vyapar and live on WhatsApp. A new app to learn is a new app that goes unused.</a:t>
             </a:r>
+            <a:endParaRPr sz="1250" b="0" i="0">
+              <a:solidFill>
+                <a:srgbClr val="475569"/>
+              </a:solidFill>
+              <a:latin typeface="Segoe UI" panose="020B0502040204020203"/>
+            </a:endParaRPr>
           </a:p>
         </p:txBody>
       </p:sp>
@@ -11120,7 +11624,7 @@
           <a:noFill/>
         </p:spPr>
         <p:txBody>
-          <a:bodyPr wrap="square" anchor="t" lIns="0" rIns="0" tIns="0" bIns="0">
+          <a:bodyPr wrap="square" lIns="0" tIns="0" rIns="0" bIns="0" anchor="t">
             <a:spAutoFit/>
           </a:bodyPr>
           <a:lstStyle/>
@@ -11138,10 +11642,16 @@
                 <a:solidFill>
                   <a:srgbClr val="475569"/>
                 </a:solidFill>
-                <a:latin typeface="Segoe UI"/>
+                <a:latin typeface="Segoe UI" panose="020B0502040204020203"/>
               </a:rPr>
               <a:t>OpsGenie</a:t>
             </a:r>
+            <a:endParaRPr sz="1000" b="1" i="0">
+              <a:solidFill>
+                <a:srgbClr val="475569"/>
+              </a:solidFill>
+              <a:latin typeface="Segoe UI" panose="020B0502040204020203"/>
+            </a:endParaRPr>
           </a:p>
         </p:txBody>
       </p:sp>
@@ -11162,7 +11672,7 @@
           <a:noFill/>
         </p:spPr>
         <p:txBody>
-          <a:bodyPr wrap="square" anchor="t" lIns="0" rIns="0" tIns="0" bIns="0">
+          <a:bodyPr wrap="square" lIns="0" tIns="0" rIns="0" bIns="0" anchor="t">
             <a:spAutoFit/>
           </a:bodyPr>
           <a:lstStyle/>
@@ -11180,10 +11690,16 @@
                 <a:solidFill>
                   <a:srgbClr val="475569"/>
                 </a:solidFill>
-                <a:latin typeface="Segoe UI"/>
+                <a:latin typeface="Segoe UI" panose="020B0502040204020203"/>
               </a:rPr>
               <a:t>2</a:t>
             </a:r>
+            <a:endParaRPr sz="1000" b="0" i="0">
+              <a:solidFill>
+                <a:srgbClr val="475569"/>
+              </a:solidFill>
+              <a:latin typeface="Segoe UI" panose="020B0502040204020203"/>
+            </a:endParaRPr>
           </a:p>
         </p:txBody>
       </p:sp>
@@ -11196,7 +11712,7 @@
 </file>
 
 <file path=ppt/slides/slide3.xml><?xml version="1.0" encoding="utf-8"?>
-<p:sld xmlns:a="http://schemas.openxmlformats.org/drawingml/2006/main" xmlns:p="http://schemas.openxmlformats.org/presentationml/2006/main" xmlns:r="http://schemas.openxmlformats.org/officeDocument/2006/relationships">
+<p:sld xmlns:a="http://schemas.openxmlformats.org/drawingml/2006/main" xmlns:r="http://schemas.openxmlformats.org/officeDocument/2006/relationships" xmlns:p="http://schemas.openxmlformats.org/presentationml/2006/main">
   <p:cSld>
     <p:bg>
       <p:bgPr>
@@ -11274,7 +11790,7 @@
           <a:noFill/>
         </p:spPr>
         <p:txBody>
-          <a:bodyPr wrap="square" anchor="t" lIns="0" rIns="0" tIns="0" bIns="0">
+          <a:bodyPr wrap="square" lIns="0" tIns="0" rIns="0" bIns="0" anchor="t">
             <a:spAutoFit/>
           </a:bodyPr>
           <a:lstStyle/>
@@ -11295,10 +11811,16 @@
                 <a:solidFill>
                   <a:srgbClr val="FFFFFF"/>
                 </a:solidFill>
-                <a:latin typeface="Segoe UI"/>
+                <a:latin typeface="Segoe UI" panose="020B0502040204020203"/>
               </a:rPr>
               <a:t>Distributors don’t get blindsided because they lack data.</a:t>
             </a:r>
+            <a:endParaRPr sz="3000" b="1" i="0">
+              <a:solidFill>
+                <a:srgbClr val="FFFFFF"/>
+              </a:solidFill>
+              <a:latin typeface="Segoe UI" panose="020B0502040204020203"/>
+            </a:endParaRPr>
           </a:p>
           <a:p>
             <a:pPr algn="l">
@@ -11317,10 +11839,16 @@
                 <a:solidFill>
                   <a:srgbClr val="34D399"/>
                 </a:solidFill>
-                <a:latin typeface="Segoe UI"/>
+                <a:latin typeface="Segoe UI" panose="020B0502040204020203"/>
               </a:rPr>
               <a:t>They get blindsided because their data never becomes a decision fast enough.</a:t>
             </a:r>
+            <a:endParaRPr sz="3000" b="1" i="0">
+              <a:solidFill>
+                <a:srgbClr val="34D399"/>
+              </a:solidFill>
+              <a:latin typeface="Segoe UI" panose="020B0502040204020203"/>
+            </a:endParaRPr>
           </a:p>
         </p:txBody>
       </p:sp>
@@ -11341,7 +11869,7 @@
           <a:noFill/>
         </p:spPr>
         <p:txBody>
-          <a:bodyPr wrap="square" anchor="t" lIns="0" rIns="0" tIns="0" bIns="0">
+          <a:bodyPr wrap="square" lIns="0" tIns="0" rIns="0" bIns="0" anchor="t">
             <a:spAutoFit/>
           </a:bodyPr>
           <a:lstStyle/>
@@ -11359,10 +11887,16 @@
                 <a:solidFill>
                   <a:srgbClr val="D1FAE5"/>
                 </a:solidFill>
-                <a:latin typeface="Segoe UI"/>
+                <a:latin typeface="Segoe UI" panose="020B0502040204020203"/>
               </a:rPr>
               <a:t>OpsGenie closes that gap every single morning — automatically, on the channel they’re already in.</a:t>
             </a:r>
+            <a:endParaRPr sz="1600" b="0" i="1">
+              <a:solidFill>
+                <a:srgbClr val="D1FAE5"/>
+              </a:solidFill>
+              <a:latin typeface="Segoe UI" panose="020B0502040204020203"/>
+            </a:endParaRPr>
           </a:p>
         </p:txBody>
       </p:sp>
@@ -11427,7 +11961,7 @@
           <a:noFill/>
         </p:spPr>
         <p:txBody>
-          <a:bodyPr wrap="square" anchor="t" lIns="0" rIns="0" tIns="0" bIns="0">
+          <a:bodyPr wrap="square" lIns="0" tIns="0" rIns="0" bIns="0" anchor="t">
             <a:spAutoFit/>
           </a:bodyPr>
           <a:lstStyle/>
@@ -11445,10 +11979,16 @@
                 <a:solidFill>
                   <a:srgbClr val="475569"/>
                 </a:solidFill>
-                <a:latin typeface="Segoe UI"/>
+                <a:latin typeface="Segoe UI" panose="020B0502040204020203"/>
               </a:rPr>
               <a:t>OpsGenie</a:t>
             </a:r>
+            <a:endParaRPr sz="1000" b="1" i="0">
+              <a:solidFill>
+                <a:srgbClr val="475569"/>
+              </a:solidFill>
+              <a:latin typeface="Segoe UI" panose="020B0502040204020203"/>
+            </a:endParaRPr>
           </a:p>
         </p:txBody>
       </p:sp>
@@ -11469,7 +12009,7 @@
           <a:noFill/>
         </p:spPr>
         <p:txBody>
-          <a:bodyPr wrap="square" anchor="t" lIns="0" rIns="0" tIns="0" bIns="0">
+          <a:bodyPr wrap="square" lIns="0" tIns="0" rIns="0" bIns="0" anchor="t">
             <a:spAutoFit/>
           </a:bodyPr>
           <a:lstStyle/>
@@ -11487,10 +12027,16 @@
                 <a:solidFill>
                   <a:srgbClr val="475569"/>
                 </a:solidFill>
-                <a:latin typeface="Segoe UI"/>
+                <a:latin typeface="Segoe UI" panose="020B0502040204020203"/>
               </a:rPr>
               <a:t>3</a:t>
             </a:r>
+            <a:endParaRPr sz="1000" b="0" i="0">
+              <a:solidFill>
+                <a:srgbClr val="475569"/>
+              </a:solidFill>
+              <a:latin typeface="Segoe UI" panose="020B0502040204020203"/>
+            </a:endParaRPr>
           </a:p>
         </p:txBody>
       </p:sp>
@@ -11503,7 +12049,7 @@
 </file>
 
 <file path=ppt/slides/slide4.xml><?xml version="1.0" encoding="utf-8"?>
-<p:sld xmlns:a="http://schemas.openxmlformats.org/drawingml/2006/main" xmlns:p="http://schemas.openxmlformats.org/presentationml/2006/main" xmlns:r="http://schemas.openxmlformats.org/officeDocument/2006/relationships">
+<p:sld xmlns:a="http://schemas.openxmlformats.org/drawingml/2006/main" xmlns:r="http://schemas.openxmlformats.org/officeDocument/2006/relationships" xmlns:p="http://schemas.openxmlformats.org/presentationml/2006/main">
   <p:cSld>
     <p:bg>
       <p:bgPr>
@@ -11581,7 +12127,7 @@
           <a:noFill/>
         </p:spPr>
         <p:txBody>
-          <a:bodyPr wrap="square" anchor="t" lIns="0" rIns="0" tIns="0" bIns="0">
+          <a:bodyPr wrap="square" lIns="0" tIns="0" rIns="0" bIns="0" anchor="t">
             <a:spAutoFit/>
           </a:bodyPr>
           <a:lstStyle/>
@@ -11599,10 +12145,16 @@
                 <a:solidFill>
                   <a:srgbClr val="10B981"/>
                 </a:solidFill>
-                <a:latin typeface="Segoe UI"/>
+                <a:latin typeface="Segoe UI" panose="020B0502040204020203"/>
               </a:rPr>
               <a:t>THE SOLUTION</a:t>
             </a:r>
+            <a:endParaRPr sz="1250" b="1" i="0">
+              <a:solidFill>
+                <a:srgbClr val="10B981"/>
+              </a:solidFill>
+              <a:latin typeface="Segoe UI" panose="020B0502040204020203"/>
+            </a:endParaRPr>
           </a:p>
         </p:txBody>
       </p:sp>
@@ -11623,7 +12175,7 @@
           <a:noFill/>
         </p:spPr>
         <p:txBody>
-          <a:bodyPr wrap="square" anchor="t" lIns="0" rIns="0" tIns="0" bIns="0">
+          <a:bodyPr wrap="square" lIns="0" tIns="0" rIns="0" bIns="0" anchor="t">
             <a:spAutoFit/>
           </a:bodyPr>
           <a:lstStyle/>
@@ -11644,10 +12196,16 @@
                 <a:solidFill>
                   <a:srgbClr val="064E3B"/>
                 </a:solidFill>
-                <a:latin typeface="Segoe UI"/>
+                <a:latin typeface="Segoe UI" panose="020B0502040204020203"/>
               </a:rPr>
               <a:t>OpsGenie — a deterministic financial engine, delivered entirely over WhatsApp</a:t>
             </a:r>
+            <a:endParaRPr sz="3000" b="1" i="0">
+              <a:solidFill>
+                <a:srgbClr val="064E3B"/>
+              </a:solidFill>
+              <a:latin typeface="Segoe UI" panose="020B0502040204020203"/>
+            </a:endParaRPr>
           </a:p>
         </p:txBody>
       </p:sp>
@@ -11668,7 +12226,7 @@
           <a:noFill/>
         </p:spPr>
         <p:txBody>
-          <a:bodyPr wrap="square" anchor="t" lIns="0" rIns="0" tIns="0" bIns="0">
+          <a:bodyPr wrap="square" lIns="0" tIns="0" rIns="0" bIns="0" anchor="t">
             <a:spAutoFit/>
           </a:bodyPr>
           <a:lstStyle/>
@@ -11685,32 +12243,29 @@
               </a:spcAft>
             </a:pPr>
             <a:r>
+              <a:rPr sz="1350" b="1" i="0">
+                <a:solidFill>
+                  <a:srgbClr val="10B981"/>
+                </a:solidFill>
+                <a:latin typeface="Segoe UI" panose="020B0502040204020203"/>
+              </a:rPr>
+              <a:t>▸  </a:t>
+            </a:r>
+            <a:r>
               <a:rPr sz="1350" b="0" i="0">
                 <a:solidFill>
                   <a:srgbClr val="0F172A"/>
                 </a:solidFill>
-                <a:latin typeface="Segoe UI"/>
-              </a:rPr>
-              <a:t/>
-            </a:r>
-            <a:r>
-              <a:rPr sz="1350" b="1" i="0">
-                <a:solidFill>
-                  <a:srgbClr val="10B981"/>
-                </a:solidFill>
-                <a:latin typeface="Segoe UI"/>
-              </a:rPr>
-              <a:t>▸  </a:t>
-            </a:r>
-            <a:r>
-              <a:rPr sz="1350" b="0" i="0">
-                <a:solidFill>
-                  <a:srgbClr val="0F172A"/>
-                </a:solidFill>
-                <a:latin typeface="Segoe UI"/>
+                <a:latin typeface="Segoe UI" panose="020B0502040204020203"/>
               </a:rPr>
               <a:t>Ingests what a distributor already has — Tally, Vyapar, Excel exports, even photographed Tally voucher PDFs.</a:t>
             </a:r>
+            <a:endParaRPr sz="1350" b="0" i="0">
+              <a:solidFill>
+                <a:srgbClr val="0F172A"/>
+              </a:solidFill>
+              <a:latin typeface="Segoe UI" panose="020B0502040204020203"/>
+            </a:endParaRPr>
           </a:p>
           <a:p>
             <a:pPr algn="l">
@@ -11725,32 +12280,29 @@
               </a:spcAft>
             </a:pPr>
             <a:r>
+              <a:rPr sz="1350" b="1" i="0">
+                <a:solidFill>
+                  <a:srgbClr val="10B981"/>
+                </a:solidFill>
+                <a:latin typeface="Segoe UI" panose="020B0502040204020203"/>
+              </a:rPr>
+              <a:t>▸  </a:t>
+            </a:r>
+            <a:r>
               <a:rPr sz="1350" b="0" i="0">
                 <a:solidFill>
                   <a:srgbClr val="0F172A"/>
                 </a:solidFill>
-                <a:latin typeface="Segoe UI"/>
-              </a:rPr>
-              <a:t/>
-            </a:r>
-            <a:r>
-              <a:rPr sz="1350" b="1" i="0">
-                <a:solidFill>
-                  <a:srgbClr val="10B981"/>
-                </a:solidFill>
-                <a:latin typeface="Segoe UI"/>
-              </a:rPr>
-              <a:t>▸  </a:t>
-            </a:r>
-            <a:r>
-              <a:rPr sz="1350" b="0" i="0">
-                <a:solidFill>
-                  <a:srgbClr val="0F172A"/>
-                </a:solidFill>
-                <a:latin typeface="Segoe UI"/>
+                <a:latin typeface="Segoe UI" panose="020B0502040204020203"/>
               </a:rPr>
               <a:t>Maintains one deterministic ledger of invoices, payments, dealers and suppliers — no re-entry, no parallel system of record.</a:t>
             </a:r>
+            <a:endParaRPr sz="1350" b="0" i="0">
+              <a:solidFill>
+                <a:srgbClr val="0F172A"/>
+              </a:solidFill>
+              <a:latin typeface="Segoe UI" panose="020B0502040204020203"/>
+            </a:endParaRPr>
           </a:p>
           <a:p>
             <a:pPr algn="l">
@@ -11765,32 +12317,29 @@
               </a:spcAft>
             </a:pPr>
             <a:r>
+              <a:rPr sz="1350" b="1" i="0">
+                <a:solidFill>
+                  <a:srgbClr val="10B981"/>
+                </a:solidFill>
+                <a:latin typeface="Segoe UI" panose="020B0502040204020203"/>
+              </a:rPr>
+              <a:t>▸  </a:t>
+            </a:r>
+            <a:r>
               <a:rPr sz="1350" b="0" i="0">
                 <a:solidFill>
                   <a:srgbClr val="0F172A"/>
                 </a:solidFill>
-                <a:latin typeface="Segoe UI"/>
-              </a:rPr>
-              <a:t/>
-            </a:r>
-            <a:r>
-              <a:rPr sz="1350" b="1" i="0">
-                <a:solidFill>
-                  <a:srgbClr val="10B981"/>
-                </a:solidFill>
-                <a:latin typeface="Segoe UI"/>
-              </a:rPr>
-              <a:t>▸  </a:t>
-            </a:r>
-            <a:r>
-              <a:rPr sz="1350" b="0" i="0">
-                <a:solidFill>
-                  <a:srgbClr val="0F172A"/>
-                </a:solidFill>
-                <a:latin typeface="Segoe UI"/>
+                <a:latin typeface="Segoe UI" panose="020B0502040204020203"/>
               </a:rPr>
               <a:t>Delivers a daily cash-position briefing, on-demand reports, and guided write actions (record a payment, create an order, update stock) entirely on WhatsApp.</a:t>
             </a:r>
+            <a:endParaRPr sz="1350" b="0" i="0">
+              <a:solidFill>
+                <a:srgbClr val="0F172A"/>
+              </a:solidFill>
+              <a:latin typeface="Segoe UI" panose="020B0502040204020203"/>
+            </a:endParaRPr>
           </a:p>
           <a:p>
             <a:pPr algn="l">
@@ -11805,32 +12354,29 @@
               </a:spcAft>
             </a:pPr>
             <a:r>
+              <a:rPr sz="1350" b="1" i="0">
+                <a:solidFill>
+                  <a:srgbClr val="10B981"/>
+                </a:solidFill>
+                <a:latin typeface="Segoe UI" panose="020B0502040204020203"/>
+              </a:rPr>
+              <a:t>▸  </a:t>
+            </a:r>
+            <a:r>
               <a:rPr sz="1350" b="0" i="0">
                 <a:solidFill>
                   <a:srgbClr val="0F172A"/>
                 </a:solidFill>
-                <a:latin typeface="Segoe UI"/>
-              </a:rPr>
-              <a:t/>
-            </a:r>
-            <a:r>
-              <a:rPr sz="1350" b="1" i="0">
-                <a:solidFill>
-                  <a:srgbClr val="10B981"/>
-                </a:solidFill>
-                <a:latin typeface="Segoe UI"/>
-              </a:rPr>
-              <a:t>▸  </a:t>
-            </a:r>
-            <a:r>
-              <a:rPr sz="1350" b="0" i="0">
-                <a:solidFill>
-                  <a:srgbClr val="0F172A"/>
-                </a:solidFill>
-                <a:latin typeface="Segoe UI"/>
+                <a:latin typeface="Segoe UI" panose="020B0502040204020203"/>
               </a:rPr>
               <a:t>An LLM narrates and answers free-form questions — but never owns business state and never does money math.</a:t>
             </a:r>
+            <a:endParaRPr sz="1350" b="0" i="0">
+              <a:solidFill>
+                <a:srgbClr val="0F172A"/>
+              </a:solidFill>
+              <a:latin typeface="Segoe UI" panose="020B0502040204020203"/>
+            </a:endParaRPr>
           </a:p>
         </p:txBody>
       </p:sp>
@@ -11897,7 +12443,7 @@
           <a:noFill/>
         </p:spPr>
         <p:txBody>
-          <a:bodyPr wrap="square" anchor="t" lIns="0" rIns="0" tIns="0" bIns="0">
+          <a:bodyPr wrap="square" lIns="0" tIns="0" rIns="0" bIns="0" anchor="t">
             <a:spAutoFit/>
           </a:bodyPr>
           <a:lstStyle/>
@@ -11915,10 +12461,16 @@
                 <a:solidFill>
                   <a:srgbClr val="34D399"/>
                 </a:solidFill>
-                <a:latin typeface="Segoe UI"/>
+                <a:latin typeface="Segoe UI" panose="020B0502040204020203"/>
               </a:rPr>
               <a:t>8:00 AM — Morning Briefing</a:t>
             </a:r>
+            <a:endParaRPr sz="1300" b="1" i="0">
+              <a:solidFill>
+                <a:srgbClr val="34D399"/>
+              </a:solidFill>
+              <a:latin typeface="Segoe UI" panose="020B0502040204020203"/>
+            </a:endParaRPr>
           </a:p>
         </p:txBody>
       </p:sp>
@@ -11985,7 +12537,7 @@
           <a:noFill/>
         </p:spPr>
         <p:txBody>
-          <a:bodyPr wrap="square" anchor="ctr" lIns="0" rIns="0" tIns="0" bIns="0">
+          <a:bodyPr wrap="square" lIns="0" tIns="0" rIns="0" bIns="0" anchor="ctr">
             <a:spAutoFit/>
           </a:bodyPr>
           <a:lstStyle/>
@@ -12006,10 +12558,16 @@
                 <a:solidFill>
                   <a:srgbClr val="EAFBF3"/>
                 </a:solidFill>
-                <a:latin typeface="Segoe UI"/>
+                <a:latin typeface="Segoe UI" panose="020B0502040204020203"/>
               </a:rPr>
               <a:t>Good morning! Cash position: ₹4.2L in, ₹1.8L out (7d)</a:t>
             </a:r>
+            <a:endParaRPr sz="1080" b="0" i="0">
+              <a:solidFill>
+                <a:srgbClr val="EAFBF3"/>
+              </a:solidFill>
+              <a:latin typeface="Segoe UI" panose="020B0502040204020203"/>
+            </a:endParaRPr>
           </a:p>
         </p:txBody>
       </p:sp>
@@ -12076,7 +12634,7 @@
           <a:noFill/>
         </p:spPr>
         <p:txBody>
-          <a:bodyPr wrap="square" anchor="ctr" lIns="0" rIns="0" tIns="0" bIns="0">
+          <a:bodyPr wrap="square" lIns="0" tIns="0" rIns="0" bIns="0" anchor="ctr">
             <a:spAutoFit/>
           </a:bodyPr>
           <a:lstStyle/>
@@ -12097,10 +12655,16 @@
                 <a:solidFill>
                   <a:srgbClr val="EAFBF3"/>
                 </a:solidFill>
-                <a:latin typeface="Segoe UI"/>
+                <a:latin typeface="Segoe UI" panose="020B0502040204020203"/>
               </a:rPr>
               <a:t>⚠️ Watch this week: Sharma Traders — ₹78,000 due in 2 days</a:t>
             </a:r>
+            <a:endParaRPr sz="1080" b="0" i="0">
+              <a:solidFill>
+                <a:srgbClr val="EAFBF3"/>
+              </a:solidFill>
+              <a:latin typeface="Segoe UI" panose="020B0502040204020203"/>
+            </a:endParaRPr>
           </a:p>
         </p:txBody>
       </p:sp>
@@ -12167,7 +12731,7 @@
           <a:noFill/>
         </p:spPr>
         <p:txBody>
-          <a:bodyPr wrap="square" anchor="ctr" lIns="0" rIns="0" tIns="0" bIns="0">
+          <a:bodyPr wrap="square" lIns="0" tIns="0" rIns="0" bIns="0" anchor="ctr">
             <a:spAutoFit/>
           </a:bodyPr>
           <a:lstStyle/>
@@ -12188,10 +12752,16 @@
                 <a:solidFill>
                   <a:srgbClr val="EAFBF3"/>
                 </a:solidFill>
-                <a:latin typeface="Segoe UI"/>
+                <a:latin typeface="Segoe UI" panose="020B0502040204020203"/>
               </a:rPr>
               <a:t>📦 3 products may run out within 10 days</a:t>
             </a:r>
+            <a:endParaRPr sz="1080" b="0" i="0">
+              <a:solidFill>
+                <a:srgbClr val="EAFBF3"/>
+              </a:solidFill>
+              <a:latin typeface="Segoe UI" panose="020B0502040204020203"/>
+            </a:endParaRPr>
           </a:p>
         </p:txBody>
       </p:sp>
@@ -12258,7 +12828,7 @@
           <a:noFill/>
         </p:spPr>
         <p:txBody>
-          <a:bodyPr wrap="square" anchor="ctr" lIns="0" rIns="0" tIns="0" bIns="0">
+          <a:bodyPr wrap="square" lIns="0" tIns="0" rIns="0" bIns="0" anchor="ctr">
             <a:spAutoFit/>
           </a:bodyPr>
           <a:lstStyle/>
@@ -12279,10 +12849,16 @@
                 <a:solidFill>
                   <a:srgbClr val="EAFBF3"/>
                 </a:solidFill>
-                <a:latin typeface="Segoe UI"/>
+                <a:latin typeface="Segoe UI" panose="020B0502040204020203"/>
               </a:rPr>
               <a:t>Reply with a number, or type your question.</a:t>
             </a:r>
+            <a:endParaRPr sz="1080" b="0" i="0">
+              <a:solidFill>
+                <a:srgbClr val="EAFBF3"/>
+              </a:solidFill>
+              <a:latin typeface="Segoe UI" panose="020B0502040204020203"/>
+            </a:endParaRPr>
           </a:p>
         </p:txBody>
       </p:sp>
@@ -12303,7 +12879,7 @@
           <a:noFill/>
         </p:spPr>
         <p:txBody>
-          <a:bodyPr wrap="square" anchor="t" lIns="0" rIns="0" tIns="0" bIns="0">
+          <a:bodyPr wrap="square" lIns="0" tIns="0" rIns="0" bIns="0" anchor="t">
             <a:spAutoFit/>
           </a:bodyPr>
           <a:lstStyle/>
@@ -12321,10 +12897,16 @@
                 <a:solidFill>
                   <a:srgbClr val="34D399"/>
                 </a:solidFill>
-                <a:latin typeface="Segoe UI"/>
+                <a:latin typeface="Segoe UI" panose="020B0502040204020203"/>
               </a:rPr>
               <a:t>See the full working demo → pitch/demo/opsgenie_demo.html</a:t>
             </a:r>
+            <a:endParaRPr sz="1000" b="0" i="1">
+              <a:solidFill>
+                <a:srgbClr val="34D399"/>
+              </a:solidFill>
+              <a:latin typeface="Segoe UI" panose="020B0502040204020203"/>
+            </a:endParaRPr>
           </a:p>
         </p:txBody>
       </p:sp>
@@ -12389,7 +12971,7 @@
           <a:noFill/>
         </p:spPr>
         <p:txBody>
-          <a:bodyPr wrap="square" anchor="t" lIns="0" rIns="0" tIns="0" bIns="0">
+          <a:bodyPr wrap="square" lIns="0" tIns="0" rIns="0" bIns="0" anchor="t">
             <a:spAutoFit/>
           </a:bodyPr>
           <a:lstStyle/>
@@ -12407,10 +12989,16 @@
                 <a:solidFill>
                   <a:srgbClr val="475569"/>
                 </a:solidFill>
-                <a:latin typeface="Segoe UI"/>
+                <a:latin typeface="Segoe UI" panose="020B0502040204020203"/>
               </a:rPr>
               <a:t>OpsGenie</a:t>
             </a:r>
+            <a:endParaRPr sz="1000" b="1" i="0">
+              <a:solidFill>
+                <a:srgbClr val="475569"/>
+              </a:solidFill>
+              <a:latin typeface="Segoe UI" panose="020B0502040204020203"/>
+            </a:endParaRPr>
           </a:p>
         </p:txBody>
       </p:sp>
@@ -12431,7 +13019,7 @@
           <a:noFill/>
         </p:spPr>
         <p:txBody>
-          <a:bodyPr wrap="square" anchor="t" lIns="0" rIns="0" tIns="0" bIns="0">
+          <a:bodyPr wrap="square" lIns="0" tIns="0" rIns="0" bIns="0" anchor="t">
             <a:spAutoFit/>
           </a:bodyPr>
           <a:lstStyle/>
@@ -12449,10 +13037,16 @@
                 <a:solidFill>
                   <a:srgbClr val="475569"/>
                 </a:solidFill>
-                <a:latin typeface="Segoe UI"/>
+                <a:latin typeface="Segoe UI" panose="020B0502040204020203"/>
               </a:rPr>
               <a:t>4</a:t>
             </a:r>
+            <a:endParaRPr sz="1000" b="0" i="0">
+              <a:solidFill>
+                <a:srgbClr val="475569"/>
+              </a:solidFill>
+              <a:latin typeface="Segoe UI" panose="020B0502040204020203"/>
+            </a:endParaRPr>
           </a:p>
         </p:txBody>
       </p:sp>
@@ -12465,7 +13059,7 @@
 </file>
 
 <file path=ppt/slides/slide5.xml><?xml version="1.0" encoding="utf-8"?>
-<p:sld xmlns:a="http://schemas.openxmlformats.org/drawingml/2006/main" xmlns:p="http://schemas.openxmlformats.org/presentationml/2006/main" xmlns:r="http://schemas.openxmlformats.org/officeDocument/2006/relationships">
+<p:sld xmlns:a="http://schemas.openxmlformats.org/drawingml/2006/main" xmlns:r="http://schemas.openxmlformats.org/officeDocument/2006/relationships" xmlns:p="http://schemas.openxmlformats.org/presentationml/2006/main">
   <p:cSld>
     <p:bg>
       <p:bgPr>
@@ -12543,7 +13137,7 @@
           <a:noFill/>
         </p:spPr>
         <p:txBody>
-          <a:bodyPr wrap="square" anchor="t" lIns="0" rIns="0" tIns="0" bIns="0">
+          <a:bodyPr wrap="square" lIns="0" tIns="0" rIns="0" bIns="0" anchor="t">
             <a:spAutoFit/>
           </a:bodyPr>
           <a:lstStyle/>
@@ -12561,10 +13155,16 @@
                 <a:solidFill>
                   <a:srgbClr val="10B981"/>
                 </a:solidFill>
-                <a:latin typeface="Segoe UI"/>
+                <a:latin typeface="Segoe UI" panose="020B0502040204020203"/>
               </a:rPr>
               <a:t>HOW IT WORKS</a:t>
             </a:r>
+            <a:endParaRPr sz="1250" b="1" i="0">
+              <a:solidFill>
+                <a:srgbClr val="10B981"/>
+              </a:solidFill>
+              <a:latin typeface="Segoe UI" panose="020B0502040204020203"/>
+            </a:endParaRPr>
           </a:p>
         </p:txBody>
       </p:sp>
@@ -12585,7 +13185,7 @@
           <a:noFill/>
         </p:spPr>
         <p:txBody>
-          <a:bodyPr wrap="square" anchor="t" lIns="0" rIns="0" tIns="0" bIns="0">
+          <a:bodyPr wrap="square" lIns="0" tIns="0" rIns="0" bIns="0" anchor="t">
             <a:spAutoFit/>
           </a:bodyPr>
           <a:lstStyle/>
@@ -12606,10 +13206,16 @@
                 <a:solidFill>
                   <a:srgbClr val="064E3B"/>
                 </a:solidFill>
-                <a:latin typeface="Segoe UI"/>
+                <a:latin typeface="Segoe UI" panose="020B0502040204020203"/>
               </a:rPr>
               <a:t>The product loop — this is the moat, not any single feature</a:t>
             </a:r>
+            <a:endParaRPr sz="3000" b="1" i="0">
+              <a:solidFill>
+                <a:srgbClr val="064E3B"/>
+              </a:solidFill>
+              <a:latin typeface="Segoe UI" panose="020B0502040204020203"/>
+            </a:endParaRPr>
           </a:p>
         </p:txBody>
       </p:sp>
@@ -12676,7 +13282,7 @@
           <a:noFill/>
         </p:spPr>
         <p:txBody>
-          <a:bodyPr wrap="square" anchor="ctr" lIns="0" rIns="0" tIns="0" bIns="0">
+          <a:bodyPr wrap="square" lIns="0" tIns="0" rIns="0" bIns="0" anchor="ctr">
             <a:spAutoFit/>
           </a:bodyPr>
           <a:lstStyle/>
@@ -12697,10 +13303,16 @@
                 <a:solidFill>
                   <a:srgbClr val="FFFFFF"/>
                 </a:solidFill>
-                <a:latin typeface="Segoe UI"/>
+                <a:latin typeface="Segoe UI" panose="020B0502040204020203"/>
               </a:rPr>
               <a:t>Business event occurs</a:t>
             </a:r>
+            <a:endParaRPr sz="1150" b="1" i="0">
+              <a:solidFill>
+                <a:srgbClr val="FFFFFF"/>
+              </a:solidFill>
+              <a:latin typeface="Segoe UI" panose="020B0502040204020203"/>
+            </a:endParaRPr>
           </a:p>
         </p:txBody>
       </p:sp>
@@ -12721,7 +13333,7 @@
           <a:noFill/>
         </p:spPr>
         <p:txBody>
-          <a:bodyPr wrap="square" anchor="ctr" lIns="0" rIns="0" tIns="0" bIns="0">
+          <a:bodyPr wrap="square" lIns="0" tIns="0" rIns="0" bIns="0" anchor="ctr">
             <a:spAutoFit/>
           </a:bodyPr>
           <a:lstStyle/>
@@ -12739,10 +13351,16 @@
                 <a:solidFill>
                   <a:srgbClr val="34D399"/>
                 </a:solidFill>
-                <a:latin typeface="Segoe UI"/>
+                <a:latin typeface="Segoe UI" panose="020B0502040204020203"/>
               </a:rPr>
               <a:t>→</a:t>
             </a:r>
+            <a:endParaRPr sz="2200" b="1" i="0">
+              <a:solidFill>
+                <a:srgbClr val="34D399"/>
+              </a:solidFill>
+              <a:latin typeface="Segoe UI" panose="020B0502040204020203"/>
+            </a:endParaRPr>
           </a:p>
         </p:txBody>
       </p:sp>
@@ -12809,7 +13427,7 @@
           <a:noFill/>
         </p:spPr>
         <p:txBody>
-          <a:bodyPr wrap="square" anchor="ctr" lIns="0" rIns="0" tIns="0" bIns="0">
+          <a:bodyPr wrap="square" lIns="0" tIns="0" rIns="0" bIns="0" anchor="ctr">
             <a:spAutoFit/>
           </a:bodyPr>
           <a:lstStyle/>
@@ -12830,10 +13448,16 @@
                 <a:solidFill>
                   <a:srgbClr val="FFFFFF"/>
                 </a:solidFill>
-                <a:latin typeface="Segoe UI"/>
+                <a:latin typeface="Segoe UI" panose="020B0502040204020203"/>
               </a:rPr>
               <a:t>Deterministic engine processes it</a:t>
             </a:r>
+            <a:endParaRPr sz="1150" b="1" i="0">
+              <a:solidFill>
+                <a:srgbClr val="FFFFFF"/>
+              </a:solidFill>
+              <a:latin typeface="Segoe UI" panose="020B0502040204020203"/>
+            </a:endParaRPr>
           </a:p>
         </p:txBody>
       </p:sp>
@@ -12854,7 +13478,7 @@
           <a:noFill/>
         </p:spPr>
         <p:txBody>
-          <a:bodyPr wrap="square" anchor="ctr" lIns="0" rIns="0" tIns="0" bIns="0">
+          <a:bodyPr wrap="square" lIns="0" tIns="0" rIns="0" bIns="0" anchor="ctr">
             <a:spAutoFit/>
           </a:bodyPr>
           <a:lstStyle/>
@@ -12872,10 +13496,16 @@
                 <a:solidFill>
                   <a:srgbClr val="34D399"/>
                 </a:solidFill>
-                <a:latin typeface="Segoe UI"/>
+                <a:latin typeface="Segoe UI" panose="020B0502040204020203"/>
               </a:rPr>
               <a:t>→</a:t>
             </a:r>
+            <a:endParaRPr sz="2200" b="1" i="0">
+              <a:solidFill>
+                <a:srgbClr val="34D399"/>
+              </a:solidFill>
+              <a:latin typeface="Segoe UI" panose="020B0502040204020203"/>
+            </a:endParaRPr>
           </a:p>
         </p:txBody>
       </p:sp>
@@ -12942,7 +13572,7 @@
           <a:noFill/>
         </p:spPr>
         <p:txBody>
-          <a:bodyPr wrap="square" anchor="ctr" lIns="0" rIns="0" tIns="0" bIns="0">
+          <a:bodyPr wrap="square" lIns="0" tIns="0" rIns="0" bIns="0" anchor="ctr">
             <a:spAutoFit/>
           </a:bodyPr>
           <a:lstStyle/>
@@ -12963,10 +13593,16 @@
                 <a:solidFill>
                   <a:srgbClr val="FFFFFF"/>
                 </a:solidFill>
-                <a:latin typeface="Segoe UI"/>
+                <a:latin typeface="Segoe UI" panose="020B0502040204020203"/>
               </a:rPr>
               <a:t>Snapshot reflects new reality</a:t>
             </a:r>
+            <a:endParaRPr sz="1150" b="1" i="0">
+              <a:solidFill>
+                <a:srgbClr val="FFFFFF"/>
+              </a:solidFill>
+              <a:latin typeface="Segoe UI" panose="020B0502040204020203"/>
+            </a:endParaRPr>
           </a:p>
         </p:txBody>
       </p:sp>
@@ -12987,7 +13623,7 @@
           <a:noFill/>
         </p:spPr>
         <p:txBody>
-          <a:bodyPr wrap="square" anchor="ctr" lIns="0" rIns="0" tIns="0" bIns="0">
+          <a:bodyPr wrap="square" lIns="0" tIns="0" rIns="0" bIns="0" anchor="ctr">
             <a:spAutoFit/>
           </a:bodyPr>
           <a:lstStyle/>
@@ -13005,10 +13641,16 @@
                 <a:solidFill>
                   <a:srgbClr val="34D399"/>
                 </a:solidFill>
-                <a:latin typeface="Segoe UI"/>
+                <a:latin typeface="Segoe UI" panose="020B0502040204020203"/>
               </a:rPr>
               <a:t>→</a:t>
             </a:r>
+            <a:endParaRPr sz="2200" b="1" i="0">
+              <a:solidFill>
+                <a:srgbClr val="34D399"/>
+              </a:solidFill>
+              <a:latin typeface="Segoe UI" panose="020B0502040204020203"/>
+            </a:endParaRPr>
           </a:p>
         </p:txBody>
       </p:sp>
@@ -13075,7 +13717,7 @@
           <a:noFill/>
         </p:spPr>
         <p:txBody>
-          <a:bodyPr wrap="square" anchor="ctr" lIns="0" rIns="0" tIns="0" bIns="0">
+          <a:bodyPr wrap="square" lIns="0" tIns="0" rIns="0" bIns="0" anchor="ctr">
             <a:spAutoFit/>
           </a:bodyPr>
           <a:lstStyle/>
@@ -13096,10 +13738,16 @@
                 <a:solidFill>
                   <a:srgbClr val="FFFFFF"/>
                 </a:solidFill>
-                <a:latin typeface="Segoe UI"/>
+                <a:latin typeface="Segoe UI" panose="020B0502040204020203"/>
               </a:rPr>
               <a:t>Recommendation engine runs</a:t>
             </a:r>
+            <a:endParaRPr sz="1150" b="1" i="0">
+              <a:solidFill>
+                <a:srgbClr val="FFFFFF"/>
+              </a:solidFill>
+              <a:latin typeface="Segoe UI" panose="020B0502040204020203"/>
+            </a:endParaRPr>
           </a:p>
         </p:txBody>
       </p:sp>
@@ -13120,7 +13768,7 @@
           <a:noFill/>
         </p:spPr>
         <p:txBody>
-          <a:bodyPr wrap="square" anchor="ctr" lIns="0" rIns="0" tIns="0" bIns="0">
+          <a:bodyPr wrap="square" lIns="0" tIns="0" rIns="0" bIns="0" anchor="ctr">
             <a:spAutoFit/>
           </a:bodyPr>
           <a:lstStyle/>
@@ -13138,10 +13786,16 @@
                 <a:solidFill>
                   <a:srgbClr val="34D399"/>
                 </a:solidFill>
-                <a:latin typeface="Segoe UI"/>
+                <a:latin typeface="Segoe UI" panose="020B0502040204020203"/>
               </a:rPr>
               <a:t>→</a:t>
             </a:r>
+            <a:endParaRPr sz="2200" b="1" i="0">
+              <a:solidFill>
+                <a:srgbClr val="34D399"/>
+              </a:solidFill>
+              <a:latin typeface="Segoe UI" panose="020B0502040204020203"/>
+            </a:endParaRPr>
           </a:p>
         </p:txBody>
       </p:sp>
@@ -13208,7 +13862,7 @@
           <a:noFill/>
         </p:spPr>
         <p:txBody>
-          <a:bodyPr wrap="square" anchor="ctr" lIns="0" rIns="0" tIns="0" bIns="0">
+          <a:bodyPr wrap="square" lIns="0" tIns="0" rIns="0" bIns="0" anchor="ctr">
             <a:spAutoFit/>
           </a:bodyPr>
           <a:lstStyle/>
@@ -13229,10 +13883,16 @@
                 <a:solidFill>
                   <a:srgbClr val="FFFFFF"/>
                 </a:solidFill>
-                <a:latin typeface="Segoe UI"/>
+                <a:latin typeface="Segoe UI" panose="020B0502040204020203"/>
               </a:rPr>
               <a:t>Morning briefing delivered</a:t>
             </a:r>
+            <a:endParaRPr sz="1150" b="1" i="0">
+              <a:solidFill>
+                <a:srgbClr val="FFFFFF"/>
+              </a:solidFill>
+              <a:latin typeface="Segoe UI" panose="020B0502040204020203"/>
+            </a:endParaRPr>
           </a:p>
         </p:txBody>
       </p:sp>
@@ -13253,7 +13913,7 @@
           <a:noFill/>
         </p:spPr>
         <p:txBody>
-          <a:bodyPr wrap="square" anchor="ctr" lIns="0" rIns="0" tIns="0" bIns="0">
+          <a:bodyPr wrap="square" lIns="0" tIns="0" rIns="0" bIns="0" anchor="ctr">
             <a:spAutoFit/>
           </a:bodyPr>
           <a:lstStyle/>
@@ -13271,10 +13931,16 @@
                 <a:solidFill>
                   <a:srgbClr val="34D399"/>
                 </a:solidFill>
-                <a:latin typeface="Segoe UI"/>
+                <a:latin typeface="Segoe UI" panose="020B0502040204020203"/>
               </a:rPr>
               <a:t>→</a:t>
             </a:r>
+            <a:endParaRPr sz="2200" b="1" i="0">
+              <a:solidFill>
+                <a:srgbClr val="34D399"/>
+              </a:solidFill>
+              <a:latin typeface="Segoe UI" panose="020B0502040204020203"/>
+            </a:endParaRPr>
           </a:p>
         </p:txBody>
       </p:sp>
@@ -13341,7 +14007,7 @@
           <a:noFill/>
         </p:spPr>
         <p:txBody>
-          <a:bodyPr wrap="square" anchor="ctr" lIns="0" rIns="0" tIns="0" bIns="0">
+          <a:bodyPr wrap="square" lIns="0" tIns="0" rIns="0" bIns="0" anchor="ctr">
             <a:spAutoFit/>
           </a:bodyPr>
           <a:lstStyle/>
@@ -13362,10 +14028,16 @@
                 <a:solidFill>
                   <a:srgbClr val="FFFFFF"/>
                 </a:solidFill>
-                <a:latin typeface="Segoe UI"/>
+                <a:latin typeface="Segoe UI" panose="020B0502040204020203"/>
               </a:rPr>
               <a:t>Distributor takes action</a:t>
             </a:r>
+            <a:endParaRPr sz="1150" b="1" i="0">
+              <a:solidFill>
+                <a:srgbClr val="FFFFFF"/>
+              </a:solidFill>
+              <a:latin typeface="Segoe UI" panose="020B0502040204020203"/>
+            </a:endParaRPr>
           </a:p>
         </p:txBody>
       </p:sp>
@@ -13386,7 +14058,7 @@
           <a:noFill/>
         </p:spPr>
         <p:txBody>
-          <a:bodyPr wrap="square" anchor="t" lIns="0" rIns="0" tIns="0" bIns="0">
+          <a:bodyPr wrap="square" lIns="0" tIns="0" rIns="0" bIns="0" anchor="t">
             <a:spAutoFit/>
           </a:bodyPr>
           <a:lstStyle/>
@@ -13404,10 +14076,16 @@
                 <a:solidFill>
                   <a:srgbClr val="475569"/>
                 </a:solidFill>
-                <a:latin typeface="Segoe UI"/>
+                <a:latin typeface="Segoe UI" panose="020B0502040204020203"/>
               </a:rPr>
               <a:t>… which produces a new business event, and the loop repeats — daily, compounding.</a:t>
             </a:r>
+            <a:endParaRPr sz="1300" b="0" i="1">
+              <a:solidFill>
+                <a:srgbClr val="475569"/>
+              </a:solidFill>
+              <a:latin typeface="Segoe UI" panose="020B0502040204020203"/>
+            </a:endParaRPr>
           </a:p>
         </p:txBody>
       </p:sp>
@@ -13476,7 +14154,7 @@
           <a:noFill/>
         </p:spPr>
         <p:txBody>
-          <a:bodyPr wrap="square" anchor="ctr" lIns="0" rIns="0" tIns="0" bIns="0">
+          <a:bodyPr wrap="square" lIns="0" tIns="0" rIns="0" bIns="0" anchor="ctr">
             <a:spAutoFit/>
           </a:bodyPr>
           <a:lstStyle/>
@@ -13497,10 +14175,16 @@
                 <a:solidFill>
                   <a:srgbClr val="064E3B"/>
                 </a:solidFill>
-                <a:latin typeface="Segoe UI"/>
+                <a:latin typeface="Segoe UI" panose="020B0502040204020203"/>
               </a:rPr>
               <a:t>“The morning briefing is the output of this loop, not the product itself. The moat is the loop running daily, with real data accumulating over months.”</a:t>
             </a:r>
+            <a:endParaRPr sz="1450" b="1" i="1">
+              <a:solidFill>
+                <a:srgbClr val="064E3B"/>
+              </a:solidFill>
+              <a:latin typeface="Segoe UI" panose="020B0502040204020203"/>
+            </a:endParaRPr>
           </a:p>
         </p:txBody>
       </p:sp>
@@ -13565,7 +14249,7 @@
           <a:noFill/>
         </p:spPr>
         <p:txBody>
-          <a:bodyPr wrap="square" anchor="t" lIns="0" rIns="0" tIns="0" bIns="0">
+          <a:bodyPr wrap="square" lIns="0" tIns="0" rIns="0" bIns="0" anchor="t">
             <a:spAutoFit/>
           </a:bodyPr>
           <a:lstStyle/>
@@ -13583,10 +14267,16 @@
                 <a:solidFill>
                   <a:srgbClr val="475569"/>
                 </a:solidFill>
-                <a:latin typeface="Segoe UI"/>
+                <a:latin typeface="Segoe UI" panose="020B0502040204020203"/>
               </a:rPr>
               <a:t>OpsGenie</a:t>
             </a:r>
+            <a:endParaRPr sz="1000" b="1" i="0">
+              <a:solidFill>
+                <a:srgbClr val="475569"/>
+              </a:solidFill>
+              <a:latin typeface="Segoe UI" panose="020B0502040204020203"/>
+            </a:endParaRPr>
           </a:p>
         </p:txBody>
       </p:sp>
@@ -13607,7 +14297,7 @@
           <a:noFill/>
         </p:spPr>
         <p:txBody>
-          <a:bodyPr wrap="square" anchor="t" lIns="0" rIns="0" tIns="0" bIns="0">
+          <a:bodyPr wrap="square" lIns="0" tIns="0" rIns="0" bIns="0" anchor="t">
             <a:spAutoFit/>
           </a:bodyPr>
           <a:lstStyle/>
@@ -13625,10 +14315,16 @@
                 <a:solidFill>
                   <a:srgbClr val="475569"/>
                 </a:solidFill>
-                <a:latin typeface="Segoe UI"/>
+                <a:latin typeface="Segoe UI" panose="020B0502040204020203"/>
               </a:rPr>
               <a:t>5</a:t>
             </a:r>
+            <a:endParaRPr sz="1000" b="0" i="0">
+              <a:solidFill>
+                <a:srgbClr val="475569"/>
+              </a:solidFill>
+              <a:latin typeface="Segoe UI" panose="020B0502040204020203"/>
+            </a:endParaRPr>
           </a:p>
         </p:txBody>
       </p:sp>
@@ -13641,7 +14337,7 @@
 </file>
 
 <file path=ppt/slides/slide6.xml><?xml version="1.0" encoding="utf-8"?>
-<p:sld xmlns:a="http://schemas.openxmlformats.org/drawingml/2006/main" xmlns:p="http://schemas.openxmlformats.org/presentationml/2006/main" xmlns:r="http://schemas.openxmlformats.org/officeDocument/2006/relationships">
+<p:sld xmlns:a="http://schemas.openxmlformats.org/drawingml/2006/main" xmlns:r="http://schemas.openxmlformats.org/officeDocument/2006/relationships" xmlns:p="http://schemas.openxmlformats.org/presentationml/2006/main">
   <p:cSld>
     <p:bg>
       <p:bgPr>
@@ -13719,7 +14415,7 @@
           <a:noFill/>
         </p:spPr>
         <p:txBody>
-          <a:bodyPr wrap="square" anchor="t" lIns="0" rIns="0" tIns="0" bIns="0">
+          <a:bodyPr wrap="square" lIns="0" tIns="0" rIns="0" bIns="0" anchor="t">
             <a:spAutoFit/>
           </a:bodyPr>
           <a:lstStyle/>
@@ -13737,10 +14433,16 @@
                 <a:solidFill>
                   <a:srgbClr val="10B981"/>
                 </a:solidFill>
-                <a:latin typeface="Segoe UI"/>
+                <a:latin typeface="Segoe UI" panose="020B0502040204020203"/>
               </a:rPr>
               <a:t>WHY DISTRIBUTORS CAN TRUST IT</a:t>
             </a:r>
+            <a:endParaRPr sz="1250" b="1" i="0">
+              <a:solidFill>
+                <a:srgbClr val="10B981"/>
+              </a:solidFill>
+              <a:latin typeface="Segoe UI" panose="020B0502040204020203"/>
+            </a:endParaRPr>
           </a:p>
         </p:txBody>
       </p:sp>
@@ -13761,7 +14463,7 @@
           <a:noFill/>
         </p:spPr>
         <p:txBody>
-          <a:bodyPr wrap="square" anchor="t" lIns="0" rIns="0" tIns="0" bIns="0">
+          <a:bodyPr wrap="square" lIns="0" tIns="0" rIns="0" bIns="0" anchor="t">
             <a:spAutoFit/>
           </a:bodyPr>
           <a:lstStyle/>
@@ -13782,10 +14484,16 @@
                 <a:solidFill>
                   <a:srgbClr val="064E3B"/>
                 </a:solidFill>
-                <a:latin typeface="Segoe UI"/>
+                <a:latin typeface="Segoe UI" panose="020B0502040204020203"/>
               </a:rPr>
               <a:t>Money math never touches the LLM — by construction, not by policy</a:t>
             </a:r>
+            <a:endParaRPr sz="3000" b="1" i="0">
+              <a:solidFill>
+                <a:srgbClr val="064E3B"/>
+              </a:solidFill>
+              <a:latin typeface="Segoe UI" panose="020B0502040204020203"/>
+            </a:endParaRPr>
           </a:p>
         </p:txBody>
       </p:sp>
@@ -13898,7 +14606,7 @@
           <a:noFill/>
         </p:spPr>
         <p:txBody>
-          <a:bodyPr wrap="square" anchor="t" lIns="0" rIns="0" tIns="0" bIns="0">
+          <a:bodyPr wrap="square" lIns="0" tIns="0" rIns="0" bIns="0" anchor="t">
             <a:spAutoFit/>
           </a:bodyPr>
           <a:lstStyle/>
@@ -13916,10 +14624,16 @@
                 <a:solidFill>
                   <a:srgbClr val="064E3B"/>
                 </a:solidFill>
-                <a:latin typeface="Segoe UI"/>
+                <a:latin typeface="Segoe UI" panose="020B0502040204020203"/>
               </a:rPr>
               <a:t>Deterministic ledger</a:t>
             </a:r>
+            <a:endParaRPr sz="1550" b="1" i="0">
+              <a:solidFill>
+                <a:srgbClr val="064E3B"/>
+              </a:solidFill>
+              <a:latin typeface="Segoe UI" panose="020B0502040204020203"/>
+            </a:endParaRPr>
           </a:p>
         </p:txBody>
       </p:sp>
@@ -13940,7 +14654,7 @@
           <a:noFill/>
         </p:spPr>
         <p:txBody>
-          <a:bodyPr wrap="square" anchor="t" lIns="0" rIns="0" tIns="0" bIns="0">
+          <a:bodyPr wrap="square" lIns="0" tIns="0" rIns="0" bIns="0" anchor="t">
             <a:spAutoFit/>
           </a:bodyPr>
           <a:lstStyle/>
@@ -13961,10 +14675,16 @@
                 <a:solidFill>
                   <a:srgbClr val="475569"/>
                 </a:solidFill>
-                <a:latin typeface="Segoe UI"/>
+                <a:latin typeface="Segoe UI" panose="020B0502040204020203"/>
               </a:rPr>
               <a:t>Every number in every briefing traces back to a real invoice or payment. The LLM narrates; it never calculates, decides, or writes.</a:t>
             </a:r>
+            <a:endParaRPr sz="1180" b="0" i="0">
+              <a:solidFill>
+                <a:srgbClr val="475569"/>
+              </a:solidFill>
+              <a:latin typeface="Segoe UI" panose="020B0502040204020203"/>
+            </a:endParaRPr>
           </a:p>
         </p:txBody>
       </p:sp>
@@ -14077,7 +14797,7 @@
           <a:noFill/>
         </p:spPr>
         <p:txBody>
-          <a:bodyPr wrap="square" anchor="t" lIns="0" rIns="0" tIns="0" bIns="0">
+          <a:bodyPr wrap="square" lIns="0" tIns="0" rIns="0" bIns="0" anchor="t">
             <a:spAutoFit/>
           </a:bodyPr>
           <a:lstStyle/>
@@ -14095,10 +14815,16 @@
                 <a:solidFill>
                   <a:srgbClr val="064E3B"/>
                 </a:solidFill>
-                <a:latin typeface="Segoe UI"/>
+                <a:latin typeface="Segoe UI" panose="020B0502040204020203"/>
               </a:rPr>
               <a:t>Writes are guided workflows</a:t>
             </a:r>
+            <a:endParaRPr sz="1550" b="1" i="0">
+              <a:solidFill>
+                <a:srgbClr val="064E3B"/>
+              </a:solidFill>
+              <a:latin typeface="Segoe UI" panose="020B0502040204020203"/>
+            </a:endParaRPr>
           </a:p>
         </p:txBody>
       </p:sp>
@@ -14119,7 +14845,7 @@
           <a:noFill/>
         </p:spPr>
         <p:txBody>
-          <a:bodyPr wrap="square" anchor="t" lIns="0" rIns="0" tIns="0" bIns="0">
+          <a:bodyPr wrap="square" lIns="0" tIns="0" rIns="0" bIns="0" anchor="t">
             <a:spAutoFit/>
           </a:bodyPr>
           <a:lstStyle/>
@@ -14140,10 +14866,16 @@
                 <a:solidFill>
                   <a:srgbClr val="475569"/>
                 </a:solidFill>
-                <a:latin typeface="Segoe UI"/>
+                <a:latin typeface="Segoe UI" panose="020B0502040204020203"/>
               </a:rPr>
               <a:t>Creating an order or recording a payment is a confirm-gated flow (“Reply YES to confirm”), re-derived fresh at the moment of confirmation — never a freeform AI action.</a:t>
             </a:r>
+            <a:endParaRPr sz="1180" b="0" i="0">
+              <a:solidFill>
+                <a:srgbClr val="475569"/>
+              </a:solidFill>
+              <a:latin typeface="Segoe UI" panose="020B0502040204020203"/>
+            </a:endParaRPr>
           </a:p>
         </p:txBody>
       </p:sp>
@@ -14256,7 +14988,7 @@
           <a:noFill/>
         </p:spPr>
         <p:txBody>
-          <a:bodyPr wrap="square" anchor="t" lIns="0" rIns="0" tIns="0" bIns="0">
+          <a:bodyPr wrap="square" lIns="0" tIns="0" rIns="0" bIns="0" anchor="t">
             <a:spAutoFit/>
           </a:bodyPr>
           <a:lstStyle/>
@@ -14274,10 +15006,16 @@
                 <a:solidFill>
                   <a:srgbClr val="064E3B"/>
                 </a:solidFill>
-                <a:latin typeface="Segoe UI"/>
+                <a:latin typeface="Segoe UI" panose="020B0502040204020203"/>
               </a:rPr>
               <a:t>Money-safety guard on free-form Q&amp;A</a:t>
             </a:r>
+            <a:endParaRPr sz="1550" b="1" i="0">
+              <a:solidFill>
+                <a:srgbClr val="064E3B"/>
+              </a:solidFill>
+              <a:latin typeface="Segoe UI" panose="020B0502040204020203"/>
+            </a:endParaRPr>
           </a:p>
         </p:txBody>
       </p:sp>
@@ -14298,7 +15036,7 @@
           <a:noFill/>
         </p:spPr>
         <p:txBody>
-          <a:bodyPr wrap="square" anchor="t" lIns="0" rIns="0" tIns="0" bIns="0">
+          <a:bodyPr wrap="square" lIns="0" tIns="0" rIns="0" bIns="0" anchor="t">
             <a:spAutoFit/>
           </a:bodyPr>
           <a:lstStyle/>
@@ -14319,10 +15057,16 @@
                 <a:solidFill>
                   <a:srgbClr val="475569"/>
                 </a:solidFill>
-                <a:latin typeface="Segoe UI"/>
+                <a:latin typeface="Segoe UI" panose="020B0502040204020203"/>
               </a:rPr>
               <a:t>The AI Q&amp;A agent discards any reply containing a figure its own read-only tools didn’t actually return.</a:t>
             </a:r>
+            <a:endParaRPr sz="1180" b="0" i="0">
+              <a:solidFill>
+                <a:srgbClr val="475569"/>
+              </a:solidFill>
+              <a:latin typeface="Segoe UI" panose="020B0502040204020203"/>
+            </a:endParaRPr>
           </a:p>
         </p:txBody>
       </p:sp>
@@ -14435,7 +15179,7 @@
           <a:noFill/>
         </p:spPr>
         <p:txBody>
-          <a:bodyPr wrap="square" anchor="t" lIns="0" rIns="0" tIns="0" bIns="0">
+          <a:bodyPr wrap="square" lIns="0" tIns="0" rIns="0" bIns="0" anchor="t">
             <a:spAutoFit/>
           </a:bodyPr>
           <a:lstStyle/>
@@ -14453,10 +15197,16 @@
                 <a:solidFill>
                   <a:srgbClr val="064E3B"/>
                 </a:solidFill>
-                <a:latin typeface="Segoe UI"/>
+                <a:latin typeface="Segoe UI" panose="020B0502040204020203"/>
               </a:rPr>
               <a:t>Provider-agnostic &amp; resilient</a:t>
             </a:r>
+            <a:endParaRPr sz="1550" b="1" i="0">
+              <a:solidFill>
+                <a:srgbClr val="064E3B"/>
+              </a:solidFill>
+              <a:latin typeface="Segoe UI" panose="020B0502040204020203"/>
+            </a:endParaRPr>
           </a:p>
         </p:txBody>
       </p:sp>
@@ -14477,7 +15227,7 @@
           <a:noFill/>
         </p:spPr>
         <p:txBody>
-          <a:bodyPr wrap="square" anchor="t" lIns="0" rIns="0" tIns="0" bIns="0">
+          <a:bodyPr wrap="square" lIns="0" tIns="0" rIns="0" bIns="0" anchor="t">
             <a:spAutoFit/>
           </a:bodyPr>
           <a:lstStyle/>
@@ -14498,10 +15248,16 @@
                 <a:solidFill>
                   <a:srgbClr val="475569"/>
                 </a:solidFill>
-                <a:latin typeface="Segoe UI"/>
+                <a:latin typeface="Segoe UI" panose="020B0502040204020203"/>
               </a:rPr>
               <a:t>A pluggable failover chain across 6 LLM providers (Claude, Gemini, Groq, OpenRouter, GitHub Models, Cohere) — verified in production failing over a real 429 with identical figures.</a:t>
             </a:r>
+            <a:endParaRPr sz="1180" b="0" i="0">
+              <a:solidFill>
+                <a:srgbClr val="475569"/>
+              </a:solidFill>
+              <a:latin typeface="Segoe UI" panose="020B0502040204020203"/>
+            </a:endParaRPr>
           </a:p>
         </p:txBody>
       </p:sp>
@@ -14566,7 +15322,7 @@
           <a:noFill/>
         </p:spPr>
         <p:txBody>
-          <a:bodyPr wrap="square" anchor="t" lIns="0" rIns="0" tIns="0" bIns="0">
+          <a:bodyPr wrap="square" lIns="0" tIns="0" rIns="0" bIns="0" anchor="t">
             <a:spAutoFit/>
           </a:bodyPr>
           <a:lstStyle/>
@@ -14584,10 +15340,16 @@
                 <a:solidFill>
                   <a:srgbClr val="475569"/>
                 </a:solidFill>
-                <a:latin typeface="Segoe UI"/>
+                <a:latin typeface="Segoe UI" panose="020B0502040204020203"/>
               </a:rPr>
               <a:t>OpsGenie</a:t>
             </a:r>
+            <a:endParaRPr sz="1000" b="1" i="0">
+              <a:solidFill>
+                <a:srgbClr val="475569"/>
+              </a:solidFill>
+              <a:latin typeface="Segoe UI" panose="020B0502040204020203"/>
+            </a:endParaRPr>
           </a:p>
         </p:txBody>
       </p:sp>
@@ -14608,7 +15370,7 @@
           <a:noFill/>
         </p:spPr>
         <p:txBody>
-          <a:bodyPr wrap="square" anchor="t" lIns="0" rIns="0" tIns="0" bIns="0">
+          <a:bodyPr wrap="square" lIns="0" tIns="0" rIns="0" bIns="0" anchor="t">
             <a:spAutoFit/>
           </a:bodyPr>
           <a:lstStyle/>
@@ -14626,10 +15388,16 @@
                 <a:solidFill>
                   <a:srgbClr val="475569"/>
                 </a:solidFill>
-                <a:latin typeface="Segoe UI"/>
+                <a:latin typeface="Segoe UI" panose="020B0502040204020203"/>
               </a:rPr>
               <a:t>6</a:t>
             </a:r>
+            <a:endParaRPr sz="1000" b="0" i="0">
+              <a:solidFill>
+                <a:srgbClr val="475569"/>
+              </a:solidFill>
+              <a:latin typeface="Segoe UI" panose="020B0502040204020203"/>
+            </a:endParaRPr>
           </a:p>
         </p:txBody>
       </p:sp>
@@ -14642,7 +15410,7 @@
 </file>
 
 <file path=ppt/slides/slide7.xml><?xml version="1.0" encoding="utf-8"?>
-<p:sld xmlns:a="http://schemas.openxmlformats.org/drawingml/2006/main" xmlns:p="http://schemas.openxmlformats.org/presentationml/2006/main" xmlns:r="http://schemas.openxmlformats.org/officeDocument/2006/relationships">
+<p:sld xmlns:a="http://schemas.openxmlformats.org/drawingml/2006/main" xmlns:r="http://schemas.openxmlformats.org/officeDocument/2006/relationships" xmlns:p="http://schemas.openxmlformats.org/presentationml/2006/main">
   <p:cSld>
     <p:bg>
       <p:bgPr>
@@ -14720,7 +15488,7 @@
           <a:noFill/>
         </p:spPr>
         <p:txBody>
-          <a:bodyPr wrap="square" anchor="t" lIns="0" rIns="0" tIns="0" bIns="0">
+          <a:bodyPr wrap="square" lIns="0" tIns="0" rIns="0" bIns="0" anchor="t">
             <a:spAutoFit/>
           </a:bodyPr>
           <a:lstStyle/>
@@ -14738,10 +15506,16 @@
                 <a:solidFill>
                   <a:srgbClr val="10B981"/>
                 </a:solidFill>
-                <a:latin typeface="Segoe UI"/>
+                <a:latin typeface="Segoe UI" panose="020B0502040204020203"/>
               </a:rPr>
               <a:t>EVERYTHING WE’VE BUILT · 1 OF 4</a:t>
             </a:r>
+            <a:endParaRPr sz="1250" b="1" i="0">
+              <a:solidFill>
+                <a:srgbClr val="10B981"/>
+              </a:solidFill>
+              <a:latin typeface="Segoe UI" panose="020B0502040204020203"/>
+            </a:endParaRPr>
           </a:p>
         </p:txBody>
       </p:sp>
@@ -14762,7 +15536,7 @@
           <a:noFill/>
         </p:spPr>
         <p:txBody>
-          <a:bodyPr wrap="square" anchor="t" lIns="0" rIns="0" tIns="0" bIns="0">
+          <a:bodyPr wrap="square" lIns="0" tIns="0" rIns="0" bIns="0" anchor="t">
             <a:spAutoFit/>
           </a:bodyPr>
           <a:lstStyle/>
@@ -14783,10 +15557,16 @@
                 <a:solidFill>
                   <a:srgbClr val="064E3B"/>
                 </a:solidFill>
-                <a:latin typeface="Segoe UI"/>
+                <a:latin typeface="Segoe UI" panose="020B0502040204020203"/>
               </a:rPr>
               <a:t>Daily intelligence, delivered before the day starts</a:t>
             </a:r>
+            <a:endParaRPr sz="2600" b="1" i="0">
+              <a:solidFill>
+                <a:srgbClr val="064E3B"/>
+              </a:solidFill>
+              <a:latin typeface="Segoe UI" panose="020B0502040204020203"/>
+            </a:endParaRPr>
           </a:p>
         </p:txBody>
       </p:sp>
@@ -14899,7 +15679,7 @@
           <a:noFill/>
         </p:spPr>
         <p:txBody>
-          <a:bodyPr wrap="square" anchor="t" lIns="0" rIns="0" tIns="0" bIns="0">
+          <a:bodyPr wrap="square" lIns="0" tIns="0" rIns="0" bIns="0" anchor="t">
             <a:spAutoFit/>
           </a:bodyPr>
           <a:lstStyle/>
@@ -14920,10 +15700,16 @@
                 <a:solidFill>
                   <a:srgbClr val="064E3B"/>
                 </a:solidFill>
-                <a:latin typeface="Segoe UI"/>
+                <a:latin typeface="Segoe UI" panose="020B0502040204020203"/>
               </a:rPr>
               <a:t>Morning &amp; evening briefings</a:t>
             </a:r>
+            <a:endParaRPr sz="1350" b="1" i="0">
+              <a:solidFill>
+                <a:srgbClr val="064E3B"/>
+              </a:solidFill>
+              <a:latin typeface="Segoe UI" panose="020B0502040204020203"/>
+            </a:endParaRPr>
           </a:p>
         </p:txBody>
       </p:sp>
@@ -14944,7 +15730,7 @@
           <a:noFill/>
         </p:spPr>
         <p:txBody>
-          <a:bodyPr wrap="square" anchor="t" lIns="0" rIns="0" tIns="0" bIns="0">
+          <a:bodyPr wrap="square" lIns="0" tIns="0" rIns="0" bIns="0" anchor="t">
             <a:spAutoFit/>
           </a:bodyPr>
           <a:lstStyle/>
@@ -14965,10 +15751,16 @@
                 <a:solidFill>
                   <a:srgbClr val="475569"/>
                 </a:solidFill>
-                <a:latin typeface="Segoe UI"/>
+                <a:latin typeface="Segoe UI" panose="020B0502040204020203"/>
               </a:rPr>
               <a:t>LLM-narrated cash position, honest accrual vs. cash-basis split — never blended into one number.</a:t>
             </a:r>
+            <a:endParaRPr sz="1080" b="0" i="0">
+              <a:solidFill>
+                <a:srgbClr val="475569"/>
+              </a:solidFill>
+              <a:latin typeface="Segoe UI" panose="020B0502040204020203"/>
+            </a:endParaRPr>
           </a:p>
         </p:txBody>
       </p:sp>
@@ -15081,7 +15873,7 @@
           <a:noFill/>
         </p:spPr>
         <p:txBody>
-          <a:bodyPr wrap="square" anchor="t" lIns="0" rIns="0" tIns="0" bIns="0">
+          <a:bodyPr wrap="square" lIns="0" tIns="0" rIns="0" bIns="0" anchor="t">
             <a:spAutoFit/>
           </a:bodyPr>
           <a:lstStyle/>
@@ -15102,10 +15894,16 @@
                 <a:solidFill>
                   <a:srgbClr val="064E3B"/>
                 </a:solidFill>
-                <a:latin typeface="Segoe UI"/>
+                <a:latin typeface="Segoe UI" panose="020B0502040204020203"/>
               </a:rPr>
               <a:t>7-day cash-shortage forecast</a:t>
             </a:r>
+            <a:endParaRPr sz="1350" b="1" i="0">
+              <a:solidFill>
+                <a:srgbClr val="064E3B"/>
+              </a:solidFill>
+              <a:latin typeface="Segoe UI" panose="020B0502040204020203"/>
+            </a:endParaRPr>
           </a:p>
         </p:txBody>
       </p:sp>
@@ -15126,7 +15924,7 @@
           <a:noFill/>
         </p:spPr>
         <p:txBody>
-          <a:bodyPr wrap="square" anchor="t" lIns="0" rIns="0" tIns="0" bIns="0">
+          <a:bodyPr wrap="square" lIns="0" tIns="0" rIns="0" bIns="0" anchor="t">
             <a:spAutoFit/>
           </a:bodyPr>
           <a:lstStyle/>
@@ -15147,10 +15945,16 @@
                 <a:solidFill>
                   <a:srgbClr val="475569"/>
                 </a:solidFill>
-                <a:latin typeface="Segoe UI"/>
+                <a:latin typeface="Segoe UI" panose="020B0502040204020203"/>
               </a:rPr>
               <a:t>Walks expected collections/payments day-by-day, names the single biggest payment driving the shortfall.</a:t>
             </a:r>
+            <a:endParaRPr sz="1080" b="0" i="0">
+              <a:solidFill>
+                <a:srgbClr val="475569"/>
+              </a:solidFill>
+              <a:latin typeface="Segoe UI" panose="020B0502040204020203"/>
+            </a:endParaRPr>
           </a:p>
         </p:txBody>
       </p:sp>
@@ -15263,7 +16067,7 @@
           <a:noFill/>
         </p:spPr>
         <p:txBody>
-          <a:bodyPr wrap="square" anchor="t" lIns="0" rIns="0" tIns="0" bIns="0">
+          <a:bodyPr wrap="square" lIns="0" tIns="0" rIns="0" bIns="0" anchor="t">
             <a:spAutoFit/>
           </a:bodyPr>
           <a:lstStyle/>
@@ -15284,10 +16088,16 @@
                 <a:solidFill>
                   <a:srgbClr val="064E3B"/>
                 </a:solidFill>
-                <a:latin typeface="Segoe UI"/>
+                <a:latin typeface="Segoe UI" panose="020B0502040204020203"/>
               </a:rPr>
               <a:t>Stock-out forecast</a:t>
             </a:r>
+            <a:endParaRPr sz="1350" b="1" i="0">
+              <a:solidFill>
+                <a:srgbClr val="064E3B"/>
+              </a:solidFill>
+              <a:latin typeface="Segoe UI" panose="020B0502040204020203"/>
+            </a:endParaRPr>
           </a:p>
         </p:txBody>
       </p:sp>
@@ -15308,7 +16118,7 @@
           <a:noFill/>
         </p:spPr>
         <p:txBody>
-          <a:bodyPr wrap="square" anchor="t" lIns="0" rIns="0" tIns="0" bIns="0">
+          <a:bodyPr wrap="square" lIns="0" tIns="0" rIns="0" bIns="0" anchor="t">
             <a:spAutoFit/>
           </a:bodyPr>
           <a:lstStyle/>
@@ -15329,10 +16139,16 @@
                 <a:solidFill>
                   <a:srgbClr val="475569"/>
                 </a:solidFill>
-                <a:latin typeface="Segoe UI"/>
+                <a:latin typeface="Segoe UI" panose="020B0502040204020203"/>
               </a:rPr>
               <a:t>Sales-velocity model per product, guarded against thin data (≥3 sale-days, ≥10 units) before it ever speaks up.</a:t>
             </a:r>
+            <a:endParaRPr sz="1080" b="0" i="0">
+              <a:solidFill>
+                <a:srgbClr val="475569"/>
+              </a:solidFill>
+              <a:latin typeface="Segoe UI" panose="020B0502040204020203"/>
+            </a:endParaRPr>
           </a:p>
         </p:txBody>
       </p:sp>
@@ -15445,7 +16261,7 @@
           <a:noFill/>
         </p:spPr>
         <p:txBody>
-          <a:bodyPr wrap="square" anchor="t" lIns="0" rIns="0" tIns="0" bIns="0">
+          <a:bodyPr wrap="square" lIns="0" tIns="0" rIns="0" bIns="0" anchor="t">
             <a:spAutoFit/>
           </a:bodyPr>
           <a:lstStyle/>
@@ -15466,10 +16282,16 @@
                 <a:solidFill>
                   <a:srgbClr val="064E3B"/>
                 </a:solidFill>
-                <a:latin typeface="Segoe UI"/>
+                <a:latin typeface="Segoe UI" panose="020B0502040204020203"/>
               </a:rPr>
               <a:t>Pre-due invoice nudges</a:t>
             </a:r>
+            <a:endParaRPr sz="1350" b="1" i="0">
+              <a:solidFill>
+                <a:srgbClr val="064E3B"/>
+              </a:solidFill>
+              <a:latin typeface="Segoe UI" panose="020B0502040204020203"/>
+            </a:endParaRPr>
           </a:p>
         </p:txBody>
       </p:sp>
@@ -15490,7 +16312,7 @@
           <a:noFill/>
         </p:spPr>
         <p:txBody>
-          <a:bodyPr wrap="square" anchor="t" lIns="0" rIns="0" tIns="0" bIns="0">
+          <a:bodyPr wrap="square" lIns="0" tIns="0" rIns="0" bIns="0" anchor="t">
             <a:spAutoFit/>
           </a:bodyPr>
           <a:lstStyle/>
@@ -15511,10 +16333,16 @@
                 <a:solidFill>
                   <a:srgbClr val="475569"/>
                 </a:solidFill>
-                <a:latin typeface="Segoe UI"/>
+                <a:latin typeface="Segoe UI" panose="020B0502040204020203"/>
               </a:rPr>
               <a:t>Fires 1–2 days before a receivable is due — with a suggested action, not just a number.</a:t>
             </a:r>
+            <a:endParaRPr sz="1080" b="0" i="0">
+              <a:solidFill>
+                <a:srgbClr val="475569"/>
+              </a:solidFill>
+              <a:latin typeface="Segoe UI" panose="020B0502040204020203"/>
+            </a:endParaRPr>
           </a:p>
         </p:txBody>
       </p:sp>
@@ -15627,7 +16455,7 @@
           <a:noFill/>
         </p:spPr>
         <p:txBody>
-          <a:bodyPr wrap="square" anchor="t" lIns="0" rIns="0" tIns="0" bIns="0">
+          <a:bodyPr wrap="square" lIns="0" tIns="0" rIns="0" bIns="0" anchor="t">
             <a:spAutoFit/>
           </a:bodyPr>
           <a:lstStyle/>
@@ -15648,10 +16476,16 @@
                 <a:solidFill>
                   <a:srgbClr val="064E3B"/>
                 </a:solidFill>
-                <a:latin typeface="Segoe UI"/>
+                <a:latin typeface="Segoe UI" panose="020B0502040204020203"/>
               </a:rPr>
               <a:t>Dealer-risk &amp; overdue alerts</a:t>
             </a:r>
+            <a:endParaRPr sz="1350" b="1" i="0">
+              <a:solidFill>
+                <a:srgbClr val="064E3B"/>
+              </a:solidFill>
+              <a:latin typeface="Segoe UI" panose="020B0502040204020203"/>
+            </a:endParaRPr>
           </a:p>
         </p:txBody>
       </p:sp>
@@ -15672,7 +16506,7 @@
           <a:noFill/>
         </p:spPr>
         <p:txBody>
-          <a:bodyPr wrap="square" anchor="t" lIns="0" rIns="0" tIns="0" bIns="0">
+          <a:bodyPr wrap="square" lIns="0" tIns="0" rIns="0" bIns="0" anchor="t">
             <a:spAutoFit/>
           </a:bodyPr>
           <a:lstStyle/>
@@ -15693,10 +16527,16 @@
                 <a:solidFill>
                   <a:srgbClr val="475569"/>
                 </a:solidFill>
-                <a:latin typeface="Segoe UI"/>
+                <a:latin typeface="Segoe UI" panose="020B0502040204020203"/>
               </a:rPr>
               <a:t>Automatic flags for high-risk dealers; optional direct-to-dealer reminders with the distributor’s consent.</a:t>
             </a:r>
+            <a:endParaRPr sz="1080" b="0" i="0">
+              <a:solidFill>
+                <a:srgbClr val="475569"/>
+              </a:solidFill>
+              <a:latin typeface="Segoe UI" panose="020B0502040204020203"/>
+            </a:endParaRPr>
           </a:p>
         </p:txBody>
       </p:sp>
@@ -15809,7 +16649,7 @@
           <a:noFill/>
         </p:spPr>
         <p:txBody>
-          <a:bodyPr wrap="square" anchor="t" lIns="0" rIns="0" tIns="0" bIns="0">
+          <a:bodyPr wrap="square" lIns="0" tIns="0" rIns="0" bIns="0" anchor="t">
             <a:spAutoFit/>
           </a:bodyPr>
           <a:lstStyle/>
@@ -15830,10 +16670,16 @@
                 <a:solidFill>
                   <a:srgbClr val="064E3B"/>
                 </a:solidFill>
-                <a:latin typeface="Segoe UI"/>
+                <a:latin typeface="Segoe UI" panose="020B0502040204020203"/>
               </a:rPr>
               <a:t>Trend analytics</a:t>
             </a:r>
+            <a:endParaRPr sz="1350" b="1" i="0">
+              <a:solidFill>
+                <a:srgbClr val="064E3B"/>
+              </a:solidFill>
+              <a:latin typeface="Segoe UI" panose="020B0502040204020203"/>
+            </a:endParaRPr>
           </a:p>
         </p:txBody>
       </p:sp>
@@ -15854,7 +16700,7 @@
           <a:noFill/>
         </p:spPr>
         <p:txBody>
-          <a:bodyPr wrap="square" anchor="t" lIns="0" rIns="0" tIns="0" bIns="0">
+          <a:bodyPr wrap="square" lIns="0" tIns="0" rIns="0" bIns="0" anchor="t">
             <a:spAutoFit/>
           </a:bodyPr>
           <a:lstStyle/>
@@ -15875,10 +16721,16 @@
                 <a:solidFill>
                   <a:srgbClr val="475569"/>
                 </a:solidFill>
-                <a:latin typeface="Segoe UI"/>
+                <a:latin typeface="Segoe UI" panose="020B0502040204020203"/>
               </a:rPr>
               <a:t>Week-over-week cash trends and 30-day dealer/product movement — including credit-risk dealers whose balance is climbing.</a:t>
             </a:r>
+            <a:endParaRPr sz="1080" b="0" i="0">
+              <a:solidFill>
+                <a:srgbClr val="475569"/>
+              </a:solidFill>
+              <a:latin typeface="Segoe UI" panose="020B0502040204020203"/>
+            </a:endParaRPr>
           </a:p>
         </p:txBody>
       </p:sp>
@@ -15943,7 +16795,7 @@
           <a:noFill/>
         </p:spPr>
         <p:txBody>
-          <a:bodyPr wrap="square" anchor="t" lIns="0" rIns="0" tIns="0" bIns="0">
+          <a:bodyPr wrap="square" lIns="0" tIns="0" rIns="0" bIns="0" anchor="t">
             <a:spAutoFit/>
           </a:bodyPr>
           <a:lstStyle/>
@@ -15961,10 +16813,16 @@
                 <a:solidFill>
                   <a:srgbClr val="475569"/>
                 </a:solidFill>
-                <a:latin typeface="Segoe UI"/>
+                <a:latin typeface="Segoe UI" panose="020B0502040204020203"/>
               </a:rPr>
               <a:t>OpsGenie</a:t>
             </a:r>
+            <a:endParaRPr sz="1000" b="1" i="0">
+              <a:solidFill>
+                <a:srgbClr val="475569"/>
+              </a:solidFill>
+              <a:latin typeface="Segoe UI" panose="020B0502040204020203"/>
+            </a:endParaRPr>
           </a:p>
         </p:txBody>
       </p:sp>
@@ -15985,7 +16843,7 @@
           <a:noFill/>
         </p:spPr>
         <p:txBody>
-          <a:bodyPr wrap="square" anchor="t" lIns="0" rIns="0" tIns="0" bIns="0">
+          <a:bodyPr wrap="square" lIns="0" tIns="0" rIns="0" bIns="0" anchor="t">
             <a:spAutoFit/>
           </a:bodyPr>
           <a:lstStyle/>
@@ -16003,10 +16861,16 @@
                 <a:solidFill>
                   <a:srgbClr val="475569"/>
                 </a:solidFill>
-                <a:latin typeface="Segoe UI"/>
+                <a:latin typeface="Segoe UI" panose="020B0502040204020203"/>
               </a:rPr>
               <a:t>7</a:t>
             </a:r>
+            <a:endParaRPr sz="1000" b="0" i="0">
+              <a:solidFill>
+                <a:srgbClr val="475569"/>
+              </a:solidFill>
+              <a:latin typeface="Segoe UI" panose="020B0502040204020203"/>
+            </a:endParaRPr>
           </a:p>
         </p:txBody>
       </p:sp>
@@ -16019,7 +16883,7 @@
 </file>
 
 <file path=ppt/slides/slide8.xml><?xml version="1.0" encoding="utf-8"?>
-<p:sld xmlns:a="http://schemas.openxmlformats.org/drawingml/2006/main" xmlns:p="http://schemas.openxmlformats.org/presentationml/2006/main" xmlns:r="http://schemas.openxmlformats.org/officeDocument/2006/relationships">
+<p:sld xmlns:a="http://schemas.openxmlformats.org/drawingml/2006/main" xmlns:r="http://schemas.openxmlformats.org/officeDocument/2006/relationships" xmlns:p="http://schemas.openxmlformats.org/presentationml/2006/main">
   <p:cSld>
     <p:bg>
       <p:bgPr>
@@ -16097,7 +16961,7 @@
           <a:noFill/>
         </p:spPr>
         <p:txBody>
-          <a:bodyPr wrap="square" anchor="t" lIns="0" rIns="0" tIns="0" bIns="0">
+          <a:bodyPr wrap="square" lIns="0" tIns="0" rIns="0" bIns="0" anchor="t">
             <a:spAutoFit/>
           </a:bodyPr>
           <a:lstStyle/>
@@ -16115,10 +16979,16 @@
                 <a:solidFill>
                   <a:srgbClr val="10B981"/>
                 </a:solidFill>
-                <a:latin typeface="Segoe UI"/>
+                <a:latin typeface="Segoe UI" panose="020B0502040204020203"/>
               </a:rPr>
               <a:t>EVERYTHING WE’VE BUILT · 2 OF 4</a:t>
             </a:r>
+            <a:endParaRPr sz="1250" b="1" i="0">
+              <a:solidFill>
+                <a:srgbClr val="10B981"/>
+              </a:solidFill>
+              <a:latin typeface="Segoe UI" panose="020B0502040204020203"/>
+            </a:endParaRPr>
           </a:p>
         </p:txBody>
       </p:sp>
@@ -16139,7 +17009,7 @@
           <a:noFill/>
         </p:spPr>
         <p:txBody>
-          <a:bodyPr wrap="square" anchor="t" lIns="0" rIns="0" tIns="0" bIns="0">
+          <a:bodyPr wrap="square" lIns="0" tIns="0" rIns="0" bIns="0" anchor="t">
             <a:spAutoFit/>
           </a:bodyPr>
           <a:lstStyle/>
@@ -16160,10 +17030,16 @@
                 <a:solidFill>
                   <a:srgbClr val="064E3B"/>
                 </a:solidFill>
-                <a:latin typeface="Segoe UI"/>
+                <a:latin typeface="Segoe UI" panose="020B0502040204020203"/>
               </a:rPr>
               <a:t>A real system of record — written entirely from WhatsApp</a:t>
             </a:r>
+            <a:endParaRPr sz="2600" b="1" i="0">
+              <a:solidFill>
+                <a:srgbClr val="064E3B"/>
+              </a:solidFill>
+              <a:latin typeface="Segoe UI" panose="020B0502040204020203"/>
+            </a:endParaRPr>
           </a:p>
         </p:txBody>
       </p:sp>
@@ -16276,7 +17152,7 @@
           <a:noFill/>
         </p:spPr>
         <p:txBody>
-          <a:bodyPr wrap="square" anchor="t" lIns="0" rIns="0" tIns="0" bIns="0">
+          <a:bodyPr wrap="square" lIns="0" tIns="0" rIns="0" bIns="0" anchor="t">
             <a:spAutoFit/>
           </a:bodyPr>
           <a:lstStyle/>
@@ -16297,10 +17173,16 @@
                 <a:solidFill>
                   <a:srgbClr val="064E3B"/>
                 </a:solidFill>
-                <a:latin typeface="Segoe UI"/>
+                <a:latin typeface="Segoe UI" panose="020B0502040204020203"/>
               </a:rPr>
               <a:t>Create orders &amp; invoices</a:t>
             </a:r>
+            <a:endParaRPr sz="1350" b="1" i="0">
+              <a:solidFill>
+                <a:srgbClr val="064E3B"/>
+              </a:solidFill>
+              <a:latin typeface="Segoe UI" panose="020B0502040204020203"/>
+            </a:endParaRPr>
           </a:p>
         </p:txBody>
       </p:sp>
@@ -16321,7 +17203,7 @@
           <a:noFill/>
         </p:spPr>
         <p:txBody>
-          <a:bodyPr wrap="square" anchor="t" lIns="0" rIns="0" tIns="0" bIns="0">
+          <a:bodyPr wrap="square" lIns="0" tIns="0" rIns="0" bIns="0" anchor="t">
             <a:spAutoFit/>
           </a:bodyPr>
           <a:lstStyle/>
@@ -16342,10 +17224,16 @@
                 <a:solidFill>
                   <a:srgbClr val="475569"/>
                 </a:solidFill>
-                <a:latin typeface="Segoe UI"/>
+                <a:latin typeface="Segoe UI" panose="020B0502040204020203"/>
               </a:rPr>
               <a:t>Guided flow with live GST math, credit-limit and duplicate-order warnings, and an optional advance-payment step.</a:t>
             </a:r>
+            <a:endParaRPr sz="1080" b="0" i="0">
+              <a:solidFill>
+                <a:srgbClr val="475569"/>
+              </a:solidFill>
+              <a:latin typeface="Segoe UI" panose="020B0502040204020203"/>
+            </a:endParaRPr>
           </a:p>
         </p:txBody>
       </p:sp>
@@ -16458,7 +17346,7 @@
           <a:noFill/>
         </p:spPr>
         <p:txBody>
-          <a:bodyPr wrap="square" anchor="t" lIns="0" rIns="0" tIns="0" bIns="0">
+          <a:bodyPr wrap="square" lIns="0" tIns="0" rIns="0" bIns="0" anchor="t">
             <a:spAutoFit/>
           </a:bodyPr>
           <a:lstStyle/>
@@ -16479,10 +17367,16 @@
                 <a:solidFill>
                   <a:srgbClr val="064E3B"/>
                 </a:solidFill>
-                <a:latin typeface="Segoe UI"/>
+                <a:latin typeface="Segoe UI" panose="020B0502040204020203"/>
               </a:rPr>
               <a:t>Record payments (FIFO)</a:t>
             </a:r>
+            <a:endParaRPr sz="1350" b="1" i="0">
+              <a:solidFill>
+                <a:srgbClr val="064E3B"/>
+              </a:solidFill>
+              <a:latin typeface="Segoe UI" panose="020B0502040204020203"/>
+            </a:endParaRPr>
           </a:p>
         </p:txBody>
       </p:sp>
@@ -16503,7 +17397,7 @@
           <a:noFill/>
         </p:spPr>
         <p:txBody>
-          <a:bodyPr wrap="square" anchor="t" lIns="0" rIns="0" tIns="0" bIns="0">
+          <a:bodyPr wrap="square" lIns="0" tIns="0" rIns="0" bIns="0" anchor="t">
             <a:spAutoFit/>
           </a:bodyPr>
           <a:lstStyle/>
@@ -16524,10 +17418,16 @@
                 <a:solidFill>
                   <a:srgbClr val="475569"/>
                 </a:solidFill>
-                <a:latin typeface="Segoe UI"/>
+                <a:latin typeface="Segoe UI" panose="020B0502040204020203"/>
               </a:rPr>
               <a:t>Same allocator used by CSV import — confirm-gated, re-derived fresh at the moment of commit.</a:t>
             </a:r>
+            <a:endParaRPr sz="1080" b="0" i="0">
+              <a:solidFill>
+                <a:srgbClr val="475569"/>
+              </a:solidFill>
+              <a:latin typeface="Segoe UI" panose="020B0502040204020203"/>
+            </a:endParaRPr>
           </a:p>
         </p:txBody>
       </p:sp>
@@ -16640,7 +17540,7 @@
           <a:noFill/>
         </p:spPr>
         <p:txBody>
-          <a:bodyPr wrap="square" anchor="t" lIns="0" rIns="0" tIns="0" bIns="0">
+          <a:bodyPr wrap="square" lIns="0" tIns="0" rIns="0" bIns="0" anchor="t">
             <a:spAutoFit/>
           </a:bodyPr>
           <a:lstStyle/>
@@ -16661,10 +17561,16 @@
                 <a:solidFill>
                   <a:srgbClr val="064E3B"/>
                 </a:solidFill>
-                <a:latin typeface="Segoe UI"/>
+                <a:latin typeface="Segoe UI" panose="020B0502040204020203"/>
               </a:rPr>
               <a:t>Invoice photo → OCR pre-fill</a:t>
             </a:r>
+            <a:endParaRPr sz="1350" b="1" i="0">
+              <a:solidFill>
+                <a:srgbClr val="064E3B"/>
+              </a:solidFill>
+              <a:latin typeface="Segoe UI" panose="020B0502040204020203"/>
+            </a:endParaRPr>
           </a:p>
         </p:txBody>
       </p:sp>
@@ -16685,7 +17591,7 @@
           <a:noFill/>
         </p:spPr>
         <p:txBody>
-          <a:bodyPr wrap="square" anchor="t" lIns="0" rIns="0" tIns="0" bIns="0">
+          <a:bodyPr wrap="square" lIns="0" tIns="0" rIns="0" bIns="0" anchor="t">
             <a:spAutoFit/>
           </a:bodyPr>
           <a:lstStyle/>
@@ -16706,10 +17612,16 @@
                 <a:solidFill>
                   <a:srgbClr val="475569"/>
                 </a:solidFill>
-                <a:latin typeface="Segoe UI"/>
+                <a:latin typeface="Segoe UI" panose="020B0502040204020203"/>
               </a:rPr>
               <a:t>Photograph a paper invoice; vision-LLM pre-fills the same guided flow field-by-field — every field still needs a human YES.</a:t>
             </a:r>
+            <a:endParaRPr sz="1080" b="0" i="0">
+              <a:solidFill>
+                <a:srgbClr val="475569"/>
+              </a:solidFill>
+              <a:latin typeface="Segoe UI" panose="020B0502040204020203"/>
+            </a:endParaRPr>
           </a:p>
         </p:txBody>
       </p:sp>
@@ -16822,7 +17734,7 @@
           <a:noFill/>
         </p:spPr>
         <p:txBody>
-          <a:bodyPr wrap="square" anchor="t" lIns="0" rIns="0" tIns="0" bIns="0">
+          <a:bodyPr wrap="square" lIns="0" tIns="0" rIns="0" bIns="0" anchor="t">
             <a:spAutoFit/>
           </a:bodyPr>
           <a:lstStyle/>
@@ -16843,10 +17755,16 @@
                 <a:solidFill>
                   <a:srgbClr val="064E3B"/>
                 </a:solidFill>
-                <a:latin typeface="Segoe UI"/>
+                <a:latin typeface="Segoe UI" panose="020B0502040204020203"/>
               </a:rPr>
               <a:t>Branded PDF invoices</a:t>
             </a:r>
+            <a:endParaRPr sz="1350" b="1" i="0">
+              <a:solidFill>
+                <a:srgbClr val="064E3B"/>
+              </a:solidFill>
+              <a:latin typeface="Segoe UI" panose="020B0502040204020203"/>
+            </a:endParaRPr>
           </a:p>
         </p:txBody>
       </p:sp>
@@ -16867,7 +17785,7 @@
           <a:noFill/>
         </p:spPr>
         <p:txBody>
-          <a:bodyPr wrap="square" anchor="t" lIns="0" rIns="0" tIns="0" bIns="0">
+          <a:bodyPr wrap="square" lIns="0" tIns="0" rIns="0" bIns="0" anchor="t">
             <a:spAutoFit/>
           </a:bodyPr>
           <a:lstStyle/>
@@ -16888,10 +17806,16 @@
                 <a:solidFill>
                   <a:srgbClr val="475569"/>
                 </a:solidFill>
-                <a:latin typeface="Segoe UI"/>
+                <a:latin typeface="Segoe UI" panose="020B0502040204020203"/>
               </a:rPr>
               <a:t>Auto-generated, Unicode-script aware (Hindi/Odia/English), delivered straight to the dealer on WhatsApp.</a:t>
             </a:r>
+            <a:endParaRPr sz="1080" b="0" i="0">
+              <a:solidFill>
+                <a:srgbClr val="475569"/>
+              </a:solidFill>
+              <a:latin typeface="Segoe UI" panose="020B0502040204020203"/>
+            </a:endParaRPr>
           </a:p>
         </p:txBody>
       </p:sp>
@@ -17004,7 +17928,7 @@
           <a:noFill/>
         </p:spPr>
         <p:txBody>
-          <a:bodyPr wrap="square" anchor="t" lIns="0" rIns="0" tIns="0" bIns="0">
+          <a:bodyPr wrap="square" lIns="0" tIns="0" rIns="0" bIns="0" anchor="t">
             <a:spAutoFit/>
           </a:bodyPr>
           <a:lstStyle/>
@@ -17025,10 +17949,16 @@
                 <a:solidFill>
                   <a:srgbClr val="064E3B"/>
                 </a:solidFill>
-                <a:latin typeface="Segoe UI"/>
+                <a:latin typeface="Segoe UI" panose="020B0502040204020203"/>
               </a:rPr>
               <a:t>Edit, void &amp; stock-take</a:t>
             </a:r>
+            <a:endParaRPr sz="1350" b="1" i="0">
+              <a:solidFill>
+                <a:srgbClr val="064E3B"/>
+              </a:solidFill>
+              <a:latin typeface="Segoe UI" panose="020B0502040204020203"/>
+            </a:endParaRPr>
           </a:p>
         </p:txBody>
       </p:sp>
@@ -17049,7 +17979,7 @@
           <a:noFill/>
         </p:spPr>
         <p:txBody>
-          <a:bodyPr wrap="square" anchor="t" lIns="0" rIns="0" tIns="0" bIns="0">
+          <a:bodyPr wrap="square" lIns="0" tIns="0" rIns="0" bIns="0" anchor="t">
             <a:spAutoFit/>
           </a:bodyPr>
           <a:lstStyle/>
@@ -17070,10 +18000,16 @@
                 <a:solidFill>
                   <a:srgbClr val="475569"/>
                 </a:solidFill>
-                <a:latin typeface="Segoe UI"/>
+                <a:latin typeface="Segoe UI" panose="020B0502040204020203"/>
               </a:rPr>
               <a:t>Full audit trail (old → new, optional reason) on every correction; risky auto-reallocation deliberately left out for safety.</a:t>
             </a:r>
+            <a:endParaRPr sz="1080" b="0" i="0">
+              <a:solidFill>
+                <a:srgbClr val="475569"/>
+              </a:solidFill>
+              <a:latin typeface="Segoe UI" panose="020B0502040204020203"/>
+            </a:endParaRPr>
           </a:p>
         </p:txBody>
       </p:sp>
@@ -17186,7 +18122,7 @@
           <a:noFill/>
         </p:spPr>
         <p:txBody>
-          <a:bodyPr wrap="square" anchor="t" lIns="0" rIns="0" tIns="0" bIns="0">
+          <a:bodyPr wrap="square" lIns="0" tIns="0" rIns="0" bIns="0" anchor="t">
             <a:spAutoFit/>
           </a:bodyPr>
           <a:lstStyle/>
@@ -17207,10 +18143,16 @@
                 <a:solidFill>
                   <a:srgbClr val="064E3B"/>
                 </a:solidFill>
-                <a:latin typeface="Segoe UI"/>
+                <a:latin typeface="Segoe UI" panose="020B0502040204020203"/>
               </a:rPr>
               <a:t>Marketing broadcast</a:t>
             </a:r>
+            <a:endParaRPr sz="1350" b="1" i="0">
+              <a:solidFill>
+                <a:srgbClr val="064E3B"/>
+              </a:solidFill>
+              <a:latin typeface="Segoe UI" panose="020B0502040204020203"/>
+            </a:endParaRPr>
           </a:p>
         </p:txBody>
       </p:sp>
@@ -17231,7 +18173,7 @@
           <a:noFill/>
         </p:spPr>
         <p:txBody>
-          <a:bodyPr wrap="square" anchor="t" lIns="0" rIns="0" tIns="0" bIns="0">
+          <a:bodyPr wrap="square" lIns="0" tIns="0" rIns="0" bIns="0" anchor="t">
             <a:spAutoFit/>
           </a:bodyPr>
           <a:lstStyle/>
@@ -17252,10 +18194,16 @@
                 <a:solidFill>
                   <a:srgbClr val="475569"/>
                 </a:solidFill>
-                <a:latin typeface="Segoe UI"/>
+                <a:latin typeface="Segoe UI" panose="020B0502040204020203"/>
               </a:rPr>
               <a:t>Opt-in only, segment by all/overdue/named dealers, re-derives the recipient list fresh at send time.</a:t>
             </a:r>
+            <a:endParaRPr sz="1080" b="0" i="0">
+              <a:solidFill>
+                <a:srgbClr val="475569"/>
+              </a:solidFill>
+              <a:latin typeface="Segoe UI" panose="020B0502040204020203"/>
+            </a:endParaRPr>
           </a:p>
         </p:txBody>
       </p:sp>
@@ -17320,7 +18268,7 @@
           <a:noFill/>
         </p:spPr>
         <p:txBody>
-          <a:bodyPr wrap="square" anchor="t" lIns="0" rIns="0" tIns="0" bIns="0">
+          <a:bodyPr wrap="square" lIns="0" tIns="0" rIns="0" bIns="0" anchor="t">
             <a:spAutoFit/>
           </a:bodyPr>
           <a:lstStyle/>
@@ -17338,10 +18286,16 @@
                 <a:solidFill>
                   <a:srgbClr val="475569"/>
                 </a:solidFill>
-                <a:latin typeface="Segoe UI"/>
+                <a:latin typeface="Segoe UI" panose="020B0502040204020203"/>
               </a:rPr>
               <a:t>OpsGenie</a:t>
             </a:r>
+            <a:endParaRPr sz="1000" b="1" i="0">
+              <a:solidFill>
+                <a:srgbClr val="475569"/>
+              </a:solidFill>
+              <a:latin typeface="Segoe UI" panose="020B0502040204020203"/>
+            </a:endParaRPr>
           </a:p>
         </p:txBody>
       </p:sp>
@@ -17362,7 +18316,7 @@
           <a:noFill/>
         </p:spPr>
         <p:txBody>
-          <a:bodyPr wrap="square" anchor="t" lIns="0" rIns="0" tIns="0" bIns="0">
+          <a:bodyPr wrap="square" lIns="0" tIns="0" rIns="0" bIns="0" anchor="t">
             <a:spAutoFit/>
           </a:bodyPr>
           <a:lstStyle/>
@@ -17380,10 +18334,16 @@
                 <a:solidFill>
                   <a:srgbClr val="475569"/>
                 </a:solidFill>
-                <a:latin typeface="Segoe UI"/>
+                <a:latin typeface="Segoe UI" panose="020B0502040204020203"/>
               </a:rPr>
               <a:t>8</a:t>
             </a:r>
+            <a:endParaRPr sz="1000" b="0" i="0">
+              <a:solidFill>
+                <a:srgbClr val="475569"/>
+              </a:solidFill>
+              <a:latin typeface="Segoe UI" panose="020B0502040204020203"/>
+            </a:endParaRPr>
           </a:p>
         </p:txBody>
       </p:sp>
@@ -17396,7 +18356,7 @@
 </file>
 
 <file path=ppt/slides/slide9.xml><?xml version="1.0" encoding="utf-8"?>
-<p:sld xmlns:a="http://schemas.openxmlformats.org/drawingml/2006/main" xmlns:p="http://schemas.openxmlformats.org/presentationml/2006/main" xmlns:r="http://schemas.openxmlformats.org/officeDocument/2006/relationships">
+<p:sld xmlns:a="http://schemas.openxmlformats.org/drawingml/2006/main" xmlns:r="http://schemas.openxmlformats.org/officeDocument/2006/relationships" xmlns:p="http://schemas.openxmlformats.org/presentationml/2006/main">
   <p:cSld>
     <p:bg>
       <p:bgPr>
@@ -17474,7 +18434,7 @@
           <a:noFill/>
         </p:spPr>
         <p:txBody>
-          <a:bodyPr wrap="square" anchor="t" lIns="0" rIns="0" tIns="0" bIns="0">
+          <a:bodyPr wrap="square" lIns="0" tIns="0" rIns="0" bIns="0" anchor="t">
             <a:spAutoFit/>
           </a:bodyPr>
           <a:lstStyle/>
@@ -17492,10 +18452,16 @@
                 <a:solidFill>
                   <a:srgbClr val="10B981"/>
                 </a:solidFill>
-                <a:latin typeface="Segoe UI"/>
+                <a:latin typeface="Segoe UI" panose="020B0502040204020203"/>
               </a:rPr>
               <a:t>EVERYTHING WE’VE BUILT · 3 OF 4</a:t>
             </a:r>
+            <a:endParaRPr sz="1250" b="1" i="0">
+              <a:solidFill>
+                <a:srgbClr val="10B981"/>
+              </a:solidFill>
+              <a:latin typeface="Segoe UI" panose="020B0502040204020203"/>
+            </a:endParaRPr>
           </a:p>
         </p:txBody>
       </p:sp>
@@ -17516,7 +18482,7 @@
           <a:noFill/>
         </p:spPr>
         <p:txBody>
-          <a:bodyPr wrap="square" anchor="t" lIns="0" rIns="0" tIns="0" bIns="0">
+          <a:bodyPr wrap="square" lIns="0" tIns="0" rIns="0" bIns="0" anchor="t">
             <a:spAutoFit/>
           </a:bodyPr>
           <a:lstStyle/>
@@ -17537,10 +18503,16 @@
                 <a:solidFill>
                   <a:srgbClr val="064E3B"/>
                 </a:solidFill>
-                <a:latin typeface="Segoe UI"/>
+                <a:latin typeface="Segoe UI" panose="020B0502040204020203"/>
               </a:rPr>
               <a:t>Vyapar/Tally-grade reports, without leaving WhatsApp</a:t>
             </a:r>
+            <a:endParaRPr sz="2600" b="1" i="0">
+              <a:solidFill>
+                <a:srgbClr val="064E3B"/>
+              </a:solidFill>
+              <a:latin typeface="Segoe UI" panose="020B0502040204020203"/>
+            </a:endParaRPr>
           </a:p>
         </p:txBody>
       </p:sp>
@@ -17653,7 +18625,7 @@
           <a:noFill/>
         </p:spPr>
         <p:txBody>
-          <a:bodyPr wrap="square" anchor="t" lIns="0" rIns="0" tIns="0" bIns="0">
+          <a:bodyPr wrap="square" lIns="0" tIns="0" rIns="0" bIns="0" anchor="t">
             <a:spAutoFit/>
           </a:bodyPr>
           <a:lstStyle/>
@@ -17674,10 +18646,16 @@
                 <a:solidFill>
                   <a:srgbClr val="064E3B"/>
                 </a:solidFill>
-                <a:latin typeface="Segoe UI"/>
+                <a:latin typeface="Segoe UI" panose="020B0502040204020203"/>
               </a:rPr>
               <a:t>GST sales &amp; purchase registers</a:t>
             </a:r>
+            <a:endParaRPr sz="1350" b="1" i="0">
+              <a:solidFill>
+                <a:srgbClr val="064E3B"/>
+              </a:solidFill>
+              <a:latin typeface="Segoe UI" panose="020B0502040204020203"/>
+            </a:endParaRPr>
           </a:p>
         </p:txBody>
       </p:sp>
@@ -17698,7 +18676,7 @@
           <a:noFill/>
         </p:spPr>
         <p:txBody>
-          <a:bodyPr wrap="square" anchor="t" lIns="0" rIns="0" tIns="0" bIns="0">
+          <a:bodyPr wrap="square" lIns="0" tIns="0" rIns="0" bIns="0" anchor="t">
             <a:spAutoFit/>
           </a:bodyPr>
           <a:lstStyle/>
@@ -17719,10 +18697,16 @@
                 <a:solidFill>
                   <a:srgbClr val="475569"/>
                 </a:solidFill>
-                <a:latin typeface="Segoe UI"/>
+                <a:latin typeface="Segoe UI" panose="020B0502040204020203"/>
               </a:rPr>
               <a:t>Rate-wise summary, per-invoice-line detail — requested straight from a WhatsApp chat.</a:t>
             </a:r>
+            <a:endParaRPr sz="1080" b="0" i="0">
+              <a:solidFill>
+                <a:srgbClr val="475569"/>
+              </a:solidFill>
+              <a:latin typeface="Segoe UI" panose="020B0502040204020203"/>
+            </a:endParaRPr>
           </a:p>
         </p:txBody>
       </p:sp>
@@ -17835,7 +18819,7 @@
           <a:noFill/>
         </p:spPr>
         <p:txBody>
-          <a:bodyPr wrap="square" anchor="t" lIns="0" rIns="0" tIns="0" bIns="0">
+          <a:bodyPr wrap="square" lIns="0" tIns="0" rIns="0" bIns="0" anchor="t">
             <a:spAutoFit/>
           </a:bodyPr>
           <a:lstStyle/>
@@ -17856,10 +18840,16 @@
                 <a:solidFill>
                   <a:srgbClr val="064E3B"/>
                 </a:solidFill>
-                <a:latin typeface="Segoe UI"/>
+                <a:latin typeface="Segoe UI" panose="020B0502040204020203"/>
               </a:rPr>
               <a:t>Ledger, day book &amp; aging report</a:t>
             </a:r>
+            <a:endParaRPr sz="1350" b="1" i="0">
+              <a:solidFill>
+                <a:srgbClr val="064E3B"/>
+              </a:solidFill>
+              <a:latin typeface="Segoe UI" panose="020B0502040204020203"/>
+            </a:endParaRPr>
           </a:p>
         </p:txBody>
       </p:sp>
@@ -17880,7 +18870,7 @@
           <a:noFill/>
         </p:spPr>
         <p:txBody>
-          <a:bodyPr wrap="square" anchor="t" lIns="0" rIns="0" tIns="0" bIns="0">
+          <a:bodyPr wrap="square" lIns="0" tIns="0" rIns="0" bIns="0" anchor="t">
             <a:spAutoFit/>
           </a:bodyPr>
           <a:lstStyle/>
@@ -17901,10 +18891,16 @@
                 <a:solidFill>
                   <a:srgbClr val="475569"/>
                 </a:solidFill>
-                <a:latin typeface="Segoe UI"/>
+                <a:latin typeface="Segoe UI" panose="020B0502040204020203"/>
               </a:rPr>
               <a:t>Opening → running → closing balance; aging bucketed Not Due / 0-30 / 31-60 / 61-90 / 90+.</a:t>
             </a:r>
+            <a:endParaRPr sz="1080" b="0" i="0">
+              <a:solidFill>
+                <a:srgbClr val="475569"/>
+              </a:solidFill>
+              <a:latin typeface="Segoe UI" panose="020B0502040204020203"/>
+            </a:endParaRPr>
           </a:p>
         </p:txBody>
       </p:sp>
@@ -18017,7 +19013,7 @@
           <a:noFill/>
         </p:spPr>
         <p:txBody>
-          <a:bodyPr wrap="square" anchor="t" lIns="0" rIns="0" tIns="0" bIns="0">
+          <a:bodyPr wrap="square" lIns="0" tIns="0" rIns="0" bIns="0" anchor="t">
             <a:spAutoFit/>
           </a:bodyPr>
           <a:lstStyle/>
@@ -18038,10 +19034,16 @@
                 <a:solidFill>
                   <a:srgbClr val="064E3B"/>
                 </a:solidFill>
-                <a:latin typeface="Segoe UI"/>
+                <a:latin typeface="Segoe UI" panose="020B0502040204020203"/>
               </a:rPr>
               <a:t>Full Excel export</a:t>
             </a:r>
+            <a:endParaRPr sz="1350" b="1" i="0">
+              <a:solidFill>
+                <a:srgbClr val="064E3B"/>
+              </a:solidFill>
+              <a:latin typeface="Segoe UI" panose="020B0502040204020203"/>
+            </a:endParaRPr>
           </a:p>
         </p:txBody>
       </p:sp>
@@ -18062,7 +19064,7 @@
           <a:noFill/>
         </p:spPr>
         <p:txBody>
-          <a:bodyPr wrap="square" anchor="t" lIns="0" rIns="0" tIns="0" bIns="0">
+          <a:bodyPr wrap="square" lIns="0" tIns="0" rIns="0" bIns="0" anchor="t">
             <a:spAutoFit/>
           </a:bodyPr>
           <a:lstStyle/>
@@ -18083,10 +19085,16 @@
                 <a:solidFill>
                   <a:srgbClr val="475569"/>
                 </a:solidFill>
-                <a:latin typeface="Segoe UI"/>
+                <a:latin typeface="Segoe UI" panose="020B0502040204020203"/>
               </a:rPr>
               <a:t>An 11-sheet workbook per company, via a short-lived signed link — no login required.</a:t>
             </a:r>
+            <a:endParaRPr sz="1080" b="0" i="0">
+              <a:solidFill>
+                <a:srgbClr val="475569"/>
+              </a:solidFill>
+              <a:latin typeface="Segoe UI" panose="020B0502040204020203"/>
+            </a:endParaRPr>
           </a:p>
         </p:txBody>
       </p:sp>
@@ -18199,7 +19207,7 @@
           <a:noFill/>
         </p:spPr>
         <p:txBody>
-          <a:bodyPr wrap="square" anchor="t" lIns="0" rIns="0" tIns="0" bIns="0">
+          <a:bodyPr wrap="square" lIns="0" tIns="0" rIns="0" bIns="0" anchor="t">
             <a:spAutoFit/>
           </a:bodyPr>
           <a:lstStyle/>
@@ -18220,10 +19228,16 @@
                 <a:solidFill>
                   <a:srgbClr val="064E3B"/>
                 </a:solidFill>
-                <a:latin typeface="Segoe UI"/>
+                <a:latin typeface="Segoe UI" panose="020B0502040204020203"/>
               </a:rPr>
               <a:t>Flexible import pipeline</a:t>
             </a:r>
+            <a:endParaRPr sz="1350" b="1" i="0">
+              <a:solidFill>
+                <a:srgbClr val="064E3B"/>
+              </a:solidFill>
+              <a:latin typeface="Segoe UI" panose="020B0502040204020203"/>
+            </a:endParaRPr>
           </a:p>
         </p:txBody>
       </p:sp>
@@ -18244,7 +19258,7 @@
           <a:noFill/>
         </p:spPr>
         <p:txBody>
-          <a:bodyPr wrap="square" anchor="t" lIns="0" rIns="0" tIns="0" bIns="0">
+          <a:bodyPr wrap="square" lIns="0" tIns="0" rIns="0" bIns="0" anchor="t">
             <a:spAutoFit/>
           </a:bodyPr>
           <a:lstStyle/>
@@ -18265,10 +19279,16 @@
                 <a:solidFill>
                   <a:srgbClr val="475569"/>
                 </a:solidFill>
-                <a:latin typeface="Segoe UI"/>
+                <a:latin typeface="Segoe UI" panose="020B0502040204020203"/>
               </a:rPr>
               <a:t>Tally, Vyapar, canonical CSV/Excel — and now Tally “Multi Voucher Print” PDFs, parsed directly.</a:t>
             </a:r>
+            <a:endParaRPr sz="1080" b="0" i="0">
+              <a:solidFill>
+                <a:srgbClr val="475569"/>
+              </a:solidFill>
+              <a:latin typeface="Segoe UI" panose="020B0502040204020203"/>
+            </a:endParaRPr>
           </a:p>
         </p:txBody>
       </p:sp>
@@ -18381,7 +19401,7 @@
           <a:noFill/>
         </p:spPr>
         <p:txBody>
-          <a:bodyPr wrap="square" anchor="t" lIns="0" rIns="0" tIns="0" bIns="0">
+          <a:bodyPr wrap="square" lIns="0" tIns="0" rIns="0" bIns="0" anchor="t">
             <a:spAutoFit/>
           </a:bodyPr>
           <a:lstStyle/>
@@ -18402,10 +19422,16 @@
                 <a:solidFill>
                   <a:srgbClr val="064E3B"/>
                 </a:solidFill>
-                <a:latin typeface="Segoe UI"/>
+                <a:latin typeface="Segoe UI" panose="020B0502040204020203"/>
               </a:rPr>
               <a:t>Self-serve reconciliation</a:t>
             </a:r>
+            <a:endParaRPr sz="1350" b="1" i="0">
+              <a:solidFill>
+                <a:srgbClr val="064E3B"/>
+              </a:solidFill>
+              <a:latin typeface="Segoe UI" panose="020B0502040204020203"/>
+            </a:endParaRPr>
           </a:p>
         </p:txBody>
       </p:sp>
@@ -18426,7 +19452,7 @@
           <a:noFill/>
         </p:spPr>
         <p:txBody>
-          <a:bodyPr wrap="square" anchor="t" lIns="0" rIns="0" tIns="0" bIns="0">
+          <a:bodyPr wrap="square" lIns="0" tIns="0" rIns="0" bIns="0" anchor="t">
             <a:spAutoFit/>
           </a:bodyPr>
           <a:lstStyle/>
@@ -18447,10 +19473,16 @@
                 <a:solidFill>
                   <a:srgbClr val="475569"/>
                 </a:solidFill>
-                <a:latin typeface="Segoe UI"/>
+                <a:latin typeface="Segoe UI" panose="020B0502040204020203"/>
               </a:rPr>
               <a:t>Import totals shown and confirmed before WhatsApp ever starts — catch mistakes on a form, not mid-conversation.</a:t>
             </a:r>
+            <a:endParaRPr sz="1080" b="0" i="0">
+              <a:solidFill>
+                <a:srgbClr val="475569"/>
+              </a:solidFill>
+              <a:latin typeface="Segoe UI" panose="020B0502040204020203"/>
+            </a:endParaRPr>
           </a:p>
         </p:txBody>
       </p:sp>
@@ -18563,7 +19595,7 @@
           <a:noFill/>
         </p:spPr>
         <p:txBody>
-          <a:bodyPr wrap="square" anchor="t" lIns="0" rIns="0" tIns="0" bIns="0">
+          <a:bodyPr wrap="square" lIns="0" tIns="0" rIns="0" bIns="0" anchor="t">
             <a:spAutoFit/>
           </a:bodyPr>
           <a:lstStyle/>
@@ -18584,10 +19616,16 @@
                 <a:solidFill>
                   <a:srgbClr val="064E3B"/>
                 </a:solidFill>
-                <a:latin typeface="Segoe UI"/>
+                <a:latin typeface="Segoe UI" panose="020B0502040204020203"/>
               </a:rPr>
               <a:t>Delivery status visibility</a:t>
             </a:r>
+            <a:endParaRPr sz="1350" b="1" i="0">
+              <a:solidFill>
+                <a:srgbClr val="064E3B"/>
+              </a:solidFill>
+              <a:latin typeface="Segoe UI" panose="020B0502040204020203"/>
+            </a:endParaRPr>
           </a:p>
         </p:txBody>
       </p:sp>
@@ -18608,7 +19646,7 @@
           <a:noFill/>
         </p:spPr>
         <p:txBody>
-          <a:bodyPr wrap="square" anchor="t" lIns="0" rIns="0" tIns="0" bIns="0">
+          <a:bodyPr wrap="square" lIns="0" tIns="0" rIns="0" bIns="0" anchor="t">
             <a:spAutoFit/>
           </a:bodyPr>
           <a:lstStyle/>
@@ -18629,10 +19667,16 @@
                 <a:solidFill>
                   <a:srgbClr val="475569"/>
                 </a:solidFill>
-                <a:latin typeface="Segoe UI"/>
+                <a:latin typeface="Segoe UI" panose="020B0502040204020203"/>
               </a:rPr>
               <a:t>“Was that invoice PDF actually delivered?” — answerable on demand from real Meta delivery receipts.</a:t>
             </a:r>
+            <a:endParaRPr sz="1080" b="0" i="0">
+              <a:solidFill>
+                <a:srgbClr val="475569"/>
+              </a:solidFill>
+              <a:latin typeface="Segoe UI" panose="020B0502040204020203"/>
+            </a:endParaRPr>
           </a:p>
         </p:txBody>
       </p:sp>
@@ -18697,7 +19741,7 @@
           <a:noFill/>
         </p:spPr>
         <p:txBody>
-          <a:bodyPr wrap="square" anchor="t" lIns="0" rIns="0" tIns="0" bIns="0">
+          <a:bodyPr wrap="square" lIns="0" tIns="0" rIns="0" bIns="0" anchor="t">
             <a:spAutoFit/>
           </a:bodyPr>
           <a:lstStyle/>
@@ -18715,10 +19759,16 @@
                 <a:solidFill>
                   <a:srgbClr val="475569"/>
                 </a:solidFill>
-                <a:latin typeface="Segoe UI"/>
+                <a:latin typeface="Segoe UI" panose="020B0502040204020203"/>
               </a:rPr>
               <a:t>OpsGenie</a:t>
             </a:r>
+            <a:endParaRPr sz="1000" b="1" i="0">
+              <a:solidFill>
+                <a:srgbClr val="475569"/>
+              </a:solidFill>
+              <a:latin typeface="Segoe UI" panose="020B0502040204020203"/>
+            </a:endParaRPr>
           </a:p>
         </p:txBody>
       </p:sp>
@@ -18739,7 +19789,7 @@
           <a:noFill/>
         </p:spPr>
         <p:txBody>
-          <a:bodyPr wrap="square" anchor="t" lIns="0" rIns="0" tIns="0" bIns="0">
+          <a:bodyPr wrap="square" lIns="0" tIns="0" rIns="0" bIns="0" anchor="t">
             <a:spAutoFit/>
           </a:bodyPr>
           <a:lstStyle/>
@@ -18757,10 +19807,16 @@
                 <a:solidFill>
                   <a:srgbClr val="475569"/>
                 </a:solidFill>
-                <a:latin typeface="Segoe UI"/>
+                <a:latin typeface="Segoe UI" panose="020B0502040204020203"/>
               </a:rPr>
               <a:t>9</a:t>
             </a:r>
+            <a:endParaRPr sz="1000" b="0" i="0">
+              <a:solidFill>
+                <a:srgbClr val="475569"/>
+              </a:solidFill>
+              <a:latin typeface="Segoe UI" panose="020B0502040204020203"/>
+            </a:endParaRPr>
           </a:p>
         </p:txBody>
       </p:sp>
@@ -19088,6 +20144,10 @@
       </a:style>
     </a:lnDef>
   </a:objectDefaults>
-  <a:extraClrSchemeLst/>
+  <a:extLst>
+    <a:ext uri="{05A4C25C-085E-4340-85A3-A5531E510DB2}">
+      <thm15:themeFamily xmlns:thm15="http://schemas.microsoft.com/office/thememl/2012/main" name="Office Theme" id="{62F939B6-93AF-4DB8-9C6B-D6C7DFDC589F}" vid="{4A3C46E8-61CC-4603-A589-7422A47A8E4A}"/>
+    </a:ext>
+  </a:extLst>
 </a:theme>
 </file>